--- a/Planning docs/Slides/lesson-13-1-teacher-slides.pptx
+++ b/Planning docs/Slides/lesson-13-1-teacher-slides.pptx
@@ -21,9 +21,12 @@
     <p:sldId id="269" r:id="rId15"/>
     <p:sldId id="270" r:id="rId16"/>
     <p:sldId id="271" r:id="rId17"/>
+    <p:sldId id="272" r:id="rId18"/>
+    <p:sldId id="273" r:id="rId19"/>
+    <p:sldId id="274" r:id="rId20"/>
   </p:sldIdLst>
   <p:notesMasterIdLst>
-    <p:notesMasterId r:id="rId18"/>
+    <p:notesMasterId r:id="rId21"/>
   </p:notesMasterIdLst>
   <p:sldSz cx="9144000" cy="5143500"/>
   <p:notesSz cx="5143500" cy="9144000"/>
@@ -605,7 +608,7 @@
           <a:p>
             <a:r>
               <a:rPr lang="en-US" dirty="0"/>
-              <a:t>Each word appears in the chapters read this week, in the author’s own sentence.</a:t>
+              <a:t>Break the word into base + word part. Ask what the part adds to the meaning.</a:t>
             </a:r>
             <a:endParaRPr lang="en-US" dirty="0"/>
           </a:p>
@@ -693,7 +696,7 @@
           <a:p>
             <a:r>
               <a:rPr lang="en-US" dirty="0"/>
-              <a:t>Answers: she?”, “Gone,”, shouted,, go,”</a:t>
+              <a:t>Each word appears in the chapters read this week, in the author’s own sentence.</a:t>
             </a:r>
             <a:endParaRPr lang="en-US" dirty="0"/>
           </a:p>
@@ -781,7 +784,9 @@
           <a:p>
             <a:r>
               <a:rPr lang="en-US" dirty="0"/>
-              <a:t>Answers: she?”, “Gone,”, shouted,, go,”</a:t>
+              <a:t>Let students talk through the questions before revealing the pattern.
+The extra words describe the nouns. A word that describes a noun is an adjective.
+Small and trembling describe the mouse. Dark describes the corridor.</a:t>
             </a:r>
             <a:endParaRPr lang="en-US" dirty="0"/>
           </a:p>
@@ -869,7 +874,9 @@
           <a:p>
             <a:r>
               <a:rPr lang="en-US" dirty="0"/>
-              <a:t>Soft (/s/ or /j/): mice, prince, magic, gentle | Hard (/k/ or /g/): Cook, candle, gold, garlic</a:t>
+              <a:t>Let students talk through the questions before revealing the pattern.
+The extra words describe the nouns. A word that describes a noun is an adjective.
+Small and trembling describe the mouse. Dark describes the corridor.</a:t>
             </a:r>
             <a:endParaRPr lang="en-US" dirty="0"/>
           </a:p>
@@ -957,7 +964,7 @@
           <a:p>
             <a:r>
               <a:rPr lang="en-US" dirty="0"/>
-              <a:t>Soft (/s/ or /j/): mice, prince, magic, gentle | Hard (/k/ or /g/): Cook, candle, gold, garlic</a:t>
+              <a:t>Group 1: mouse, corridor, thread, princess | Group 2: small, trembling, dark, golden</a:t>
             </a:r>
             <a:endParaRPr lang="en-US" dirty="0"/>
           </a:p>
@@ -1045,7 +1052,7 @@
           <a:p>
             <a:r>
               <a:rPr lang="en-US" dirty="0"/>
-              <a:t>Read the chapters, then return to the pause questions.</a:t>
+              <a:t>Group 1: mouse, corridor, thread, princess | Group 2: small, trembling, dark, golden</a:t>
             </a:r>
             <a:endParaRPr lang="en-US" dirty="0"/>
           </a:p>
@@ -1133,7 +1140,7 @@
           <a:p>
             <a:r>
               <a:rPr lang="en-US" dirty="0"/>
-              <a:t>Writer’s Workshop stage for the week.</a:t>
+              <a:t>Closed 1st syllable: rabbit, basket, kitten, blanket | Other pattern: castle, garden</a:t>
             </a:r>
             <a:endParaRPr lang="en-US" dirty="0"/>
           </a:p>
@@ -1157,6 +1164,270 @@
             <a:fld id="{F7021451-1387-4CA6-816F-3879F97B5CBC}" type="slidenum">
               <a:rPr lang="en-US"/>
               <a:t>16</a:t>
+            </a:fld>
+            <a:endParaRPr lang="en-US"/>
+          </a:p>
+        </p:txBody>
+      </p:sp>
+    </p:spTree>
+    <p:extLst>
+      <p:ext uri="{BB962C8B-B14F-4D97-AF65-F5344CB8AC3E}">
+        <p14:creationId xmlns:p14="http://schemas.microsoft.com/office/powerpoint/2010/main" val="1024086991"/>
+      </p:ext>
+    </p:extLst>
+  </p:cSld>
+  <p:clrMapOvr>
+    <a:masterClrMapping/>
+  </p:clrMapOvr>
+</p:notes>
+</file>
+
+<file path=ppt/notesSlides/notesSlide17.xml><?xml version="1.0" encoding="utf-8"?>
+<p:notes xmlns:a="http://schemas.openxmlformats.org/drawingml/2006/main" xmlns:r="http://schemas.openxmlformats.org/officeDocument/2006/relationships" xmlns:p="http://schemas.openxmlformats.org/presentationml/2006/main">
+  <p:cSld>
+    <p:spTree>
+      <p:nvGrpSpPr>
+        <p:cNvPr id="1" name=""/>
+        <p:cNvGrpSpPr/>
+        <p:nvPr/>
+      </p:nvGrpSpPr>
+      <p:grpSpPr>
+        <a:xfrm>
+          <a:off x="0" y="0"/>
+          <a:ext cx="0" cy="0"/>
+          <a:chOff x="0" y="0"/>
+          <a:chExt cx="0" cy="0"/>
+        </a:xfrm>
+      </p:grpSpPr>
+      <p:sp>
+        <p:nvSpPr>
+          <p:cNvPr id="2" name="Slide Image Placeholder 1"/>
+          <p:cNvSpPr>
+            <a:spLocks noGrp="1" noRot="1" noChangeAspect="1"/>
+          </p:cNvSpPr>
+          <p:nvPr>
+            <p:ph type="sldImg"/>
+          </p:nvPr>
+        </p:nvSpPr>
+        <p:spPr/>
+      </p:sp>
+      <p:sp>
+        <p:nvSpPr>
+          <p:cNvPr id="3" name="Notes Placeholder 2"/>
+          <p:cNvSpPr>
+            <a:spLocks noGrp="1"/>
+          </p:cNvSpPr>
+          <p:nvPr>
+            <p:ph type="body" idx="1"/>
+          </p:nvPr>
+        </p:nvSpPr>
+        <p:spPr/>
+        <p:txBody>
+          <a:bodyPr/>
+          <a:lstStyle/>
+          <a:p>
+            <a:r>
+              <a:rPr lang="en-US" dirty="0"/>
+              <a:t>Closed 1st syllable: rabbit, basket, kitten, blanket | Other pattern: castle, garden</a:t>
+            </a:r>
+            <a:endParaRPr lang="en-US" dirty="0"/>
+          </a:p>
+        </p:txBody>
+      </p:sp>
+      <p:sp>
+        <p:nvSpPr>
+          <p:cNvPr id="4" name="Slide Number Placeholder 3"/>
+          <p:cNvSpPr>
+            <a:spLocks noGrp="1"/>
+          </p:cNvSpPr>
+          <p:nvPr>
+            <p:ph type="sldNum" sz="quarter" idx="10"/>
+          </p:nvPr>
+        </p:nvSpPr>
+        <p:spPr/>
+        <p:txBody>
+          <a:bodyPr/>
+          <a:lstStyle/>
+          <a:p>
+            <a:fld id="{F7021451-1387-4CA6-816F-3879F97B5CBC}" type="slidenum">
+              <a:rPr lang="en-US"/>
+              <a:t>17</a:t>
+            </a:fld>
+            <a:endParaRPr lang="en-US"/>
+          </a:p>
+        </p:txBody>
+      </p:sp>
+    </p:spTree>
+    <p:extLst>
+      <p:ext uri="{BB962C8B-B14F-4D97-AF65-F5344CB8AC3E}">
+        <p14:creationId xmlns:p14="http://schemas.microsoft.com/office/powerpoint/2010/main" val="1024086991"/>
+      </p:ext>
+    </p:extLst>
+  </p:cSld>
+  <p:clrMapOvr>
+    <a:masterClrMapping/>
+  </p:clrMapOvr>
+</p:notes>
+</file>
+
+<file path=ppt/notesSlides/notesSlide18.xml><?xml version="1.0" encoding="utf-8"?>
+<p:notes xmlns:a="http://schemas.openxmlformats.org/drawingml/2006/main" xmlns:r="http://schemas.openxmlformats.org/officeDocument/2006/relationships" xmlns:p="http://schemas.openxmlformats.org/presentationml/2006/main">
+  <p:cSld>
+    <p:spTree>
+      <p:nvGrpSpPr>
+        <p:cNvPr id="1" name=""/>
+        <p:cNvGrpSpPr/>
+        <p:nvPr/>
+      </p:nvGrpSpPr>
+      <p:grpSpPr>
+        <a:xfrm>
+          <a:off x="0" y="0"/>
+          <a:ext cx="0" cy="0"/>
+          <a:chOff x="0" y="0"/>
+          <a:chExt cx="0" cy="0"/>
+        </a:xfrm>
+      </p:grpSpPr>
+      <p:sp>
+        <p:nvSpPr>
+          <p:cNvPr id="2" name="Slide Image Placeholder 1"/>
+          <p:cNvSpPr>
+            <a:spLocks noGrp="1" noRot="1" noChangeAspect="1"/>
+          </p:cNvSpPr>
+          <p:nvPr>
+            <p:ph type="sldImg"/>
+          </p:nvPr>
+        </p:nvSpPr>
+        <p:spPr/>
+      </p:sp>
+      <p:sp>
+        <p:nvSpPr>
+          <p:cNvPr id="3" name="Notes Placeholder 2"/>
+          <p:cNvSpPr>
+            <a:spLocks noGrp="1"/>
+          </p:cNvSpPr>
+          <p:nvPr>
+            <p:ph type="body" idx="1"/>
+          </p:nvPr>
+        </p:nvSpPr>
+        <p:spPr/>
+        <p:txBody>
+          <a:bodyPr/>
+          <a:lstStyle/>
+          <a:p>
+            <a:r>
+              <a:rPr lang="en-US" dirty="0"/>
+              <a:t>Read the chapters, then return to the pause questions.</a:t>
+            </a:r>
+            <a:endParaRPr lang="en-US" dirty="0"/>
+          </a:p>
+        </p:txBody>
+      </p:sp>
+      <p:sp>
+        <p:nvSpPr>
+          <p:cNvPr id="4" name="Slide Number Placeholder 3"/>
+          <p:cNvSpPr>
+            <a:spLocks noGrp="1"/>
+          </p:cNvSpPr>
+          <p:nvPr>
+            <p:ph type="sldNum" sz="quarter" idx="10"/>
+          </p:nvPr>
+        </p:nvSpPr>
+        <p:spPr/>
+        <p:txBody>
+          <a:bodyPr/>
+          <a:lstStyle/>
+          <a:p>
+            <a:fld id="{F7021451-1387-4CA6-816F-3879F97B5CBC}" type="slidenum">
+              <a:rPr lang="en-US"/>
+              <a:t>18</a:t>
+            </a:fld>
+            <a:endParaRPr lang="en-US"/>
+          </a:p>
+        </p:txBody>
+      </p:sp>
+    </p:spTree>
+    <p:extLst>
+      <p:ext uri="{BB962C8B-B14F-4D97-AF65-F5344CB8AC3E}">
+        <p14:creationId xmlns:p14="http://schemas.microsoft.com/office/powerpoint/2010/main" val="1024086991"/>
+      </p:ext>
+    </p:extLst>
+  </p:cSld>
+  <p:clrMapOvr>
+    <a:masterClrMapping/>
+  </p:clrMapOvr>
+</p:notes>
+</file>
+
+<file path=ppt/notesSlides/notesSlide19.xml><?xml version="1.0" encoding="utf-8"?>
+<p:notes xmlns:a="http://schemas.openxmlformats.org/drawingml/2006/main" xmlns:r="http://schemas.openxmlformats.org/officeDocument/2006/relationships" xmlns:p="http://schemas.openxmlformats.org/presentationml/2006/main">
+  <p:cSld>
+    <p:spTree>
+      <p:nvGrpSpPr>
+        <p:cNvPr id="1" name=""/>
+        <p:cNvGrpSpPr/>
+        <p:nvPr/>
+      </p:nvGrpSpPr>
+      <p:grpSpPr>
+        <a:xfrm>
+          <a:off x="0" y="0"/>
+          <a:ext cx="0" cy="0"/>
+          <a:chOff x="0" y="0"/>
+          <a:chExt cx="0" cy="0"/>
+        </a:xfrm>
+      </p:grpSpPr>
+      <p:sp>
+        <p:nvSpPr>
+          <p:cNvPr id="2" name="Slide Image Placeholder 1"/>
+          <p:cNvSpPr>
+            <a:spLocks noGrp="1" noRot="1" noChangeAspect="1"/>
+          </p:cNvSpPr>
+          <p:nvPr>
+            <p:ph type="sldImg"/>
+          </p:nvPr>
+        </p:nvSpPr>
+        <p:spPr/>
+      </p:sp>
+      <p:sp>
+        <p:nvSpPr>
+          <p:cNvPr id="3" name="Notes Placeholder 2"/>
+          <p:cNvSpPr>
+            <a:spLocks noGrp="1"/>
+          </p:cNvSpPr>
+          <p:nvPr>
+            <p:ph type="body" idx="1"/>
+          </p:nvPr>
+        </p:nvSpPr>
+        <p:spPr/>
+        <p:txBody>
+          <a:bodyPr/>
+          <a:lstStyle/>
+          <a:p>
+            <a:r>
+              <a:rPr lang="en-US" dirty="0"/>
+              <a:t>Writer’s Workshop stage for the week.</a:t>
+            </a:r>
+            <a:endParaRPr lang="en-US" dirty="0"/>
+          </a:p>
+        </p:txBody>
+      </p:sp>
+      <p:sp>
+        <p:nvSpPr>
+          <p:cNvPr id="4" name="Slide Number Placeholder 3"/>
+          <p:cNvSpPr>
+            <a:spLocks noGrp="1"/>
+          </p:cNvSpPr>
+          <p:nvPr>
+            <p:ph type="sldNum" sz="quarter" idx="10"/>
+          </p:nvPr>
+        </p:nvSpPr>
+        <p:spPr/>
+        <p:txBody>
+          <a:bodyPr/>
+          <a:lstStyle/>
+          <a:p>
+            <a:fld id="{F7021451-1387-4CA6-816F-3879F97B5CBC}" type="slidenum">
+              <a:rPr lang="en-US"/>
+              <a:t>19</a:t>
             </a:fld>
             <a:endParaRPr lang="en-US"/>
           </a:p>
@@ -1573,7 +1844,7 @@
           <a:p>
             <a:r>
               <a:rPr lang="en-US" dirty="0"/>
-              <a:t>Reading lens: Good readers look for theme clues . A theme is a lesson the whole story teaches.</a:t>
+              <a:t>Reading lens: Good readers look for theme clues. A theme is a lesson the whole story teaches.</a:t>
             </a:r>
             <a:endParaRPr lang="en-US" dirty="0"/>
           </a:p>
@@ -1661,8 +1932,7 @@
           <a:p>
             <a:r>
               <a:rPr lang="en-US" dirty="0"/>
-              <a:t>Corrected:  1. The Princess Pea walked out of the dungeon and into the light of the great hall at last.
-Look for: Did you catch the proper nouns (Princess Pea, Despereaux), the -ly adverbs (slowly, bravely), and capital letters?</a:t>
+              <a:t>Tap through each highlighted word in the lesson and name what it does right before moving to the fix-it.</a:t>
             </a:r>
             <a:endParaRPr lang="en-US" dirty="0"/>
           </a:p>
@@ -1750,8 +2020,8 @@
           <a:p>
             <a:r>
               <a:rPr lang="en-US" dirty="0"/>
-              <a:t>Corrected:  1. The Princess Pea walked out of the dungeon and into the light of the great hall at last.
-Look for: Did you catch the proper nouns (Princess Pea, Despereaux), the -ly adverbs (slowly, bravely), and capital letters?</a:t>
+              <a:t>Corrected: The Princess Pea walked out of the dungeon and into the light of the great hall at last. 
+Look for: </a:t>
             </a:r>
             <a:endParaRPr lang="en-US" dirty="0"/>
           </a:p>
@@ -1839,7 +2109,8 @@
           <a:p>
             <a:r>
               <a:rPr lang="en-US" dirty="0"/>
-              <a:t>Break the word into base + word part. Ask what the part adds to the meaning.</a:t>
+              <a:t>Corrected: The Princess Pea walked out of the dungeon and into the light of the great hall at last. 
+Look for: </a:t>
             </a:r>
             <a:endParaRPr lang="en-US" dirty="0"/>
           </a:p>
@@ -2412,7 +2683,7 @@
             <a:avLst/>
           </a:prstGeom>
           <a:solidFill>
-            <a:srgbClr val="55C8E8"/>
+            <a:srgbClr val="8B6FC0"/>
           </a:solidFill>
           <a:ln/>
         </p:spPr>
@@ -2450,7 +2721,7 @@
                 <a:ea typeface="Calibri" pitchFamily="34" charset="-122"/>
                 <a:cs typeface="Calibri" pitchFamily="34" charset="-120"/>
               </a:rPr>
-              <a:t>🔤  Vocabulary</a:t>
+              <a:t>🌱  Morphology</a:t>
             </a:r>
             <a:endParaRPr lang="en-US" sz="2200" dirty="0"/>
           </a:p>
@@ -2483,13 +2754,13 @@
             <a:r>
               <a:rPr lang="en-US" sz="1100" b="1" spc="100" kern="0" dirty="0">
                 <a:solidFill>
-                  <a:srgbClr val="55C8E8"/>
-                </a:solidFill>
-                <a:latin typeface="Calibri" pitchFamily="34" charset="0"/>
-                <a:ea typeface="Calibri" pitchFamily="34" charset="-122"/>
-                <a:cs typeface="Calibri" pitchFamily="34" charset="-120"/>
-              </a:rPr>
-              <a:t>VOCABULARY</a:t>
+                  <a:srgbClr val="8B6FC0"/>
+                </a:solidFill>
+                <a:latin typeface="Calibri" pitchFamily="34" charset="0"/>
+                <a:ea typeface="Calibri" pitchFamily="34" charset="-122"/>
+                <a:cs typeface="Calibri" pitchFamily="34" charset="-120"/>
+              </a:rPr>
+              <a:t>NON-</a:t>
             </a:r>
             <a:endParaRPr lang="en-US" sz="1100" dirty="0"/>
           </a:p>
@@ -2504,15 +2775,15 @@
         <p:spPr>
           <a:xfrm>
             <a:off x="365760" y="1097280"/>
-            <a:ext cx="8412480" cy="658368"/>
+            <a:ext cx="8412480" cy="621792"/>
           </a:xfrm>
           <a:prstGeom prst="roundRect">
             <a:avLst>
-              <a:gd name="adj" fmla="val 13889"/>
+              <a:gd name="adj" fmla="val 14706"/>
             </a:avLst>
           </a:prstGeom>
           <a:solidFill>
-            <a:srgbClr val="E5F7FC"/>
+            <a:srgbClr val="F0E8FF"/>
           </a:solidFill>
           <a:ln/>
           <a:effectLst>
@@ -2532,38 +2803,24 @@
         </p:nvSpPr>
         <p:spPr>
           <a:xfrm>
-            <a:off x="594360" y="1225296"/>
-            <a:ext cx="7863840" cy="420624"/>
-          </a:xfrm>
-          <a:prstGeom prst="rect">
-            <a:avLst/>
-          </a:prstGeom>
-          <a:noFill/>
-          <a:ln/>
-        </p:spPr>
-        <p:txBody>
-          <a:bodyPr wrap="square" lIns="0" tIns="0" rIns="0" bIns="0" rtlCol="0" anchor="ctr"/>
-          <a:lstStyle/>
-          <a:p>
-            <a:pPr indent="0" marL="0">
-              <a:buNone/>
-            </a:pPr>
-            <a:r>
-              <a:rPr lang="en-US" sz="1700" b="1" dirty="0">
-                <a:solidFill>
-                  <a:srgbClr val="0E1C42"/>
-                </a:solidFill>
-                <a:latin typeface="Calibri" pitchFamily="34" charset="0"/>
-                <a:ea typeface="Calibri" pitchFamily="34" charset="-122"/>
-                <a:cs typeface="Calibri" pitchFamily="34" charset="-120"/>
-              </a:rPr>
-              <a:t>needle  </a:t>
-            </a:r>
-            <a:pPr indent="0" marL="0">
-              <a:buNone/>
-            </a:pPr>
-            <a:r>
-              <a:rPr lang="en-US" sz="1400" dirty="0">
+            <a:off x="594360" y="1216152"/>
+            <a:ext cx="7863840" cy="384048"/>
+          </a:xfrm>
+          <a:prstGeom prst="rect">
+            <a:avLst/>
+          </a:prstGeom>
+          <a:noFill/>
+          <a:ln/>
+        </p:spPr>
+        <p:txBody>
+          <a:bodyPr wrap="square" lIns="0" tIns="0" rIns="0" bIns="0" rtlCol="0" anchor="ctr"/>
+          <a:lstStyle/>
+          <a:p>
+            <a:pPr indent="0" marL="0">
+              <a:buNone/>
+            </a:pPr>
+            <a:r>
+              <a:rPr lang="en-US" sz="1500" dirty="0">
                 <a:solidFill>
                   <a:srgbClr val="1E293B"/>
                 </a:solidFill>
@@ -2571,9 +2828,9 @@
                 <a:ea typeface="Calibri" pitchFamily="34" charset="-122"/>
                 <a:cs typeface="Calibri" pitchFamily="34" charset="-120"/>
               </a:rPr>
-              <a:t>A thin, sharp metal tool for sewing — here, a mouse's sword.</a:t>
-            </a:r>
-            <a:endParaRPr lang="en-US" sz="1700" dirty="0"/>
+              <a:t>🌱  non- + fiction →nonfiction</a:t>
+            </a:r>
+            <a:endParaRPr lang="en-US" sz="1500" dirty="0"/>
           </a:p>
         </p:txBody>
       </p:sp>
@@ -2585,16 +2842,16 @@
         </p:nvSpPr>
         <p:spPr>
           <a:xfrm>
-            <a:off x="365760" y="1828800"/>
-            <a:ext cx="8412480" cy="658368"/>
+            <a:off x="365760" y="1792224"/>
+            <a:ext cx="8412480" cy="621792"/>
           </a:xfrm>
           <a:prstGeom prst="roundRect">
             <a:avLst>
-              <a:gd name="adj" fmla="val 13889"/>
+              <a:gd name="adj" fmla="val 14706"/>
             </a:avLst>
           </a:prstGeom>
           <a:solidFill>
-            <a:srgbClr val="FFFFFF"/>
+            <a:srgbClr val="F8F4FF"/>
           </a:solidFill>
           <a:ln/>
           <a:effectLst>
@@ -2614,38 +2871,24 @@
         </p:nvSpPr>
         <p:spPr>
           <a:xfrm>
-            <a:off x="594360" y="1956816"/>
-            <a:ext cx="7863840" cy="420624"/>
-          </a:xfrm>
-          <a:prstGeom prst="rect">
-            <a:avLst/>
-          </a:prstGeom>
-          <a:noFill/>
-          <a:ln/>
-        </p:spPr>
-        <p:txBody>
-          <a:bodyPr wrap="square" lIns="0" tIns="0" rIns="0" bIns="0" rtlCol="0" anchor="ctr"/>
-          <a:lstStyle/>
-          <a:p>
-            <a:pPr indent="0" marL="0">
-              <a:buNone/>
-            </a:pPr>
-            <a:r>
-              <a:rPr lang="en-US" sz="1700" b="1" dirty="0">
-                <a:solidFill>
-                  <a:srgbClr val="0E1C42"/>
-                </a:solidFill>
-                <a:latin typeface="Calibri" pitchFamily="34" charset="0"/>
-                <a:ea typeface="Calibri" pitchFamily="34" charset="-122"/>
-                <a:cs typeface="Calibri" pitchFamily="34" charset="-120"/>
-              </a:rPr>
-              <a:t>forgiven  </a:t>
-            </a:r>
-            <a:pPr indent="0" marL="0">
-              <a:buNone/>
-            </a:pPr>
-            <a:r>
-              <a:rPr lang="en-US" sz="1400" dirty="0">
+            <a:off x="594360" y="1911096"/>
+            <a:ext cx="7863840" cy="384048"/>
+          </a:xfrm>
+          <a:prstGeom prst="rect">
+            <a:avLst/>
+          </a:prstGeom>
+          <a:noFill/>
+          <a:ln/>
+        </p:spPr>
+        <p:txBody>
+          <a:bodyPr wrap="square" lIns="0" tIns="0" rIns="0" bIns="0" rtlCol="0" anchor="ctr"/>
+          <a:lstStyle/>
+          <a:p>
+            <a:pPr indent="0" marL="0">
+              <a:buNone/>
+            </a:pPr>
+            <a:r>
+              <a:rPr lang="en-US" sz="1500" dirty="0">
                 <a:solidFill>
                   <a:srgbClr val="1E293B"/>
                 </a:solidFill>
@@ -2653,9 +2896,9 @@
                 <a:ea typeface="Calibri" pitchFamily="34" charset="-122"/>
                 <a:cs typeface="Calibri" pitchFamily="34" charset="-120"/>
               </a:rPr>
-              <a:t>No longer blamed for something you did wrong.</a:t>
-            </a:r>
-            <a:endParaRPr lang="en-US" sz="1700" dirty="0"/>
+              <a:t>🌱  non- + sense →nonsense</a:t>
+            </a:r>
+            <a:endParaRPr lang="en-US" sz="1500" dirty="0"/>
           </a:p>
         </p:txBody>
       </p:sp>
@@ -2667,16 +2910,16 @@
         </p:nvSpPr>
         <p:spPr>
           <a:xfrm>
-            <a:off x="365760" y="2560320"/>
-            <a:ext cx="8412480" cy="658368"/>
+            <a:off x="365760" y="2487168"/>
+            <a:ext cx="8412480" cy="621792"/>
           </a:xfrm>
           <a:prstGeom prst="roundRect">
             <a:avLst>
-              <a:gd name="adj" fmla="val 13889"/>
+              <a:gd name="adj" fmla="val 14706"/>
             </a:avLst>
           </a:prstGeom>
           <a:solidFill>
-            <a:srgbClr val="E5F7FC"/>
+            <a:srgbClr val="F0E8FF"/>
           </a:solidFill>
           <a:ln/>
           <a:effectLst>
@@ -2696,38 +2939,24 @@
         </p:nvSpPr>
         <p:spPr>
           <a:xfrm>
-            <a:off x="594360" y="2688336"/>
-            <a:ext cx="7863840" cy="420624"/>
-          </a:xfrm>
-          <a:prstGeom prst="rect">
-            <a:avLst/>
-          </a:prstGeom>
-          <a:noFill/>
-          <a:ln/>
-        </p:spPr>
-        <p:txBody>
-          <a:bodyPr wrap="square" lIns="0" tIns="0" rIns="0" bIns="0" rtlCol="0" anchor="ctr"/>
-          <a:lstStyle/>
-          <a:p>
-            <a:pPr indent="0" marL="0">
-              <a:buNone/>
-            </a:pPr>
-            <a:r>
-              <a:rPr lang="en-US" sz="1700" b="1" dirty="0">
-                <a:solidFill>
-                  <a:srgbClr val="0E1C42"/>
-                </a:solidFill>
-                <a:latin typeface="Calibri" pitchFamily="34" charset="0"/>
-                <a:ea typeface="Calibri" pitchFamily="34" charset="-122"/>
-                <a:cs typeface="Calibri" pitchFamily="34" charset="-120"/>
-              </a:rPr>
-              <a:t>braver  </a:t>
-            </a:r>
-            <a:pPr indent="0" marL="0">
-              <a:buNone/>
-            </a:pPr>
-            <a:r>
-              <a:rPr lang="en-US" sz="1400" dirty="0">
+            <a:off x="594360" y="2606040"/>
+            <a:ext cx="7863840" cy="384048"/>
+          </a:xfrm>
+          <a:prstGeom prst="rect">
+            <a:avLst/>
+          </a:prstGeom>
+          <a:noFill/>
+          <a:ln/>
+        </p:spPr>
+        <p:txBody>
+          <a:bodyPr wrap="square" lIns="0" tIns="0" rIns="0" bIns="0" rtlCol="0" anchor="ctr"/>
+          <a:lstStyle/>
+          <a:p>
+            <a:pPr indent="0" marL="0">
+              <a:buNone/>
+            </a:pPr>
+            <a:r>
+              <a:rPr lang="en-US" sz="1500" dirty="0">
                 <a:solidFill>
                   <a:srgbClr val="1E293B"/>
                 </a:solidFill>
@@ -2735,9 +2964,9 @@
                 <a:ea typeface="Calibri" pitchFamily="34" charset="-122"/>
                 <a:cs typeface="Calibri" pitchFamily="34" charset="-120"/>
               </a:rPr>
-              <a:t>More willing to face something frightening.</a:t>
-            </a:r>
-            <a:endParaRPr lang="en-US" sz="1700" dirty="0"/>
+              <a:t>🌱  non- + stop →nonstop</a:t>
+            </a:r>
+            <a:endParaRPr lang="en-US" sz="1500" dirty="0"/>
           </a:p>
         </p:txBody>
       </p:sp>
@@ -2749,16 +2978,16 @@
         </p:nvSpPr>
         <p:spPr>
           <a:xfrm>
-            <a:off x="365760" y="3291840"/>
-            <a:ext cx="8412480" cy="658368"/>
+            <a:off x="365760" y="3182112"/>
+            <a:ext cx="8412480" cy="621792"/>
           </a:xfrm>
           <a:prstGeom prst="roundRect">
             <a:avLst>
-              <a:gd name="adj" fmla="val 13889"/>
+              <a:gd name="adj" fmla="val 14706"/>
             </a:avLst>
           </a:prstGeom>
           <a:solidFill>
-            <a:srgbClr val="FFFFFF"/>
+            <a:srgbClr val="F8F4FF"/>
           </a:solidFill>
           <a:ln/>
           <a:effectLst>
@@ -2778,38 +3007,24 @@
         </p:nvSpPr>
         <p:spPr>
           <a:xfrm>
-            <a:off x="594360" y="3419856"/>
-            <a:ext cx="7863840" cy="420624"/>
-          </a:xfrm>
-          <a:prstGeom prst="rect">
-            <a:avLst/>
-          </a:prstGeom>
-          <a:noFill/>
-          <a:ln/>
-        </p:spPr>
-        <p:txBody>
-          <a:bodyPr wrap="square" lIns="0" tIns="0" rIns="0" bIns="0" rtlCol="0" anchor="ctr"/>
-          <a:lstStyle/>
-          <a:p>
-            <a:pPr indent="0" marL="0">
-              <a:buNone/>
-            </a:pPr>
-            <a:r>
-              <a:rPr lang="en-US" sz="1700" b="1" dirty="0">
-                <a:solidFill>
-                  <a:srgbClr val="0E1C42"/>
-                </a:solidFill>
-                <a:latin typeface="Calibri" pitchFamily="34" charset="0"/>
-                <a:ea typeface="Calibri" pitchFamily="34" charset="-122"/>
-                <a:cs typeface="Calibri" pitchFamily="34" charset="-120"/>
-              </a:rPr>
-              <a:t>crown  </a:t>
-            </a:r>
-            <a:pPr indent="0" marL="0">
-              <a:buNone/>
-            </a:pPr>
-            <a:r>
-              <a:rPr lang="en-US" sz="1400" dirty="0">
+            <a:off x="594360" y="3300984"/>
+            <a:ext cx="7863840" cy="384048"/>
+          </a:xfrm>
+          <a:prstGeom prst="rect">
+            <a:avLst/>
+          </a:prstGeom>
+          <a:noFill/>
+          <a:ln/>
+        </p:spPr>
+        <p:txBody>
+          <a:bodyPr wrap="square" lIns="0" tIns="0" rIns="0" bIns="0" rtlCol="0" anchor="ctr"/>
+          <a:lstStyle/>
+          <a:p>
+            <a:pPr indent="0" marL="0">
+              <a:buNone/>
+            </a:pPr>
+            <a:r>
+              <a:rPr lang="en-US" sz="1500" dirty="0">
                 <a:solidFill>
                   <a:srgbClr val="1E293B"/>
                 </a:solidFill>
@@ -2817,9 +3032,9 @@
                 <a:ea typeface="Calibri" pitchFamily="34" charset="-122"/>
                 <a:cs typeface="Calibri" pitchFamily="34" charset="-120"/>
               </a:rPr>
-              <a:t>The circle of gold and jewels a king or queen wears.</a:t>
-            </a:r>
-            <a:endParaRPr lang="en-US" sz="1700" dirty="0"/>
+              <a:t>🌱  non- + living →nonliving</a:t>
+            </a:r>
+            <a:endParaRPr lang="en-US" sz="1500" dirty="0"/>
           </a:p>
         </p:txBody>
       </p:sp>
@@ -2837,7 +3052,7 @@
     <p:bg>
       <p:bgPr>
         <a:solidFill>
-          <a:srgbClr val="F8FAFC"/>
+          <a:srgbClr val="FFFFFF"/>
         </a:solidFill>
       </p:bgPr>
     </p:bg>
@@ -2870,7 +3085,7 @@
             <a:avLst/>
           </a:prstGeom>
           <a:solidFill>
-            <a:srgbClr val="C7922C"/>
+            <a:srgbClr val="55C8E8"/>
           </a:solidFill>
           <a:ln/>
         </p:spPr>
@@ -2908,7 +3123,7 @@
                 <a:ea typeface="Calibri" pitchFamily="34" charset="-122"/>
                 <a:cs typeface="Calibri" pitchFamily="34" charset="-120"/>
               </a:rPr>
-              <a:t>✏️  Grammar</a:t>
+              <a:t>🔤  Vocabulary</a:t>
             </a:r>
             <a:endParaRPr lang="en-US" sz="2200" dirty="0"/>
           </a:p>
@@ -2922,7 +3137,7 @@
         </p:nvSpPr>
         <p:spPr>
           <a:xfrm>
-            <a:off x="365760" y="777240"/>
+            <a:off x="365760" y="804672"/>
             <a:ext cx="8229600" cy="237744"/>
           </a:xfrm>
           <a:prstGeom prst="rect">
@@ -2941,13 +3156,13 @@
             <a:r>
               <a:rPr lang="en-US" sz="1100" b="1" spc="100" kern="0" dirty="0">
                 <a:solidFill>
-                  <a:srgbClr val="C7922C"/>
-                </a:solidFill>
-                <a:latin typeface="Calibri" pitchFamily="34" charset="0"/>
-                <a:ea typeface="Calibri" pitchFamily="34" charset="-122"/>
-                <a:cs typeface="Calibri" pitchFamily="34" charset="-120"/>
-              </a:rPr>
-              <a:t>DIALOGUE: PUTTING IT TO WORK</a:t>
+                  <a:srgbClr val="55C8E8"/>
+                </a:solidFill>
+                <a:latin typeface="Calibri" pitchFamily="34" charset="0"/>
+                <a:ea typeface="Calibri" pitchFamily="34" charset="-122"/>
+                <a:cs typeface="Calibri" pitchFamily="34" charset="-120"/>
+              </a:rPr>
+              <a:t>VOCABULARY</a:t>
             </a:r>
             <a:endParaRPr lang="en-US" sz="1100" dirty="0"/>
           </a:p>
@@ -2961,7 +3176,7 @@
         </p:nvSpPr>
         <p:spPr>
           <a:xfrm>
-            <a:off x="365760" y="1078992"/>
+            <a:off x="365760" y="1097280"/>
             <a:ext cx="8412480" cy="658368"/>
           </a:xfrm>
           <a:prstGeom prst="roundRect">
@@ -2970,7 +3185,7 @@
             </a:avLst>
           </a:prstGeom>
           <a:solidFill>
-            <a:srgbClr val="FEF6E8"/>
+            <a:srgbClr val="E5F7FC"/>
           </a:solidFill>
           <a:ln/>
           <a:effectLst>
@@ -2991,23 +3206,37 @@
         <p:spPr>
           <a:xfrm>
             <a:off x="594360" y="1225296"/>
-            <a:ext cx="7863840" cy="402336"/>
-          </a:xfrm>
-          <a:prstGeom prst="rect">
-            <a:avLst/>
-          </a:prstGeom>
-          <a:noFill/>
-          <a:ln/>
-        </p:spPr>
-        <p:txBody>
-          <a:bodyPr wrap="square" lIns="0" tIns="0" rIns="0" bIns="0" rtlCol="0" anchor="ctr"/>
-          <a:lstStyle/>
-          <a:p>
-            <a:pPr indent="0" marL="0">
-              <a:buNone/>
-            </a:pPr>
-            <a:r>
-              <a:rPr lang="en-US" sz="1600" dirty="0">
+            <a:ext cx="7863840" cy="420624"/>
+          </a:xfrm>
+          <a:prstGeom prst="rect">
+            <a:avLst/>
+          </a:prstGeom>
+          <a:noFill/>
+          <a:ln/>
+        </p:spPr>
+        <p:txBody>
+          <a:bodyPr wrap="square" lIns="0" tIns="0" rIns="0" bIns="0" rtlCol="0" anchor="ctr"/>
+          <a:lstStyle/>
+          <a:p>
+            <a:pPr indent="0" marL="0">
+              <a:buNone/>
+            </a:pPr>
+            <a:r>
+              <a:rPr lang="en-US" sz="1700" b="1" dirty="0">
+                <a:solidFill>
+                  <a:srgbClr val="0E1C42"/>
+                </a:solidFill>
+                <a:latin typeface="Calibri" pitchFamily="34" charset="0"/>
+                <a:ea typeface="Calibri" pitchFamily="34" charset="-122"/>
+                <a:cs typeface="Calibri" pitchFamily="34" charset="-120"/>
+              </a:rPr>
+              <a:t>needle  </a:t>
+            </a:r>
+            <a:pPr indent="0" marL="0">
+              <a:buNone/>
+            </a:pPr>
+            <a:r>
+              <a:rPr lang="en-US" sz="1400" dirty="0">
                 <a:solidFill>
                   <a:srgbClr val="1E293B"/>
                 </a:solidFill>
@@ -3015,9 +3244,9 @@
                 <a:ea typeface="Calibri" pitchFamily="34" charset="-122"/>
                 <a:cs typeface="Calibri" pitchFamily="34" charset="-120"/>
               </a:rPr>
-              <a:t>“Where is she?” asked Despereaux.</a:t>
-            </a:r>
-            <a:endParaRPr lang="en-US" sz="1600" dirty="0"/>
+              <a:t>A thin, sharp metal tool for sewing — here, a mouse's sword.</a:t>
+            </a:r>
+            <a:endParaRPr lang="en-US" sz="1700" dirty="0"/>
           </a:p>
         </p:txBody>
       </p:sp>
@@ -3029,7 +3258,7 @@
         </p:nvSpPr>
         <p:spPr>
           <a:xfrm>
-            <a:off x="365760" y="1810512"/>
+            <a:off x="365760" y="1828800"/>
             <a:ext cx="8412480" cy="658368"/>
           </a:xfrm>
           <a:prstGeom prst="roundRect">
@@ -3059,23 +3288,37 @@
         <p:spPr>
           <a:xfrm>
             <a:off x="594360" y="1956816"/>
-            <a:ext cx="7863840" cy="402336"/>
-          </a:xfrm>
-          <a:prstGeom prst="rect">
-            <a:avLst/>
-          </a:prstGeom>
-          <a:noFill/>
-          <a:ln/>
-        </p:spPr>
-        <p:txBody>
-          <a:bodyPr wrap="square" lIns="0" tIns="0" rIns="0" bIns="0" rtlCol="0" anchor="ctr"/>
-          <a:lstStyle/>
-          <a:p>
-            <a:pPr indent="0" marL="0">
-              <a:buNone/>
-            </a:pPr>
-            <a:r>
-              <a:rPr lang="en-US" sz="1600" dirty="0">
+            <a:ext cx="7863840" cy="420624"/>
+          </a:xfrm>
+          <a:prstGeom prst="rect">
+            <a:avLst/>
+          </a:prstGeom>
+          <a:noFill/>
+          <a:ln/>
+        </p:spPr>
+        <p:txBody>
+          <a:bodyPr wrap="square" lIns="0" tIns="0" rIns="0" bIns="0" rtlCol="0" anchor="ctr"/>
+          <a:lstStyle/>
+          <a:p>
+            <a:pPr indent="0" marL="0">
+              <a:buNone/>
+            </a:pPr>
+            <a:r>
+              <a:rPr lang="en-US" sz="1700" b="1" dirty="0">
+                <a:solidFill>
+                  <a:srgbClr val="0E1C42"/>
+                </a:solidFill>
+                <a:latin typeface="Calibri" pitchFamily="34" charset="0"/>
+                <a:ea typeface="Calibri" pitchFamily="34" charset="-122"/>
+                <a:cs typeface="Calibri" pitchFamily="34" charset="-120"/>
+              </a:rPr>
+              <a:t>forgiven  </a:t>
+            </a:r>
+            <a:pPr indent="0" marL="0">
+              <a:buNone/>
+            </a:pPr>
+            <a:r>
+              <a:rPr lang="en-US" sz="1400" dirty="0">
                 <a:solidFill>
                   <a:srgbClr val="1E293B"/>
                 </a:solidFill>
@@ -3083,9 +3326,9 @@
                 <a:ea typeface="Calibri" pitchFamily="34" charset="-122"/>
                 <a:cs typeface="Calibri" pitchFamily="34" charset="-120"/>
               </a:rPr>
-              <a:t>“Gone,” said Cook quietly.</a:t>
-            </a:r>
-            <a:endParaRPr lang="en-US" sz="1600" dirty="0"/>
+              <a:t>No longer blamed for something you did wrong.</a:t>
+            </a:r>
+            <a:endParaRPr lang="en-US" sz="1700" dirty="0"/>
           </a:p>
         </p:txBody>
       </p:sp>
@@ -3097,7 +3340,7 @@
         </p:nvSpPr>
         <p:spPr>
           <a:xfrm>
-            <a:off x="365760" y="2542032"/>
+            <a:off x="365760" y="2560320"/>
             <a:ext cx="8412480" cy="658368"/>
           </a:xfrm>
           <a:prstGeom prst="roundRect">
@@ -3106,7 +3349,7 @@
             </a:avLst>
           </a:prstGeom>
           <a:solidFill>
-            <a:srgbClr val="FEF6E8"/>
+            <a:srgbClr val="E5F7FC"/>
           </a:solidFill>
           <a:ln/>
           <a:effectLst>
@@ -3127,23 +3370,37 @@
         <p:spPr>
           <a:xfrm>
             <a:off x="594360" y="2688336"/>
-            <a:ext cx="7863840" cy="402336"/>
-          </a:xfrm>
-          <a:prstGeom prst="rect">
-            <a:avLst/>
-          </a:prstGeom>
-          <a:noFill/>
-          <a:ln/>
-        </p:spPr>
-        <p:txBody>
-          <a:bodyPr wrap="square" lIns="0" tIns="0" rIns="0" bIns="0" rtlCol="0" anchor="ctr"/>
-          <a:lstStyle/>
-          <a:p>
-            <a:pPr indent="0" marL="0">
-              <a:buNone/>
-            </a:pPr>
-            <a:r>
-              <a:rPr lang="en-US" sz="1600" dirty="0">
+            <a:ext cx="7863840" cy="420624"/>
+          </a:xfrm>
+          <a:prstGeom prst="rect">
+            <a:avLst/>
+          </a:prstGeom>
+          <a:noFill/>
+          <a:ln/>
+        </p:spPr>
+        <p:txBody>
+          <a:bodyPr wrap="square" lIns="0" tIns="0" rIns="0" bIns="0" rtlCol="0" anchor="ctr"/>
+          <a:lstStyle/>
+          <a:p>
+            <a:pPr indent="0" marL="0">
+              <a:buNone/>
+            </a:pPr>
+            <a:r>
+              <a:rPr lang="en-US" sz="1700" b="1" dirty="0">
+                <a:solidFill>
+                  <a:srgbClr val="0E1C42"/>
+                </a:solidFill>
+                <a:latin typeface="Calibri" pitchFamily="34" charset="0"/>
+                <a:ea typeface="Calibri" pitchFamily="34" charset="-122"/>
+                <a:cs typeface="Calibri" pitchFamily="34" charset="-120"/>
+              </a:rPr>
+              <a:t>braver  </a:t>
+            </a:r>
+            <a:pPr indent="0" marL="0">
+              <a:buNone/>
+            </a:pPr>
+            <a:r>
+              <a:rPr lang="en-US" sz="1400" dirty="0">
                 <a:solidFill>
                   <a:srgbClr val="1E293B"/>
                 </a:solidFill>
@@ -3151,9 +3408,9 @@
                 <a:ea typeface="Calibri" pitchFamily="34" charset="-122"/>
                 <a:cs typeface="Calibri" pitchFamily="34" charset="-120"/>
               </a:rPr>
-              <a:t>The king shouted, “Find her!”</a:t>
-            </a:r>
-            <a:endParaRPr lang="en-US" sz="1600" dirty="0"/>
+              <a:t>More willing to face something frightening.</a:t>
+            </a:r>
+            <a:endParaRPr lang="en-US" sz="1700" dirty="0"/>
           </a:p>
         </p:txBody>
       </p:sp>
@@ -3165,7 +3422,7 @@
         </p:nvSpPr>
         <p:spPr>
           <a:xfrm>
-            <a:off x="365760" y="3273552"/>
+            <a:off x="365760" y="3291840"/>
             <a:ext cx="8412480" cy="658368"/>
           </a:xfrm>
           <a:prstGeom prst="roundRect">
@@ -3195,23 +3452,37 @@
         <p:spPr>
           <a:xfrm>
             <a:off x="594360" y="3419856"/>
-            <a:ext cx="7863840" cy="402336"/>
-          </a:xfrm>
-          <a:prstGeom prst="rect">
-            <a:avLst/>
-          </a:prstGeom>
-          <a:noFill/>
-          <a:ln/>
-        </p:spPr>
-        <p:txBody>
-          <a:bodyPr wrap="square" lIns="0" tIns="0" rIns="0" bIns="0" rtlCol="0" anchor="ctr"/>
-          <a:lstStyle/>
-          <a:p>
-            <a:pPr indent="0" marL="0">
-              <a:buNone/>
-            </a:pPr>
-            <a:r>
-              <a:rPr lang="en-US" sz="1600" dirty="0">
+            <a:ext cx="7863840" cy="420624"/>
+          </a:xfrm>
+          <a:prstGeom prst="rect">
+            <a:avLst/>
+          </a:prstGeom>
+          <a:noFill/>
+          <a:ln/>
+        </p:spPr>
+        <p:txBody>
+          <a:bodyPr wrap="square" lIns="0" tIns="0" rIns="0" bIns="0" rtlCol="0" anchor="ctr"/>
+          <a:lstStyle/>
+          <a:p>
+            <a:pPr indent="0" marL="0">
+              <a:buNone/>
+            </a:pPr>
+            <a:r>
+              <a:rPr lang="en-US" sz="1700" b="1" dirty="0">
+                <a:solidFill>
+                  <a:srgbClr val="0E1C42"/>
+                </a:solidFill>
+                <a:latin typeface="Calibri" pitchFamily="34" charset="0"/>
+                <a:ea typeface="Calibri" pitchFamily="34" charset="-122"/>
+                <a:cs typeface="Calibri" pitchFamily="34" charset="-120"/>
+              </a:rPr>
+              <a:t>crown  </a:t>
+            </a:r>
+            <a:pPr indent="0" marL="0">
+              <a:buNone/>
+            </a:pPr>
+            <a:r>
+              <a:rPr lang="en-US" sz="1400" dirty="0">
                 <a:solidFill>
                   <a:srgbClr val="1E293B"/>
                 </a:solidFill>
@@ -3219,48 +3490,9 @@
                 <a:ea typeface="Calibri" pitchFamily="34" charset="-122"/>
                 <a:cs typeface="Calibri" pitchFamily="34" charset="-120"/>
               </a:rPr>
-              <a:t>“I will go,” said the mouse.</a:t>
-            </a:r>
-            <a:endParaRPr lang="en-US" sz="1600" dirty="0"/>
-          </a:p>
-        </p:txBody>
-      </p:sp>
-      <p:sp>
-        <p:nvSpPr>
-          <p:cNvPr id="13" name="Text 11"/>
-          <p:cNvSpPr/>
-          <p:nvPr/>
-        </p:nvSpPr>
-        <p:spPr>
-          <a:xfrm>
-            <a:off x="365760" y="4050792"/>
-            <a:ext cx="8412480" cy="365760"/>
-          </a:xfrm>
-          <a:prstGeom prst="rect">
-            <a:avLst/>
-          </a:prstGeom>
-          <a:noFill/>
-          <a:ln/>
-        </p:spPr>
-        <p:txBody>
-          <a:bodyPr wrap="square" lIns="0" tIns="0" rIns="0" bIns="0" rtlCol="0" anchor="ctr"/>
-          <a:lstStyle/>
-          <a:p>
-            <a:pPr indent="0" marL="0">
-              <a:buNone/>
-            </a:pPr>
-            <a:r>
-              <a:rPr lang="en-US" sz="1500" i="1" dirty="0">
-                <a:solidFill>
-                  <a:srgbClr val="64748B"/>
-                </a:solidFill>
-                <a:latin typeface="Calibri" pitchFamily="34" charset="0"/>
-                <a:ea typeface="Calibri" pitchFamily="34" charset="-122"/>
-                <a:cs typeface="Calibri" pitchFamily="34" charset="-120"/>
-              </a:rPr>
-              <a:t>Your turn. Find the punctuation mark that ends the spoken words. Tap a word to check — green means you got it.</a:t>
-            </a:r>
-            <a:endParaRPr lang="en-US" sz="1500" dirty="0"/>
+              <a:t>The circle of gold and jewels a king or queen wears.</a:t>
+            </a:r>
+            <a:endParaRPr lang="en-US" sz="1700" dirty="0"/>
           </a:p>
         </p:txBody>
       </p:sp>
@@ -3349,7 +3581,7 @@
                 <a:ea typeface="Calibri" pitchFamily="34" charset="-122"/>
                 <a:cs typeface="Calibri" pitchFamily="34" charset="-120"/>
               </a:rPr>
-              <a:t>✏️  Grammar</a:t>
+              <a:t>✏️  Grammar — What do you notice?</a:t>
             </a:r>
             <a:endParaRPr lang="en-US" sz="2200" dirty="0"/>
           </a:p>
@@ -3363,7 +3595,7 @@
         </p:nvSpPr>
         <p:spPr>
           <a:xfrm>
-            <a:off x="365760" y="777240"/>
+            <a:off x="365760" y="749808"/>
             <a:ext cx="8229600" cy="237744"/>
           </a:xfrm>
           <a:prstGeom prst="rect">
@@ -3388,7 +3620,7 @@
                 <a:ea typeface="Calibri" pitchFamily="34" charset="-122"/>
                 <a:cs typeface="Calibri" pitchFamily="34" charset="-120"/>
               </a:rPr>
-              <a:t>DIALOGUE: PUTTING IT TO WORK</a:t>
+              <a:t>ADJECTIVES AND COMPARING</a:t>
             </a:r>
             <a:endParaRPr lang="en-US" sz="1100" dirty="0"/>
           </a:p>
@@ -3396,13 +3628,52 @@
       </p:sp>
       <p:sp>
         <p:nvSpPr>
-          <p:cNvPr id="5" name="Shape 3"/>
-          <p:cNvSpPr/>
-          <p:nvPr/>
-        </p:nvSpPr>
-        <p:spPr>
-          <a:xfrm>
-            <a:off x="365760" y="1078992"/>
+          <p:cNvPr id="5" name="Text 3"/>
+          <p:cNvSpPr/>
+          <p:nvPr/>
+        </p:nvSpPr>
+        <p:spPr>
+          <a:xfrm>
+            <a:off x="365760" y="987552"/>
+            <a:ext cx="8412480" cy="411480"/>
+          </a:xfrm>
+          <a:prstGeom prst="rect">
+            <a:avLst/>
+          </a:prstGeom>
+          <a:noFill/>
+          <a:ln/>
+        </p:spPr>
+        <p:txBody>
+          <a:bodyPr wrap="square" lIns="0" tIns="0" rIns="0" bIns="0" rtlCol="0" anchor="ctr"/>
+          <a:lstStyle/>
+          <a:p>
+            <a:pPr indent="0" marL="0">
+              <a:buNone/>
+            </a:pPr>
+            <a:r>
+              <a:rPr lang="en-US" sz="1500" i="1" dirty="0">
+                <a:solidFill>
+                  <a:srgbClr val="64748B"/>
+                </a:solidFill>
+                <a:latin typeface="Calibri" pitchFamily="34" charset="0"/>
+                <a:ea typeface="Calibri" pitchFamily="34" charset="-122"/>
+                <a:cs typeface="Calibri" pitchFamily="34" charset="-120"/>
+              </a:rPr>
+              <a:t>Two sentences about the same mouse. The second one is longer. Read both and work out what the extra words are doing.</a:t>
+            </a:r>
+            <a:endParaRPr lang="en-US" sz="1500" dirty="0"/>
+          </a:p>
+        </p:txBody>
+      </p:sp>
+      <p:sp>
+        <p:nvSpPr>
+          <p:cNvPr id="6" name="Shape 4"/>
+          <p:cNvSpPr/>
+          <p:nvPr/>
+        </p:nvSpPr>
+        <p:spPr>
+          <a:xfrm>
+            <a:off x="365760" y="1463040"/>
             <a:ext cx="8412480" cy="658368"/>
           </a:xfrm>
           <a:prstGeom prst="roundRect">
@@ -3413,7 +3684,12 @@
           <a:solidFill>
             <a:srgbClr val="FEF6E8"/>
           </a:solidFill>
-          <a:ln/>
+          <a:ln w="19050">
+            <a:solidFill>
+              <a:srgbClr val="C7922C"/>
+            </a:solidFill>
+            <a:prstDash val="solid"/>
+          </a:ln>
           <a:effectLst>
             <a:outerShdw sx="100000" sy="100000" kx="0" ky="0" algn="bl" rotWithShape="0" blurRad="101600" dist="38100" dir="2700000">
               <a:srgbClr val="000000">
@@ -3425,30 +3701,58 @@
       </p:sp>
       <p:sp>
         <p:nvSpPr>
-          <p:cNvPr id="6" name="Text 4"/>
-          <p:cNvSpPr/>
-          <p:nvPr/>
-        </p:nvSpPr>
-        <p:spPr>
-          <a:xfrm>
-            <a:off x="594360" y="1225296"/>
-            <a:ext cx="7863840" cy="402336"/>
-          </a:xfrm>
-          <a:prstGeom prst="rect">
-            <a:avLst/>
-          </a:prstGeom>
-          <a:noFill/>
-          <a:ln/>
-        </p:spPr>
-        <p:txBody>
-          <a:bodyPr wrap="square" lIns="0" tIns="0" rIns="0" bIns="0" rtlCol="0" anchor="ctr"/>
-          <a:lstStyle/>
-          <a:p>
-            <a:pPr indent="0" marL="0">
-              <a:buNone/>
-            </a:pPr>
-            <a:r>
-              <a:rPr lang="en-US" sz="1600" dirty="0">
+          <p:cNvPr id="7" name="Text 5"/>
+          <p:cNvSpPr/>
+          <p:nvPr/>
+        </p:nvSpPr>
+        <p:spPr>
+          <a:xfrm>
+            <a:off x="594360" y="1591056"/>
+            <a:ext cx="7955280" cy="402336"/>
+          </a:xfrm>
+          <a:prstGeom prst="rect">
+            <a:avLst/>
+          </a:prstGeom>
+          <a:noFill/>
+          <a:ln/>
+        </p:spPr>
+        <p:txBody>
+          <a:bodyPr wrap="square" lIns="0" tIns="0" rIns="0" bIns="0" rtlCol="0" anchor="ctr"/>
+          <a:lstStyle/>
+          <a:p>
+            <a:pPr indent="0" marL="0">
+              <a:buNone/>
+            </a:pPr>
+            <a:endParaRPr lang="en-US" sz="1700" dirty="0"/>
+          </a:p>
+        </p:txBody>
+      </p:sp>
+      <p:sp>
+        <p:nvSpPr>
+          <p:cNvPr id="8" name="Text 6"/>
+          <p:cNvSpPr/>
+          <p:nvPr/>
+        </p:nvSpPr>
+        <p:spPr>
+          <a:xfrm>
+            <a:off x="594360" y="1591056"/>
+            <a:ext cx="7955280" cy="402336"/>
+          </a:xfrm>
+          <a:prstGeom prst="rect">
+            <a:avLst/>
+          </a:prstGeom>
+          <a:noFill/>
+          <a:ln/>
+        </p:spPr>
+        <p:txBody>
+          <a:bodyPr wrap="square" lIns="0" tIns="0" rIns="0" bIns="0" rtlCol="0" anchor="ctr"/>
+          <a:lstStyle/>
+          <a:p>
+            <a:pPr indent="0" marL="0">
+              <a:buNone/>
+            </a:pPr>
+            <a:r>
+              <a:rPr lang="en-US" sz="1700" dirty="0">
                 <a:solidFill>
                   <a:srgbClr val="1E293B"/>
                 </a:solidFill>
@@ -3456,27 +3760,13 @@
                 <a:ea typeface="Calibri" pitchFamily="34" charset="-122"/>
                 <a:cs typeface="Calibri" pitchFamily="34" charset="-120"/>
               </a:rPr>
-              <a:t>“Where is </a:t>
-            </a:r>
-            <a:pPr indent="0" marL="0">
-              <a:buNone/>
-            </a:pPr>
-            <a:r>
-              <a:rPr lang="en-US" sz="1600" b="1" dirty="0">
-                <a:solidFill>
-                  <a:srgbClr val="34B76F"/>
-                </a:solidFill>
-                <a:latin typeface="Calibri" pitchFamily="34" charset="0"/>
-                <a:ea typeface="Calibri" pitchFamily="34" charset="-122"/>
-                <a:cs typeface="Calibri" pitchFamily="34" charset="-120"/>
-              </a:rPr>
-              <a:t>she?”</a:t>
-            </a:r>
-            <a:pPr indent="0" marL="0">
-              <a:buNone/>
-            </a:pPr>
-            <a:r>
-              <a:rPr lang="en-US" sz="1600" dirty="0">
+              <a:t>The</a:t>
+            </a:r>
+            <a:pPr indent="0" marL="0">
+              <a:buNone/>
+            </a:pPr>
+            <a:r>
+              <a:rPr lang="en-US" sz="1700" dirty="0">
                 <a:solidFill>
                   <a:srgbClr val="1E293B"/>
                 </a:solidFill>
@@ -3484,21 +3774,147 @@
                 <a:ea typeface="Calibri" pitchFamily="34" charset="-122"/>
                 <a:cs typeface="Calibri" pitchFamily="34" charset="-120"/>
               </a:rPr>
-              <a:t> asked Despereaux.</a:t>
-            </a:r>
-            <a:endParaRPr lang="en-US" sz="1600" dirty="0"/>
-          </a:p>
-        </p:txBody>
-      </p:sp>
-      <p:sp>
-        <p:nvSpPr>
-          <p:cNvPr id="7" name="Shape 5"/>
-          <p:cNvSpPr/>
-          <p:nvPr/>
-        </p:nvSpPr>
-        <p:spPr>
-          <a:xfrm>
-            <a:off x="365760" y="1810512"/>
+              <a:t> </a:t>
+            </a:r>
+            <a:pPr indent="0" marL="0">
+              <a:buNone/>
+            </a:pPr>
+            <a:r>
+              <a:rPr lang="en-US" sz="1700" dirty="0">
+                <a:solidFill>
+                  <a:srgbClr val="1E293B"/>
+                </a:solidFill>
+                <a:latin typeface="Calibri" pitchFamily="34" charset="0"/>
+                <a:ea typeface="Calibri" pitchFamily="34" charset="-122"/>
+                <a:cs typeface="Calibri" pitchFamily="34" charset="-120"/>
+              </a:rPr>
+              <a:t>mouse</a:t>
+            </a:r>
+            <a:pPr indent="0" marL="0">
+              <a:buNone/>
+            </a:pPr>
+            <a:r>
+              <a:rPr lang="en-US" sz="1700" dirty="0">
+                <a:solidFill>
+                  <a:srgbClr val="1E293B"/>
+                </a:solidFill>
+                <a:latin typeface="Calibri" pitchFamily="34" charset="0"/>
+                <a:ea typeface="Calibri" pitchFamily="34" charset="-122"/>
+                <a:cs typeface="Calibri" pitchFamily="34" charset="-120"/>
+              </a:rPr>
+              <a:t> </a:t>
+            </a:r>
+            <a:pPr indent="0" marL="0">
+              <a:buNone/>
+            </a:pPr>
+            <a:r>
+              <a:rPr lang="en-US" sz="1700" dirty="0">
+                <a:solidFill>
+                  <a:srgbClr val="1E293B"/>
+                </a:solidFill>
+                <a:latin typeface="Calibri" pitchFamily="34" charset="0"/>
+                <a:ea typeface="Calibri" pitchFamily="34" charset="-122"/>
+                <a:cs typeface="Calibri" pitchFamily="34" charset="-120"/>
+              </a:rPr>
+              <a:t>crept</a:t>
+            </a:r>
+            <a:pPr indent="0" marL="0">
+              <a:buNone/>
+            </a:pPr>
+            <a:r>
+              <a:rPr lang="en-US" sz="1700" dirty="0">
+                <a:solidFill>
+                  <a:srgbClr val="1E293B"/>
+                </a:solidFill>
+                <a:latin typeface="Calibri" pitchFamily="34" charset="0"/>
+                <a:ea typeface="Calibri" pitchFamily="34" charset="-122"/>
+                <a:cs typeface="Calibri" pitchFamily="34" charset="-120"/>
+              </a:rPr>
+              <a:t> </a:t>
+            </a:r>
+            <a:pPr indent="0" marL="0">
+              <a:buNone/>
+            </a:pPr>
+            <a:r>
+              <a:rPr lang="en-US" sz="1700" dirty="0">
+                <a:solidFill>
+                  <a:srgbClr val="1E293B"/>
+                </a:solidFill>
+                <a:latin typeface="Calibri" pitchFamily="34" charset="0"/>
+                <a:ea typeface="Calibri" pitchFamily="34" charset="-122"/>
+                <a:cs typeface="Calibri" pitchFamily="34" charset="-120"/>
+              </a:rPr>
+              <a:t>along</a:t>
+            </a:r>
+            <a:pPr indent="0" marL="0">
+              <a:buNone/>
+            </a:pPr>
+            <a:r>
+              <a:rPr lang="en-US" sz="1700" dirty="0">
+                <a:solidFill>
+                  <a:srgbClr val="1E293B"/>
+                </a:solidFill>
+                <a:latin typeface="Calibri" pitchFamily="34" charset="0"/>
+                <a:ea typeface="Calibri" pitchFamily="34" charset="-122"/>
+                <a:cs typeface="Calibri" pitchFamily="34" charset="-120"/>
+              </a:rPr>
+              <a:t> </a:t>
+            </a:r>
+            <a:pPr indent="0" marL="0">
+              <a:buNone/>
+            </a:pPr>
+            <a:r>
+              <a:rPr lang="en-US" sz="1700" dirty="0">
+                <a:solidFill>
+                  <a:srgbClr val="1E293B"/>
+                </a:solidFill>
+                <a:latin typeface="Calibri" pitchFamily="34" charset="0"/>
+                <a:ea typeface="Calibri" pitchFamily="34" charset="-122"/>
+                <a:cs typeface="Calibri" pitchFamily="34" charset="-120"/>
+              </a:rPr>
+              <a:t>the</a:t>
+            </a:r>
+            <a:pPr indent="0" marL="0">
+              <a:buNone/>
+            </a:pPr>
+            <a:r>
+              <a:rPr lang="en-US" sz="1700" dirty="0">
+                <a:solidFill>
+                  <a:srgbClr val="1E293B"/>
+                </a:solidFill>
+                <a:latin typeface="Calibri" pitchFamily="34" charset="0"/>
+                <a:ea typeface="Calibri" pitchFamily="34" charset="-122"/>
+                <a:cs typeface="Calibri" pitchFamily="34" charset="-120"/>
+              </a:rPr>
+              <a:t> </a:t>
+            </a:r>
+            <a:pPr indent="0" marL="0">
+              <a:buNone/>
+            </a:pPr>
+            <a:r>
+              <a:rPr lang="en-US" sz="1700" dirty="0">
+                <a:solidFill>
+                  <a:srgbClr val="1E293B"/>
+                </a:solidFill>
+                <a:latin typeface="Calibri" pitchFamily="34" charset="0"/>
+                <a:ea typeface="Calibri" pitchFamily="34" charset="-122"/>
+                <a:cs typeface="Calibri" pitchFamily="34" charset="-120"/>
+              </a:rPr>
+              <a:t>corridor.</a:t>
+            </a:r>
+            <a:endParaRPr lang="en-US" sz="1700" dirty="0"/>
+          </a:p>
+        </p:txBody>
+      </p:sp>
+      <p:sp>
+        <p:nvSpPr>
+          <p:cNvPr id="9" name="Shape 7"/>
+          <p:cNvSpPr/>
+          <p:nvPr/>
+        </p:nvSpPr>
+        <p:spPr>
+          <a:xfrm>
+            <a:off x="365760" y="2212848"/>
             <a:ext cx="8412480" cy="658368"/>
           </a:xfrm>
           <a:prstGeom prst="roundRect">
@@ -3509,7 +3925,12 @@
           <a:solidFill>
             <a:srgbClr val="FFFFFF"/>
           </a:solidFill>
-          <a:ln/>
+          <a:ln w="19050">
+            <a:solidFill>
+              <a:srgbClr val="C7922C"/>
+            </a:solidFill>
+            <a:prstDash val="solid"/>
+          </a:ln>
           <a:effectLst>
             <a:outerShdw sx="100000" sy="100000" kx="0" ky="0" algn="bl" rotWithShape="0" blurRad="101600" dist="38100" dir="2700000">
               <a:srgbClr val="000000">
@@ -3521,44 +3942,58 @@
       </p:sp>
       <p:sp>
         <p:nvSpPr>
-          <p:cNvPr id="8" name="Text 6"/>
-          <p:cNvSpPr/>
-          <p:nvPr/>
-        </p:nvSpPr>
-        <p:spPr>
-          <a:xfrm>
-            <a:off x="594360" y="1956816"/>
-            <a:ext cx="7863840" cy="402336"/>
-          </a:xfrm>
-          <a:prstGeom prst="rect">
-            <a:avLst/>
-          </a:prstGeom>
-          <a:noFill/>
-          <a:ln/>
-        </p:spPr>
-        <p:txBody>
-          <a:bodyPr wrap="square" lIns="0" tIns="0" rIns="0" bIns="0" rtlCol="0" anchor="ctr"/>
-          <a:lstStyle/>
-          <a:p>
-            <a:pPr indent="0" marL="0">
-              <a:buNone/>
-            </a:pPr>
-            <a:r>
-              <a:rPr lang="en-US" sz="1600" b="1" dirty="0">
-                <a:solidFill>
-                  <a:srgbClr val="34B76F"/>
-                </a:solidFill>
-                <a:latin typeface="Calibri" pitchFamily="34" charset="0"/>
-                <a:ea typeface="Calibri" pitchFamily="34" charset="-122"/>
-                <a:cs typeface="Calibri" pitchFamily="34" charset="-120"/>
-              </a:rPr>
-              <a:t>“Gone,”</a:t>
-            </a:r>
-            <a:pPr indent="0" marL="0">
-              <a:buNone/>
-            </a:pPr>
-            <a:r>
-              <a:rPr lang="en-US" sz="1600" dirty="0">
+          <p:cNvPr id="10" name="Text 8"/>
+          <p:cNvSpPr/>
+          <p:nvPr/>
+        </p:nvSpPr>
+        <p:spPr>
+          <a:xfrm>
+            <a:off x="594360" y="2340864"/>
+            <a:ext cx="7955280" cy="402336"/>
+          </a:xfrm>
+          <a:prstGeom prst="rect">
+            <a:avLst/>
+          </a:prstGeom>
+          <a:noFill/>
+          <a:ln/>
+        </p:spPr>
+        <p:txBody>
+          <a:bodyPr wrap="square" lIns="0" tIns="0" rIns="0" bIns="0" rtlCol="0" anchor="ctr"/>
+          <a:lstStyle/>
+          <a:p>
+            <a:pPr indent="0" marL="0">
+              <a:buNone/>
+            </a:pPr>
+            <a:endParaRPr lang="en-US" sz="1700" dirty="0"/>
+          </a:p>
+        </p:txBody>
+      </p:sp>
+      <p:sp>
+        <p:nvSpPr>
+          <p:cNvPr id="11" name="Text 9"/>
+          <p:cNvSpPr/>
+          <p:nvPr/>
+        </p:nvSpPr>
+        <p:spPr>
+          <a:xfrm>
+            <a:off x="594360" y="2340864"/>
+            <a:ext cx="7955280" cy="402336"/>
+          </a:xfrm>
+          <a:prstGeom prst="rect">
+            <a:avLst/>
+          </a:prstGeom>
+          <a:noFill/>
+          <a:ln/>
+        </p:spPr>
+        <p:txBody>
+          <a:bodyPr wrap="square" lIns="0" tIns="0" rIns="0" bIns="0" rtlCol="0" anchor="ctr"/>
+          <a:lstStyle/>
+          <a:p>
+            <a:pPr indent="0" marL="0">
+              <a:buNone/>
+            </a:pPr>
+            <a:r>
+              <a:rPr lang="en-US" sz="1700" dirty="0">
                 <a:solidFill>
                   <a:srgbClr val="1E293B"/>
                 </a:solidFill>
@@ -3566,67 +4001,13 @@
                 <a:ea typeface="Calibri" pitchFamily="34" charset="-122"/>
                 <a:cs typeface="Calibri" pitchFamily="34" charset="-120"/>
               </a:rPr>
-              <a:t> said Cook quietly.</a:t>
-            </a:r>
-            <a:endParaRPr lang="en-US" sz="1600" dirty="0"/>
-          </a:p>
-        </p:txBody>
-      </p:sp>
-      <p:sp>
-        <p:nvSpPr>
-          <p:cNvPr id="9" name="Shape 7"/>
-          <p:cNvSpPr/>
-          <p:nvPr/>
-        </p:nvSpPr>
-        <p:spPr>
-          <a:xfrm>
-            <a:off x="365760" y="2542032"/>
-            <a:ext cx="8412480" cy="658368"/>
-          </a:xfrm>
-          <a:prstGeom prst="roundRect">
-            <a:avLst>
-              <a:gd name="adj" fmla="val 13889"/>
-            </a:avLst>
-          </a:prstGeom>
-          <a:solidFill>
-            <a:srgbClr val="FEF6E8"/>
-          </a:solidFill>
-          <a:ln/>
-          <a:effectLst>
-            <a:outerShdw sx="100000" sy="100000" kx="0" ky="0" algn="bl" rotWithShape="0" blurRad="101600" dist="38100" dir="2700000">
-              <a:srgbClr val="000000">
-                <a:alpha val="12000"/>
-              </a:srgbClr>
-            </a:outerShdw>
-          </a:effectLst>
-        </p:spPr>
-      </p:sp>
-      <p:sp>
-        <p:nvSpPr>
-          <p:cNvPr id="10" name="Text 8"/>
-          <p:cNvSpPr/>
-          <p:nvPr/>
-        </p:nvSpPr>
-        <p:spPr>
-          <a:xfrm>
-            <a:off x="594360" y="2688336"/>
-            <a:ext cx="7863840" cy="402336"/>
-          </a:xfrm>
-          <a:prstGeom prst="rect">
-            <a:avLst/>
-          </a:prstGeom>
-          <a:noFill/>
-          <a:ln/>
-        </p:spPr>
-        <p:txBody>
-          <a:bodyPr wrap="square" lIns="0" tIns="0" rIns="0" bIns="0" rtlCol="0" anchor="ctr"/>
-          <a:lstStyle/>
-          <a:p>
-            <a:pPr indent="0" marL="0">
-              <a:buNone/>
-            </a:pPr>
-            <a:r>
-              <a:rPr lang="en-US" sz="1600" dirty="0">
+              <a:t>The</a:t>
+            </a:r>
+            <a:pPr indent="0" marL="0">
+              <a:buNone/>
+            </a:pPr>
+            <a:r>
+              <a:rPr lang="en-US" sz="1700" dirty="0">
                 <a:solidFill>
                   <a:srgbClr val="1E293B"/>
                 </a:solidFill>
@@ -3634,27 +4015,27 @@
                 <a:ea typeface="Calibri" pitchFamily="34" charset="-122"/>
                 <a:cs typeface="Calibri" pitchFamily="34" charset="-120"/>
               </a:rPr>
-              <a:t>The king </a:t>
-            </a:r>
-            <a:pPr indent="0" marL="0">
-              <a:buNone/>
-            </a:pPr>
-            <a:r>
-              <a:rPr lang="en-US" sz="1600" b="1" dirty="0">
-                <a:solidFill>
-                  <a:srgbClr val="34B76F"/>
-                </a:solidFill>
-                <a:latin typeface="Calibri" pitchFamily="34" charset="0"/>
-                <a:ea typeface="Calibri" pitchFamily="34" charset="-122"/>
-                <a:cs typeface="Calibri" pitchFamily="34" charset="-120"/>
-              </a:rPr>
-              <a:t>shouted,</a:t>
-            </a:r>
-            <a:pPr indent="0" marL="0">
-              <a:buNone/>
-            </a:pPr>
-            <a:r>
-              <a:rPr lang="en-US" sz="1600" dirty="0">
+              <a:t> </a:t>
+            </a:r>
+            <a:pPr indent="0" marL="0">
+              <a:buNone/>
+            </a:pPr>
+            <a:r>
+              <a:rPr lang="en-US" sz="1700" b="1" u="sng" dirty="0">
+                <a:solidFill>
+                  <a:srgbClr val="C7922C"/>
+                </a:solidFill>
+                <a:latin typeface="Calibri" pitchFamily="34" charset="0"/>
+                <a:ea typeface="Calibri" pitchFamily="34" charset="-122"/>
+                <a:cs typeface="Calibri" pitchFamily="34" charset="-120"/>
+              </a:rPr>
+              <a:t>small,</a:t>
+            </a:r>
+            <a:pPr indent="0" marL="0">
+              <a:buNone/>
+            </a:pPr>
+            <a:r>
+              <a:rPr lang="en-US" sz="1700" dirty="0">
                 <a:solidFill>
                   <a:srgbClr val="1E293B"/>
                 </a:solidFill>
@@ -3662,40 +4043,193 @@
                 <a:ea typeface="Calibri" pitchFamily="34" charset="-122"/>
                 <a:cs typeface="Calibri" pitchFamily="34" charset="-120"/>
               </a:rPr>
-              <a:t> “Find her!”</a:t>
-            </a:r>
-            <a:endParaRPr lang="en-US" sz="1600" dirty="0"/>
-          </a:p>
-        </p:txBody>
-      </p:sp>
-      <p:sp>
-        <p:nvSpPr>
-          <p:cNvPr id="11" name="Shape 9"/>
-          <p:cNvSpPr/>
-          <p:nvPr/>
-        </p:nvSpPr>
-        <p:spPr>
-          <a:xfrm>
-            <a:off x="365760" y="3273552"/>
-            <a:ext cx="8412480" cy="658368"/>
-          </a:xfrm>
-          <a:prstGeom prst="roundRect">
-            <a:avLst>
-              <a:gd name="adj" fmla="val 13889"/>
-            </a:avLst>
-          </a:prstGeom>
-          <a:solidFill>
-            <a:srgbClr val="FFFFFF"/>
-          </a:solidFill>
-          <a:ln/>
-          <a:effectLst>
-            <a:outerShdw sx="100000" sy="100000" kx="0" ky="0" algn="bl" rotWithShape="0" blurRad="101600" dist="38100" dir="2700000">
-              <a:srgbClr val="000000">
-                <a:alpha val="12000"/>
-              </a:srgbClr>
-            </a:outerShdw>
-          </a:effectLst>
-        </p:spPr>
+              <a:t> </a:t>
+            </a:r>
+            <a:pPr indent="0" marL="0">
+              <a:buNone/>
+            </a:pPr>
+            <a:r>
+              <a:rPr lang="en-US" sz="1700" b="1" u="sng" dirty="0">
+                <a:solidFill>
+                  <a:srgbClr val="C7922C"/>
+                </a:solidFill>
+                <a:latin typeface="Calibri" pitchFamily="34" charset="0"/>
+                <a:ea typeface="Calibri" pitchFamily="34" charset="-122"/>
+                <a:cs typeface="Calibri" pitchFamily="34" charset="-120"/>
+              </a:rPr>
+              <a:t>trembling</a:t>
+            </a:r>
+            <a:pPr indent="0" marL="0">
+              <a:buNone/>
+            </a:pPr>
+            <a:r>
+              <a:rPr lang="en-US" sz="1700" dirty="0">
+                <a:solidFill>
+                  <a:srgbClr val="1E293B"/>
+                </a:solidFill>
+                <a:latin typeface="Calibri" pitchFamily="34" charset="0"/>
+                <a:ea typeface="Calibri" pitchFamily="34" charset="-122"/>
+                <a:cs typeface="Calibri" pitchFamily="34" charset="-120"/>
+              </a:rPr>
+              <a:t> </a:t>
+            </a:r>
+            <a:pPr indent="0" marL="0">
+              <a:buNone/>
+            </a:pPr>
+            <a:r>
+              <a:rPr lang="en-US" sz="1700" dirty="0">
+                <a:solidFill>
+                  <a:srgbClr val="1E293B"/>
+                </a:solidFill>
+                <a:latin typeface="Calibri" pitchFamily="34" charset="0"/>
+                <a:ea typeface="Calibri" pitchFamily="34" charset="-122"/>
+                <a:cs typeface="Calibri" pitchFamily="34" charset="-120"/>
+              </a:rPr>
+              <a:t>mouse</a:t>
+            </a:r>
+            <a:pPr indent="0" marL="0">
+              <a:buNone/>
+            </a:pPr>
+            <a:r>
+              <a:rPr lang="en-US" sz="1700" dirty="0">
+                <a:solidFill>
+                  <a:srgbClr val="1E293B"/>
+                </a:solidFill>
+                <a:latin typeface="Calibri" pitchFamily="34" charset="0"/>
+                <a:ea typeface="Calibri" pitchFamily="34" charset="-122"/>
+                <a:cs typeface="Calibri" pitchFamily="34" charset="-120"/>
+              </a:rPr>
+              <a:t> </a:t>
+            </a:r>
+            <a:pPr indent="0" marL="0">
+              <a:buNone/>
+            </a:pPr>
+            <a:r>
+              <a:rPr lang="en-US" sz="1700" dirty="0">
+                <a:solidFill>
+                  <a:srgbClr val="1E293B"/>
+                </a:solidFill>
+                <a:latin typeface="Calibri" pitchFamily="34" charset="0"/>
+                <a:ea typeface="Calibri" pitchFamily="34" charset="-122"/>
+                <a:cs typeface="Calibri" pitchFamily="34" charset="-120"/>
+              </a:rPr>
+              <a:t>crept</a:t>
+            </a:r>
+            <a:pPr indent="0" marL="0">
+              <a:buNone/>
+            </a:pPr>
+            <a:r>
+              <a:rPr lang="en-US" sz="1700" dirty="0">
+                <a:solidFill>
+                  <a:srgbClr val="1E293B"/>
+                </a:solidFill>
+                <a:latin typeface="Calibri" pitchFamily="34" charset="0"/>
+                <a:ea typeface="Calibri" pitchFamily="34" charset="-122"/>
+                <a:cs typeface="Calibri" pitchFamily="34" charset="-120"/>
+              </a:rPr>
+              <a:t> </a:t>
+            </a:r>
+            <a:pPr indent="0" marL="0">
+              <a:buNone/>
+            </a:pPr>
+            <a:r>
+              <a:rPr lang="en-US" sz="1700" dirty="0">
+                <a:solidFill>
+                  <a:srgbClr val="1E293B"/>
+                </a:solidFill>
+                <a:latin typeface="Calibri" pitchFamily="34" charset="0"/>
+                <a:ea typeface="Calibri" pitchFamily="34" charset="-122"/>
+                <a:cs typeface="Calibri" pitchFamily="34" charset="-120"/>
+              </a:rPr>
+              <a:t>along</a:t>
+            </a:r>
+            <a:pPr indent="0" marL="0">
+              <a:buNone/>
+            </a:pPr>
+            <a:r>
+              <a:rPr lang="en-US" sz="1700" dirty="0">
+                <a:solidFill>
+                  <a:srgbClr val="1E293B"/>
+                </a:solidFill>
+                <a:latin typeface="Calibri" pitchFamily="34" charset="0"/>
+                <a:ea typeface="Calibri" pitchFamily="34" charset="-122"/>
+                <a:cs typeface="Calibri" pitchFamily="34" charset="-120"/>
+              </a:rPr>
+              <a:t> </a:t>
+            </a:r>
+            <a:pPr indent="0" marL="0">
+              <a:buNone/>
+            </a:pPr>
+            <a:r>
+              <a:rPr lang="en-US" sz="1700" dirty="0">
+                <a:solidFill>
+                  <a:srgbClr val="1E293B"/>
+                </a:solidFill>
+                <a:latin typeface="Calibri" pitchFamily="34" charset="0"/>
+                <a:ea typeface="Calibri" pitchFamily="34" charset="-122"/>
+                <a:cs typeface="Calibri" pitchFamily="34" charset="-120"/>
+              </a:rPr>
+              <a:t>the</a:t>
+            </a:r>
+            <a:pPr indent="0" marL="0">
+              <a:buNone/>
+            </a:pPr>
+            <a:r>
+              <a:rPr lang="en-US" sz="1700" dirty="0">
+                <a:solidFill>
+                  <a:srgbClr val="1E293B"/>
+                </a:solidFill>
+                <a:latin typeface="Calibri" pitchFamily="34" charset="0"/>
+                <a:ea typeface="Calibri" pitchFamily="34" charset="-122"/>
+                <a:cs typeface="Calibri" pitchFamily="34" charset="-120"/>
+              </a:rPr>
+              <a:t> </a:t>
+            </a:r>
+            <a:pPr indent="0" marL="0">
+              <a:buNone/>
+            </a:pPr>
+            <a:r>
+              <a:rPr lang="en-US" sz="1700" b="1" u="sng" dirty="0">
+                <a:solidFill>
+                  <a:srgbClr val="C7922C"/>
+                </a:solidFill>
+                <a:latin typeface="Calibri" pitchFamily="34" charset="0"/>
+                <a:ea typeface="Calibri" pitchFamily="34" charset="-122"/>
+                <a:cs typeface="Calibri" pitchFamily="34" charset="-120"/>
+              </a:rPr>
+              <a:t>dark</a:t>
+            </a:r>
+            <a:pPr indent="0" marL="0">
+              <a:buNone/>
+            </a:pPr>
+            <a:r>
+              <a:rPr lang="en-US" sz="1700" dirty="0">
+                <a:solidFill>
+                  <a:srgbClr val="1E293B"/>
+                </a:solidFill>
+                <a:latin typeface="Calibri" pitchFamily="34" charset="0"/>
+                <a:ea typeface="Calibri" pitchFamily="34" charset="-122"/>
+                <a:cs typeface="Calibri" pitchFamily="34" charset="-120"/>
+              </a:rPr>
+              <a:t> </a:t>
+            </a:r>
+            <a:pPr indent="0" marL="0">
+              <a:buNone/>
+            </a:pPr>
+            <a:r>
+              <a:rPr lang="en-US" sz="1700" dirty="0">
+                <a:solidFill>
+                  <a:srgbClr val="1E293B"/>
+                </a:solidFill>
+                <a:latin typeface="Calibri" pitchFamily="34" charset="0"/>
+                <a:ea typeface="Calibri" pitchFamily="34" charset="-122"/>
+                <a:cs typeface="Calibri" pitchFamily="34" charset="-120"/>
+              </a:rPr>
+              <a:t>corridor.</a:t>
+            </a:r>
+            <a:endParaRPr lang="en-US" sz="1700" dirty="0"/>
+          </a:p>
+        </p:txBody>
       </p:sp>
       <p:sp>
         <p:nvSpPr>
@@ -3705,24 +4239,63 @@
         </p:nvSpPr>
         <p:spPr>
           <a:xfrm>
-            <a:off x="594360" y="3419856"/>
-            <a:ext cx="7863840" cy="402336"/>
-          </a:xfrm>
-          <a:prstGeom prst="rect">
-            <a:avLst/>
-          </a:prstGeom>
-          <a:noFill/>
-          <a:ln/>
-        </p:spPr>
-        <p:txBody>
-          <a:bodyPr wrap="square" lIns="0" tIns="0" rIns="0" bIns="0" rtlCol="0" anchor="ctr"/>
-          <a:lstStyle/>
-          <a:p>
-            <a:pPr indent="0" marL="0">
-              <a:buNone/>
-            </a:pPr>
-            <a:r>
-              <a:rPr lang="en-US" sz="1600" dirty="0">
+            <a:off x="365760" y="3008376"/>
+            <a:ext cx="8229600" cy="237744"/>
+          </a:xfrm>
+          <a:prstGeom prst="rect">
+            <a:avLst/>
+          </a:prstGeom>
+          <a:noFill/>
+          <a:ln/>
+        </p:spPr>
+        <p:txBody>
+          <a:bodyPr wrap="square" lIns="0" tIns="0" rIns="0" bIns="0" rtlCol="0" anchor="ctr"/>
+          <a:lstStyle/>
+          <a:p>
+            <a:pPr indent="0" marL="0">
+              <a:buNone/>
+            </a:pPr>
+            <a:r>
+              <a:rPr lang="en-US" sz="1100" b="1" spc="100" kern="0" dirty="0">
+                <a:solidFill>
+                  <a:srgbClr val="C7922C"/>
+                </a:solidFill>
+                <a:latin typeface="Calibri" pitchFamily="34" charset="0"/>
+                <a:ea typeface="Calibri" pitchFamily="34" charset="-122"/>
+                <a:cs typeface="Calibri" pitchFamily="34" charset="-120"/>
+              </a:rPr>
+              <a:t>THINK IT THROUGH</a:t>
+            </a:r>
+            <a:endParaRPr lang="en-US" sz="1100" dirty="0"/>
+          </a:p>
+        </p:txBody>
+      </p:sp>
+      <p:sp>
+        <p:nvSpPr>
+          <p:cNvPr id="13" name="Text 11"/>
+          <p:cNvSpPr/>
+          <p:nvPr/>
+        </p:nvSpPr>
+        <p:spPr>
+          <a:xfrm>
+            <a:off x="365760" y="3255264"/>
+            <a:ext cx="8412480" cy="1563624"/>
+          </a:xfrm>
+          <a:prstGeom prst="rect">
+            <a:avLst/>
+          </a:prstGeom>
+          <a:noFill/>
+          <a:ln/>
+        </p:spPr>
+        <p:txBody>
+          <a:bodyPr wrap="square" lIns="0" tIns="0" rIns="0" bIns="0" rtlCol="0" anchor="t"/>
+          <a:lstStyle/>
+          <a:p>
+            <a:pPr indent="0" marL="0">
+              <a:buNone/>
+            </a:pPr>
+            <a:r>
+              <a:rPr lang="en-US" sz="1400" dirty="0">
                 <a:solidFill>
                   <a:srgbClr val="1E293B"/>
                 </a:solidFill>
@@ -3730,27 +4303,16 @@
                 <a:ea typeface="Calibri" pitchFamily="34" charset="-122"/>
                 <a:cs typeface="Calibri" pitchFamily="34" charset="-120"/>
               </a:rPr>
-              <a:t>“I will </a:t>
-            </a:r>
-            <a:pPr indent="0" marL="0">
-              <a:buNone/>
-            </a:pPr>
-            <a:r>
-              <a:rPr lang="en-US" sz="1600" b="1" dirty="0">
-                <a:solidFill>
-                  <a:srgbClr val="34B76F"/>
-                </a:solidFill>
-                <a:latin typeface="Calibri" pitchFamily="34" charset="0"/>
-                <a:ea typeface="Calibri" pitchFamily="34" charset="-122"/>
-                <a:cs typeface="Calibri" pitchFamily="34" charset="-120"/>
-              </a:rPr>
-              <a:t>go,”</a:t>
-            </a:r>
-            <a:pPr indent="0" marL="0">
-              <a:buNone/>
-            </a:pPr>
-            <a:r>
-              <a:rPr lang="en-US" sz="1600" dirty="0">
+              <a:t>1.  Which sentence lets you picture the mouse? What does the other one leave out?</a:t>
+            </a:r>
+            <a:endParaRPr lang="en-US" sz="1400" dirty="0"/>
+          </a:p>
+          <a:p>
+            <a:pPr indent="0" marL="0">
+              <a:buNone/>
+            </a:pPr>
+            <a:r>
+              <a:rPr lang="en-US" sz="1400" dirty="0">
                 <a:solidFill>
                   <a:srgbClr val="1E293B"/>
                 </a:solidFill>
@@ -3758,48 +4320,26 @@
                 <a:ea typeface="Calibri" pitchFamily="34" charset="-122"/>
                 <a:cs typeface="Calibri" pitchFamily="34" charset="-120"/>
               </a:rPr>
-              <a:t> said the mouse.</a:t>
-            </a:r>
-            <a:endParaRPr lang="en-US" sz="1600" dirty="0"/>
-          </a:p>
-        </p:txBody>
-      </p:sp>
-      <p:sp>
-        <p:nvSpPr>
-          <p:cNvPr id="13" name="Text 11"/>
-          <p:cNvSpPr/>
-          <p:nvPr/>
-        </p:nvSpPr>
-        <p:spPr>
-          <a:xfrm>
-            <a:off x="365760" y="4050792"/>
-            <a:ext cx="8412480" cy="365760"/>
-          </a:xfrm>
-          <a:prstGeom prst="rect">
-            <a:avLst/>
-          </a:prstGeom>
-          <a:noFill/>
-          <a:ln/>
-        </p:spPr>
-        <p:txBody>
-          <a:bodyPr wrap="square" lIns="0" tIns="0" rIns="0" bIns="0" rtlCol="0" anchor="ctr"/>
-          <a:lstStyle/>
-          <a:p>
-            <a:pPr indent="0" marL="0">
-              <a:buNone/>
-            </a:pPr>
-            <a:r>
-              <a:rPr lang="en-US" sz="1500" b="1" dirty="0">
-                <a:solidFill>
-                  <a:srgbClr val="34B76F"/>
-                </a:solidFill>
-                <a:latin typeface="Calibri" pitchFamily="34" charset="0"/>
-                <a:ea typeface="Calibri" pitchFamily="34" charset="-122"/>
-                <a:cs typeface="Calibri" pitchFamily="34" charset="-120"/>
-              </a:rPr>
-              <a:t>✅  Answers revealed</a:t>
-            </a:r>
-            <a:endParaRPr lang="en-US" sz="1500" dirty="0"/>
+              <a:t>2.  Take small, trembling and dark out again. What kind of word is each one sitting next to?</a:t>
+            </a:r>
+            <a:endParaRPr lang="en-US" sz="1400" dirty="0"/>
+          </a:p>
+          <a:p>
+            <a:pPr indent="0" marL="0">
+              <a:buNone/>
+            </a:pPr>
+            <a:r>
+              <a:rPr lang="en-US" sz="1400" dirty="0">
+                <a:solidFill>
+                  <a:srgbClr val="1E293B"/>
+                </a:solidFill>
+                <a:latin typeface="Calibri" pitchFamily="34" charset="0"/>
+                <a:ea typeface="Calibri" pitchFamily="34" charset="-122"/>
+                <a:cs typeface="Calibri" pitchFamily="34" charset="-120"/>
+              </a:rPr>
+              <a:t>3.  Could you add a describing word in front of thread or princess too? Try one.</a:t>
+            </a:r>
+            <a:endParaRPr lang="en-US" sz="1400" dirty="0"/>
           </a:p>
         </p:txBody>
       </p:sp>
@@ -3850,7 +4390,7 @@
             <a:avLst/>
           </a:prstGeom>
           <a:solidFill>
-            <a:srgbClr val="0E1C42"/>
+            <a:srgbClr val="C7922C"/>
           </a:solidFill>
           <a:ln/>
         </p:spPr>
@@ -3888,7 +4428,7 @@
                 <a:ea typeface="Calibri" pitchFamily="34" charset="-122"/>
                 <a:cs typeface="Calibri" pitchFamily="34" charset="-120"/>
               </a:rPr>
-              <a:t>🔠  Spelling</a:t>
+              <a:t>✏️  Grammar — What do you notice?</a:t>
             </a:r>
             <a:endParaRPr lang="en-US" sz="2200" dirty="0"/>
           </a:p>
@@ -3902,7 +4442,7 @@
         </p:nvSpPr>
         <p:spPr>
           <a:xfrm>
-            <a:off x="365760" y="777240"/>
+            <a:off x="365760" y="749808"/>
             <a:ext cx="8229600" cy="237744"/>
           </a:xfrm>
           <a:prstGeom prst="rect">
@@ -3921,13 +4461,13 @@
             <a:r>
               <a:rPr lang="en-US" sz="1100" b="1" spc="100" kern="0" dirty="0">
                 <a:solidFill>
-                  <a:srgbClr val="0E1C42"/>
-                </a:solidFill>
-                <a:latin typeface="Calibri" pitchFamily="34" charset="0"/>
-                <a:ea typeface="Calibri" pitchFamily="34" charset="-122"/>
-                <a:cs typeface="Calibri" pitchFamily="34" charset="-120"/>
-              </a:rPr>
-              <a:t>SOFT C AND SOFT G</a:t>
+                  <a:srgbClr val="C7922C"/>
+                </a:solidFill>
+                <a:latin typeface="Calibri" pitchFamily="34" charset="0"/>
+                <a:ea typeface="Calibri" pitchFamily="34" charset="-122"/>
+                <a:cs typeface="Calibri" pitchFamily="34" charset="-120"/>
+              </a:rPr>
+              <a:t>ADJECTIVES AND COMPARING</a:t>
             </a:r>
             <a:endParaRPr lang="en-US" sz="1100" dirty="0"/>
           </a:p>
@@ -3941,24 +4481,24 @@
         </p:nvSpPr>
         <p:spPr>
           <a:xfrm>
-            <a:off x="365760" y="1078992"/>
-            <a:ext cx="8229600" cy="237744"/>
-          </a:xfrm>
-          <a:prstGeom prst="rect">
-            <a:avLst/>
-          </a:prstGeom>
-          <a:noFill/>
-          <a:ln/>
-        </p:spPr>
-        <p:txBody>
-          <a:bodyPr wrap="square" lIns="0" tIns="0" rIns="0" bIns="0" rtlCol="0" anchor="ctr"/>
-          <a:lstStyle/>
-          <a:p>
-            <a:pPr indent="0" marL="0">
-              <a:buNone/>
-            </a:pPr>
-            <a:r>
-              <a:rPr lang="en-US" sz="1100" b="1" spc="100" kern="0" dirty="0">
+            <a:off x="365760" y="987552"/>
+            <a:ext cx="8412480" cy="411480"/>
+          </a:xfrm>
+          <a:prstGeom prst="rect">
+            <a:avLst/>
+          </a:prstGeom>
+          <a:noFill/>
+          <a:ln/>
+        </p:spPr>
+        <p:txBody>
+          <a:bodyPr wrap="square" lIns="0" tIns="0" rIns="0" bIns="0" rtlCol="0" anchor="ctr"/>
+          <a:lstStyle/>
+          <a:p>
+            <a:pPr indent="0" marL="0">
+              <a:buNone/>
+            </a:pPr>
+            <a:r>
+              <a:rPr lang="en-US" sz="1500" i="1" dirty="0">
                 <a:solidFill>
                   <a:srgbClr val="64748B"/>
                 </a:solidFill>
@@ -3966,9 +4506,9 @@
                 <a:ea typeface="Calibri" pitchFamily="34" charset="-122"/>
                 <a:cs typeface="Calibri" pitchFamily="34" charset="-120"/>
               </a:rPr>
-              <a:t>WORD BANK</a:t>
-            </a:r>
-            <a:endParaRPr lang="en-US" sz="1100" dirty="0"/>
+              <a:t>Two sentences about the same mouse. The second one is longer. Read both and work out what the extra words are doing.</a:t>
+            </a:r>
+            <a:endParaRPr lang="en-US" sz="1500" dirty="0"/>
           </a:p>
         </p:txBody>
       </p:sp>
@@ -3980,20 +4520,20 @@
         </p:nvSpPr>
         <p:spPr>
           <a:xfrm>
-            <a:off x="365760" y="1353312"/>
-            <a:ext cx="8412480" cy="1005840"/>
+            <a:off x="365760" y="1463040"/>
+            <a:ext cx="8412480" cy="658368"/>
           </a:xfrm>
           <a:prstGeom prst="roundRect">
             <a:avLst>
-              <a:gd name="adj" fmla="val 9091"/>
+              <a:gd name="adj" fmla="val 13889"/>
             </a:avLst>
           </a:prstGeom>
           <a:solidFill>
-            <a:srgbClr val="FFFFFF"/>
+            <a:srgbClr val="FEF6E8"/>
           </a:solidFill>
           <a:ln w="19050">
             <a:solidFill>
-              <a:srgbClr val="0E1C42"/>
+              <a:srgbClr val="C7922C"/>
             </a:solidFill>
             <a:prstDash val="solid"/>
           </a:ln>
@@ -4014,8 +4554,36 @@
         </p:nvSpPr>
         <p:spPr>
           <a:xfrm>
-            <a:off x="594360" y="1481328"/>
-            <a:ext cx="7955280" cy="749808"/>
+            <a:off x="594360" y="1591056"/>
+            <a:ext cx="7955280" cy="402336"/>
+          </a:xfrm>
+          <a:prstGeom prst="rect">
+            <a:avLst/>
+          </a:prstGeom>
+          <a:noFill/>
+          <a:ln/>
+        </p:spPr>
+        <p:txBody>
+          <a:bodyPr wrap="square" lIns="0" tIns="0" rIns="0" bIns="0" rtlCol="0" anchor="ctr"/>
+          <a:lstStyle/>
+          <a:p>
+            <a:pPr indent="0" marL="0">
+              <a:buNone/>
+            </a:pPr>
+            <a:endParaRPr lang="en-US" sz="1700" dirty="0"/>
+          </a:p>
+        </p:txBody>
+      </p:sp>
+      <p:sp>
+        <p:nvSpPr>
+          <p:cNvPr id="8" name="Text 6"/>
+          <p:cNvSpPr/>
+          <p:nvPr/>
+        </p:nvSpPr>
+        <p:spPr>
+          <a:xfrm>
+            <a:off x="594360" y="1591056"/>
+            <a:ext cx="7955280" cy="402336"/>
           </a:xfrm>
           <a:prstGeom prst="rect">
             <a:avLst/>
@@ -4033,13 +4601,153 @@
             <a:r>
               <a:rPr lang="en-US" sz="1700" dirty="0">
                 <a:solidFill>
-                  <a:srgbClr val="0E1C42"/>
-                </a:solidFill>
-                <a:latin typeface="Calibri" pitchFamily="34" charset="0"/>
-                <a:ea typeface="Calibri" pitchFamily="34" charset="-122"/>
-                <a:cs typeface="Calibri" pitchFamily="34" charset="-120"/>
-              </a:rPr>
-              <a:t>mice   ·   prince   ·   magic   ·   gentle   ·   Cook   ·   candle   ·   gold   ·   garlic</a:t>
+                  <a:srgbClr val="1E293B"/>
+                </a:solidFill>
+                <a:latin typeface="Calibri" pitchFamily="34" charset="0"/>
+                <a:ea typeface="Calibri" pitchFamily="34" charset="-122"/>
+                <a:cs typeface="Calibri" pitchFamily="34" charset="-120"/>
+              </a:rPr>
+              <a:t>The</a:t>
+            </a:r>
+            <a:pPr indent="0" marL="0">
+              <a:buNone/>
+            </a:pPr>
+            <a:r>
+              <a:rPr lang="en-US" sz="1700" dirty="0">
+                <a:solidFill>
+                  <a:srgbClr val="1E293B"/>
+                </a:solidFill>
+                <a:latin typeface="Calibri" pitchFamily="34" charset="0"/>
+                <a:ea typeface="Calibri" pitchFamily="34" charset="-122"/>
+                <a:cs typeface="Calibri" pitchFamily="34" charset="-120"/>
+              </a:rPr>
+              <a:t> </a:t>
+            </a:r>
+            <a:pPr indent="0" marL="0">
+              <a:buNone/>
+            </a:pPr>
+            <a:r>
+              <a:rPr lang="en-US" sz="1700" dirty="0">
+                <a:solidFill>
+                  <a:srgbClr val="1E293B"/>
+                </a:solidFill>
+                <a:latin typeface="Calibri" pitchFamily="34" charset="0"/>
+                <a:ea typeface="Calibri" pitchFamily="34" charset="-122"/>
+                <a:cs typeface="Calibri" pitchFamily="34" charset="-120"/>
+              </a:rPr>
+              <a:t>mouse</a:t>
+            </a:r>
+            <a:pPr indent="0" marL="0">
+              <a:buNone/>
+            </a:pPr>
+            <a:r>
+              <a:rPr lang="en-US" sz="1700" dirty="0">
+                <a:solidFill>
+                  <a:srgbClr val="1E293B"/>
+                </a:solidFill>
+                <a:latin typeface="Calibri" pitchFamily="34" charset="0"/>
+                <a:ea typeface="Calibri" pitchFamily="34" charset="-122"/>
+                <a:cs typeface="Calibri" pitchFamily="34" charset="-120"/>
+              </a:rPr>
+              <a:t> </a:t>
+            </a:r>
+            <a:pPr indent="0" marL="0">
+              <a:buNone/>
+            </a:pPr>
+            <a:r>
+              <a:rPr lang="en-US" sz="1700" dirty="0">
+                <a:solidFill>
+                  <a:srgbClr val="1E293B"/>
+                </a:solidFill>
+                <a:latin typeface="Calibri" pitchFamily="34" charset="0"/>
+                <a:ea typeface="Calibri" pitchFamily="34" charset="-122"/>
+                <a:cs typeface="Calibri" pitchFamily="34" charset="-120"/>
+              </a:rPr>
+              <a:t>crept</a:t>
+            </a:r>
+            <a:pPr indent="0" marL="0">
+              <a:buNone/>
+            </a:pPr>
+            <a:r>
+              <a:rPr lang="en-US" sz="1700" dirty="0">
+                <a:solidFill>
+                  <a:srgbClr val="1E293B"/>
+                </a:solidFill>
+                <a:latin typeface="Calibri" pitchFamily="34" charset="0"/>
+                <a:ea typeface="Calibri" pitchFamily="34" charset="-122"/>
+                <a:cs typeface="Calibri" pitchFamily="34" charset="-120"/>
+              </a:rPr>
+              <a:t> </a:t>
+            </a:r>
+            <a:pPr indent="0" marL="0">
+              <a:buNone/>
+            </a:pPr>
+            <a:r>
+              <a:rPr lang="en-US" sz="1700" dirty="0">
+                <a:solidFill>
+                  <a:srgbClr val="1E293B"/>
+                </a:solidFill>
+                <a:latin typeface="Calibri" pitchFamily="34" charset="0"/>
+                <a:ea typeface="Calibri" pitchFamily="34" charset="-122"/>
+                <a:cs typeface="Calibri" pitchFamily="34" charset="-120"/>
+              </a:rPr>
+              <a:t>along</a:t>
+            </a:r>
+            <a:pPr indent="0" marL="0">
+              <a:buNone/>
+            </a:pPr>
+            <a:r>
+              <a:rPr lang="en-US" sz="1700" dirty="0">
+                <a:solidFill>
+                  <a:srgbClr val="1E293B"/>
+                </a:solidFill>
+                <a:latin typeface="Calibri" pitchFamily="34" charset="0"/>
+                <a:ea typeface="Calibri" pitchFamily="34" charset="-122"/>
+                <a:cs typeface="Calibri" pitchFamily="34" charset="-120"/>
+              </a:rPr>
+              <a:t> </a:t>
+            </a:r>
+            <a:pPr indent="0" marL="0">
+              <a:buNone/>
+            </a:pPr>
+            <a:r>
+              <a:rPr lang="en-US" sz="1700" dirty="0">
+                <a:solidFill>
+                  <a:srgbClr val="1E293B"/>
+                </a:solidFill>
+                <a:latin typeface="Calibri" pitchFamily="34" charset="0"/>
+                <a:ea typeface="Calibri" pitchFamily="34" charset="-122"/>
+                <a:cs typeface="Calibri" pitchFamily="34" charset="-120"/>
+              </a:rPr>
+              <a:t>the</a:t>
+            </a:r>
+            <a:pPr indent="0" marL="0">
+              <a:buNone/>
+            </a:pPr>
+            <a:r>
+              <a:rPr lang="en-US" sz="1700" dirty="0">
+                <a:solidFill>
+                  <a:srgbClr val="1E293B"/>
+                </a:solidFill>
+                <a:latin typeface="Calibri" pitchFamily="34" charset="0"/>
+                <a:ea typeface="Calibri" pitchFamily="34" charset="-122"/>
+                <a:cs typeface="Calibri" pitchFamily="34" charset="-120"/>
+              </a:rPr>
+              <a:t> </a:t>
+            </a:r>
+            <a:pPr indent="0" marL="0">
+              <a:buNone/>
+            </a:pPr>
+            <a:r>
+              <a:rPr lang="en-US" sz="1700" dirty="0">
+                <a:solidFill>
+                  <a:srgbClr val="1E293B"/>
+                </a:solidFill>
+                <a:latin typeface="Calibri" pitchFamily="34" charset="0"/>
+                <a:ea typeface="Calibri" pitchFamily="34" charset="-122"/>
+                <a:cs typeface="Calibri" pitchFamily="34" charset="-120"/>
+              </a:rPr>
+              <a:t>corridor.</a:t>
             </a:r>
             <a:endParaRPr lang="en-US" sz="1700" dirty="0"/>
           </a:p>
@@ -4047,40 +4755,452 @@
       </p:sp>
       <p:sp>
         <p:nvSpPr>
-          <p:cNvPr id="8" name="Text 6"/>
-          <p:cNvSpPr/>
-          <p:nvPr/>
-        </p:nvSpPr>
-        <p:spPr>
-          <a:xfrm>
-            <a:off x="365760" y="2514600"/>
-            <a:ext cx="8412480" cy="457200"/>
-          </a:xfrm>
-          <a:prstGeom prst="rect">
-            <a:avLst/>
-          </a:prstGeom>
-          <a:noFill/>
-          <a:ln/>
-        </p:spPr>
-        <p:txBody>
-          <a:bodyPr wrap="square" lIns="0" tIns="0" rIns="0" bIns="0" rtlCol="0" anchor="ctr"/>
-          <a:lstStyle/>
-          <a:p>
-            <a:pPr indent="0" marL="0">
-              <a:buNone/>
-            </a:pPr>
-            <a:r>
-              <a:rPr lang="en-US" sz="1500" i="1" dirty="0">
-                <a:solidFill>
-                  <a:srgbClr val="64748B"/>
-                </a:solidFill>
-                <a:latin typeface="Calibri" pitchFamily="34" charset="0"/>
-                <a:ea typeface="Calibri" pitchFamily="34" charset="-122"/>
-                <a:cs typeface="Calibri" pitchFamily="34" charset="-120"/>
-              </a:rPr>
-              <a:t>Which column does each word belong in?  Columns: Soft (/s/ or /j/)  |  Hard (/k/ or /g/)</a:t>
-            </a:r>
-            <a:endParaRPr lang="en-US" sz="1500" dirty="0"/>
+          <p:cNvPr id="9" name="Shape 7"/>
+          <p:cNvSpPr/>
+          <p:nvPr/>
+        </p:nvSpPr>
+        <p:spPr>
+          <a:xfrm>
+            <a:off x="365760" y="2212848"/>
+            <a:ext cx="8412480" cy="658368"/>
+          </a:xfrm>
+          <a:prstGeom prst="roundRect">
+            <a:avLst>
+              <a:gd name="adj" fmla="val 13889"/>
+            </a:avLst>
+          </a:prstGeom>
+          <a:solidFill>
+            <a:srgbClr val="FFFFFF"/>
+          </a:solidFill>
+          <a:ln w="19050">
+            <a:solidFill>
+              <a:srgbClr val="C7922C"/>
+            </a:solidFill>
+            <a:prstDash val="solid"/>
+          </a:ln>
+          <a:effectLst>
+            <a:outerShdw sx="100000" sy="100000" kx="0" ky="0" algn="bl" rotWithShape="0" blurRad="101600" dist="38100" dir="2700000">
+              <a:srgbClr val="000000">
+                <a:alpha val="12000"/>
+              </a:srgbClr>
+            </a:outerShdw>
+          </a:effectLst>
+        </p:spPr>
+      </p:sp>
+      <p:sp>
+        <p:nvSpPr>
+          <p:cNvPr id="10" name="Text 8"/>
+          <p:cNvSpPr/>
+          <p:nvPr/>
+        </p:nvSpPr>
+        <p:spPr>
+          <a:xfrm>
+            <a:off x="594360" y="2340864"/>
+            <a:ext cx="7955280" cy="402336"/>
+          </a:xfrm>
+          <a:prstGeom prst="rect">
+            <a:avLst/>
+          </a:prstGeom>
+          <a:noFill/>
+          <a:ln/>
+        </p:spPr>
+        <p:txBody>
+          <a:bodyPr wrap="square" lIns="0" tIns="0" rIns="0" bIns="0" rtlCol="0" anchor="ctr"/>
+          <a:lstStyle/>
+          <a:p>
+            <a:pPr indent="0" marL="0">
+              <a:buNone/>
+            </a:pPr>
+            <a:endParaRPr lang="en-US" sz="1700" dirty="0"/>
+          </a:p>
+        </p:txBody>
+      </p:sp>
+      <p:sp>
+        <p:nvSpPr>
+          <p:cNvPr id="11" name="Text 9"/>
+          <p:cNvSpPr/>
+          <p:nvPr/>
+        </p:nvSpPr>
+        <p:spPr>
+          <a:xfrm>
+            <a:off x="594360" y="2340864"/>
+            <a:ext cx="7955280" cy="402336"/>
+          </a:xfrm>
+          <a:prstGeom prst="rect">
+            <a:avLst/>
+          </a:prstGeom>
+          <a:noFill/>
+          <a:ln/>
+        </p:spPr>
+        <p:txBody>
+          <a:bodyPr wrap="square" lIns="0" tIns="0" rIns="0" bIns="0" rtlCol="0" anchor="ctr"/>
+          <a:lstStyle/>
+          <a:p>
+            <a:pPr indent="0" marL="0">
+              <a:buNone/>
+            </a:pPr>
+            <a:r>
+              <a:rPr lang="en-US" sz="1700" dirty="0">
+                <a:solidFill>
+                  <a:srgbClr val="1E293B"/>
+                </a:solidFill>
+                <a:latin typeface="Calibri" pitchFamily="34" charset="0"/>
+                <a:ea typeface="Calibri" pitchFamily="34" charset="-122"/>
+                <a:cs typeface="Calibri" pitchFamily="34" charset="-120"/>
+              </a:rPr>
+              <a:t>The</a:t>
+            </a:r>
+            <a:pPr indent="0" marL="0">
+              <a:buNone/>
+            </a:pPr>
+            <a:r>
+              <a:rPr lang="en-US" sz="1700" dirty="0">
+                <a:solidFill>
+                  <a:srgbClr val="1E293B"/>
+                </a:solidFill>
+                <a:latin typeface="Calibri" pitchFamily="34" charset="0"/>
+                <a:ea typeface="Calibri" pitchFamily="34" charset="-122"/>
+                <a:cs typeface="Calibri" pitchFamily="34" charset="-120"/>
+              </a:rPr>
+              <a:t> </a:t>
+            </a:r>
+            <a:pPr indent="0" marL="0">
+              <a:buNone/>
+            </a:pPr>
+            <a:r>
+              <a:rPr lang="en-US" sz="1700" b="1" u="sng" dirty="0">
+                <a:solidFill>
+                  <a:srgbClr val="C7922C"/>
+                </a:solidFill>
+                <a:latin typeface="Calibri" pitchFamily="34" charset="0"/>
+                <a:ea typeface="Calibri" pitchFamily="34" charset="-122"/>
+                <a:cs typeface="Calibri" pitchFamily="34" charset="-120"/>
+              </a:rPr>
+              <a:t>small,</a:t>
+            </a:r>
+            <a:pPr indent="0" marL="0">
+              <a:buNone/>
+            </a:pPr>
+            <a:r>
+              <a:rPr lang="en-US" sz="1700" dirty="0">
+                <a:solidFill>
+                  <a:srgbClr val="1E293B"/>
+                </a:solidFill>
+                <a:latin typeface="Calibri" pitchFamily="34" charset="0"/>
+                <a:ea typeface="Calibri" pitchFamily="34" charset="-122"/>
+                <a:cs typeface="Calibri" pitchFamily="34" charset="-120"/>
+              </a:rPr>
+              <a:t> </a:t>
+            </a:r>
+            <a:pPr indent="0" marL="0">
+              <a:buNone/>
+            </a:pPr>
+            <a:r>
+              <a:rPr lang="en-US" sz="1700" b="1" u="sng" dirty="0">
+                <a:solidFill>
+                  <a:srgbClr val="C7922C"/>
+                </a:solidFill>
+                <a:latin typeface="Calibri" pitchFamily="34" charset="0"/>
+                <a:ea typeface="Calibri" pitchFamily="34" charset="-122"/>
+                <a:cs typeface="Calibri" pitchFamily="34" charset="-120"/>
+              </a:rPr>
+              <a:t>trembling</a:t>
+            </a:r>
+            <a:pPr indent="0" marL="0">
+              <a:buNone/>
+            </a:pPr>
+            <a:r>
+              <a:rPr lang="en-US" sz="1700" dirty="0">
+                <a:solidFill>
+                  <a:srgbClr val="1E293B"/>
+                </a:solidFill>
+                <a:latin typeface="Calibri" pitchFamily="34" charset="0"/>
+                <a:ea typeface="Calibri" pitchFamily="34" charset="-122"/>
+                <a:cs typeface="Calibri" pitchFamily="34" charset="-120"/>
+              </a:rPr>
+              <a:t> </a:t>
+            </a:r>
+            <a:pPr indent="0" marL="0">
+              <a:buNone/>
+            </a:pPr>
+            <a:r>
+              <a:rPr lang="en-US" sz="1700" dirty="0">
+                <a:solidFill>
+                  <a:srgbClr val="1E293B"/>
+                </a:solidFill>
+                <a:latin typeface="Calibri" pitchFamily="34" charset="0"/>
+                <a:ea typeface="Calibri" pitchFamily="34" charset="-122"/>
+                <a:cs typeface="Calibri" pitchFamily="34" charset="-120"/>
+              </a:rPr>
+              <a:t>mouse</a:t>
+            </a:r>
+            <a:pPr indent="0" marL="0">
+              <a:buNone/>
+            </a:pPr>
+            <a:r>
+              <a:rPr lang="en-US" sz="1700" dirty="0">
+                <a:solidFill>
+                  <a:srgbClr val="1E293B"/>
+                </a:solidFill>
+                <a:latin typeface="Calibri" pitchFamily="34" charset="0"/>
+                <a:ea typeface="Calibri" pitchFamily="34" charset="-122"/>
+                <a:cs typeface="Calibri" pitchFamily="34" charset="-120"/>
+              </a:rPr>
+              <a:t> </a:t>
+            </a:r>
+            <a:pPr indent="0" marL="0">
+              <a:buNone/>
+            </a:pPr>
+            <a:r>
+              <a:rPr lang="en-US" sz="1700" dirty="0">
+                <a:solidFill>
+                  <a:srgbClr val="1E293B"/>
+                </a:solidFill>
+                <a:latin typeface="Calibri" pitchFamily="34" charset="0"/>
+                <a:ea typeface="Calibri" pitchFamily="34" charset="-122"/>
+                <a:cs typeface="Calibri" pitchFamily="34" charset="-120"/>
+              </a:rPr>
+              <a:t>crept</a:t>
+            </a:r>
+            <a:pPr indent="0" marL="0">
+              <a:buNone/>
+            </a:pPr>
+            <a:r>
+              <a:rPr lang="en-US" sz="1700" dirty="0">
+                <a:solidFill>
+                  <a:srgbClr val="1E293B"/>
+                </a:solidFill>
+                <a:latin typeface="Calibri" pitchFamily="34" charset="0"/>
+                <a:ea typeface="Calibri" pitchFamily="34" charset="-122"/>
+                <a:cs typeface="Calibri" pitchFamily="34" charset="-120"/>
+              </a:rPr>
+              <a:t> </a:t>
+            </a:r>
+            <a:pPr indent="0" marL="0">
+              <a:buNone/>
+            </a:pPr>
+            <a:r>
+              <a:rPr lang="en-US" sz="1700" dirty="0">
+                <a:solidFill>
+                  <a:srgbClr val="1E293B"/>
+                </a:solidFill>
+                <a:latin typeface="Calibri" pitchFamily="34" charset="0"/>
+                <a:ea typeface="Calibri" pitchFamily="34" charset="-122"/>
+                <a:cs typeface="Calibri" pitchFamily="34" charset="-120"/>
+              </a:rPr>
+              <a:t>along</a:t>
+            </a:r>
+            <a:pPr indent="0" marL="0">
+              <a:buNone/>
+            </a:pPr>
+            <a:r>
+              <a:rPr lang="en-US" sz="1700" dirty="0">
+                <a:solidFill>
+                  <a:srgbClr val="1E293B"/>
+                </a:solidFill>
+                <a:latin typeface="Calibri" pitchFamily="34" charset="0"/>
+                <a:ea typeface="Calibri" pitchFamily="34" charset="-122"/>
+                <a:cs typeface="Calibri" pitchFamily="34" charset="-120"/>
+              </a:rPr>
+              <a:t> </a:t>
+            </a:r>
+            <a:pPr indent="0" marL="0">
+              <a:buNone/>
+            </a:pPr>
+            <a:r>
+              <a:rPr lang="en-US" sz="1700" dirty="0">
+                <a:solidFill>
+                  <a:srgbClr val="1E293B"/>
+                </a:solidFill>
+                <a:latin typeface="Calibri" pitchFamily="34" charset="0"/>
+                <a:ea typeface="Calibri" pitchFamily="34" charset="-122"/>
+                <a:cs typeface="Calibri" pitchFamily="34" charset="-120"/>
+              </a:rPr>
+              <a:t>the</a:t>
+            </a:r>
+            <a:pPr indent="0" marL="0">
+              <a:buNone/>
+            </a:pPr>
+            <a:r>
+              <a:rPr lang="en-US" sz="1700" dirty="0">
+                <a:solidFill>
+                  <a:srgbClr val="1E293B"/>
+                </a:solidFill>
+                <a:latin typeface="Calibri" pitchFamily="34" charset="0"/>
+                <a:ea typeface="Calibri" pitchFamily="34" charset="-122"/>
+                <a:cs typeface="Calibri" pitchFamily="34" charset="-120"/>
+              </a:rPr>
+              <a:t> </a:t>
+            </a:r>
+            <a:pPr indent="0" marL="0">
+              <a:buNone/>
+            </a:pPr>
+            <a:r>
+              <a:rPr lang="en-US" sz="1700" b="1" u="sng" dirty="0">
+                <a:solidFill>
+                  <a:srgbClr val="C7922C"/>
+                </a:solidFill>
+                <a:latin typeface="Calibri" pitchFamily="34" charset="0"/>
+                <a:ea typeface="Calibri" pitchFamily="34" charset="-122"/>
+                <a:cs typeface="Calibri" pitchFamily="34" charset="-120"/>
+              </a:rPr>
+              <a:t>dark</a:t>
+            </a:r>
+            <a:pPr indent="0" marL="0">
+              <a:buNone/>
+            </a:pPr>
+            <a:r>
+              <a:rPr lang="en-US" sz="1700" dirty="0">
+                <a:solidFill>
+                  <a:srgbClr val="1E293B"/>
+                </a:solidFill>
+                <a:latin typeface="Calibri" pitchFamily="34" charset="0"/>
+                <a:ea typeface="Calibri" pitchFamily="34" charset="-122"/>
+                <a:cs typeface="Calibri" pitchFamily="34" charset="-120"/>
+              </a:rPr>
+              <a:t> </a:t>
+            </a:r>
+            <a:pPr indent="0" marL="0">
+              <a:buNone/>
+            </a:pPr>
+            <a:r>
+              <a:rPr lang="en-US" sz="1700" dirty="0">
+                <a:solidFill>
+                  <a:srgbClr val="1E293B"/>
+                </a:solidFill>
+                <a:latin typeface="Calibri" pitchFamily="34" charset="0"/>
+                <a:ea typeface="Calibri" pitchFamily="34" charset="-122"/>
+                <a:cs typeface="Calibri" pitchFamily="34" charset="-120"/>
+              </a:rPr>
+              <a:t>corridor.</a:t>
+            </a:r>
+            <a:endParaRPr lang="en-US" sz="1700" dirty="0"/>
+          </a:p>
+        </p:txBody>
+      </p:sp>
+      <p:sp>
+        <p:nvSpPr>
+          <p:cNvPr id="12" name="Shape 10"/>
+          <p:cNvSpPr/>
+          <p:nvPr/>
+        </p:nvSpPr>
+        <p:spPr>
+          <a:xfrm>
+            <a:off x="365760" y="3008376"/>
+            <a:ext cx="8412480" cy="1837944"/>
+          </a:xfrm>
+          <a:prstGeom prst="roundRect">
+            <a:avLst>
+              <a:gd name="adj" fmla="val 4975"/>
+            </a:avLst>
+          </a:prstGeom>
+          <a:solidFill>
+            <a:srgbClr val="E8F8EF"/>
+          </a:solidFill>
+          <a:ln/>
+          <a:effectLst>
+            <a:outerShdw sx="100000" sy="100000" kx="0" ky="0" algn="bl" rotWithShape="0" blurRad="101600" dist="38100" dir="2700000">
+              <a:srgbClr val="000000">
+                <a:alpha val="12000"/>
+              </a:srgbClr>
+            </a:outerShdw>
+          </a:effectLst>
+        </p:spPr>
+      </p:sp>
+      <p:sp>
+        <p:nvSpPr>
+          <p:cNvPr id="13" name="Text 11"/>
+          <p:cNvSpPr/>
+          <p:nvPr/>
+        </p:nvSpPr>
+        <p:spPr>
+          <a:xfrm>
+            <a:off x="566928" y="3072384"/>
+            <a:ext cx="8229600" cy="237744"/>
+          </a:xfrm>
+          <a:prstGeom prst="rect">
+            <a:avLst/>
+          </a:prstGeom>
+          <a:noFill/>
+          <a:ln/>
+        </p:spPr>
+        <p:txBody>
+          <a:bodyPr wrap="square" lIns="0" tIns="0" rIns="0" bIns="0" rtlCol="0" anchor="ctr"/>
+          <a:lstStyle/>
+          <a:p>
+            <a:pPr indent="0" marL="0">
+              <a:buNone/>
+            </a:pPr>
+            <a:r>
+              <a:rPr lang="en-US" sz="1100" b="1" spc="100" kern="0" dirty="0">
+                <a:solidFill>
+                  <a:srgbClr val="34B76F"/>
+                </a:solidFill>
+                <a:latin typeface="Calibri" pitchFamily="34" charset="0"/>
+                <a:ea typeface="Calibri" pitchFamily="34" charset="-122"/>
+                <a:cs typeface="Calibri" pitchFamily="34" charset="-120"/>
+              </a:rPr>
+              <a:t>✅  THE PATTERN</a:t>
+            </a:r>
+            <a:endParaRPr lang="en-US" sz="1100" dirty="0"/>
+          </a:p>
+        </p:txBody>
+      </p:sp>
+      <p:sp>
+        <p:nvSpPr>
+          <p:cNvPr id="14" name="Text 12"/>
+          <p:cNvSpPr/>
+          <p:nvPr/>
+        </p:nvSpPr>
+        <p:spPr>
+          <a:xfrm>
+            <a:off x="566928" y="3328416"/>
+            <a:ext cx="8010144" cy="1380744"/>
+          </a:xfrm>
+          <a:prstGeom prst="rect">
+            <a:avLst/>
+          </a:prstGeom>
+          <a:noFill/>
+          <a:ln/>
+        </p:spPr>
+        <p:txBody>
+          <a:bodyPr wrap="square" lIns="0" tIns="0" rIns="0" bIns="0" rtlCol="0" anchor="t">
+            <a:normAutofit/>
+          </a:bodyPr>
+          <a:lstStyle/>
+          <a:p>
+            <a:pPr indent="0" marL="0">
+              <a:buNone/>
+            </a:pPr>
+            <a:r>
+              <a:rPr lang="en-US" sz="1300" dirty="0">
+                <a:solidFill>
+                  <a:srgbClr val="1E293B"/>
+                </a:solidFill>
+                <a:latin typeface="Calibri" pitchFamily="34" charset="0"/>
+                <a:ea typeface="Calibri" pitchFamily="34" charset="-122"/>
+                <a:cs typeface="Calibri" pitchFamily="34" charset="-120"/>
+              </a:rPr>
+              <a:t>The extra words describe the nouns. A word that describes a noun is an adjective.</a:t>
+            </a:r>
+            <a:endParaRPr lang="en-US" sz="1300" dirty="0"/>
+          </a:p>
+          <a:p>
+            <a:pPr indent="0" marL="0">
+              <a:buNone/>
+            </a:pPr>
+            <a:r>
+              <a:rPr lang="en-US" sz="1300" dirty="0">
+                <a:solidFill>
+                  <a:srgbClr val="1E293B"/>
+                </a:solidFill>
+                <a:latin typeface="Calibri" pitchFamily="34" charset="0"/>
+                <a:ea typeface="Calibri" pitchFamily="34" charset="-122"/>
+                <a:cs typeface="Calibri" pitchFamily="34" charset="-120"/>
+              </a:rPr>
+              <a:t>Small and trembling describe the mouse. Dark describes the corridor.</a:t>
+            </a:r>
+            <a:endParaRPr lang="en-US" sz="1300" dirty="0"/>
           </a:p>
         </p:txBody>
       </p:sp>
@@ -4131,7 +5251,7 @@
             <a:avLst/>
           </a:prstGeom>
           <a:solidFill>
-            <a:srgbClr val="0E1C42"/>
+            <a:srgbClr val="C7922C"/>
           </a:solidFill>
           <a:ln/>
         </p:spPr>
@@ -4169,7 +5289,7 @@
                 <a:ea typeface="Calibri" pitchFamily="34" charset="-122"/>
                 <a:cs typeface="Calibri" pitchFamily="34" charset="-120"/>
               </a:rPr>
-              <a:t>🔠  Spelling</a:t>
+              <a:t>✏️  Grammar — Your turn</a:t>
             </a:r>
             <a:endParaRPr lang="en-US" sz="2200" dirty="0"/>
           </a:p>
@@ -4183,7 +5303,7 @@
         </p:nvSpPr>
         <p:spPr>
           <a:xfrm>
-            <a:off x="365760" y="777240"/>
+            <a:off x="365760" y="749808"/>
             <a:ext cx="8229600" cy="237744"/>
           </a:xfrm>
           <a:prstGeom prst="rect">
@@ -4202,13 +5322,13 @@
             <a:r>
               <a:rPr lang="en-US" sz="1100" b="1" spc="100" kern="0" dirty="0">
                 <a:solidFill>
-                  <a:srgbClr val="0E1C42"/>
-                </a:solidFill>
-                <a:latin typeface="Calibri" pitchFamily="34" charset="0"/>
-                <a:ea typeface="Calibri" pitchFamily="34" charset="-122"/>
-                <a:cs typeface="Calibri" pitchFamily="34" charset="-120"/>
-              </a:rPr>
-              <a:t>SOFT C AND SOFT G</a:t>
+                  <a:srgbClr val="C7922C"/>
+                </a:solidFill>
+                <a:latin typeface="Calibri" pitchFamily="34" charset="0"/>
+                <a:ea typeface="Calibri" pitchFamily="34" charset="-122"/>
+                <a:cs typeface="Calibri" pitchFamily="34" charset="-120"/>
+              </a:rPr>
+              <a:t>ADJECTIVES AND COMPARING</a:t>
             </a:r>
             <a:endParaRPr lang="en-US" sz="1100" dirty="0"/>
           </a:p>
@@ -4222,79 +5342,23 @@
         </p:nvSpPr>
         <p:spPr>
           <a:xfrm>
-            <a:off x="411480" y="1078992"/>
-            <a:ext cx="4114800" cy="457200"/>
+            <a:off x="365760" y="1051560"/>
+            <a:ext cx="8412480" cy="914400"/>
           </a:xfrm>
           <a:prstGeom prst="roundRect">
             <a:avLst>
-              <a:gd name="adj" fmla="val 16000"/>
-            </a:avLst>
-          </a:prstGeom>
-          <a:solidFill>
-            <a:srgbClr val="0E1C42"/>
-          </a:solidFill>
-          <a:ln/>
-        </p:spPr>
-      </p:sp>
-      <p:sp>
-        <p:nvSpPr>
-          <p:cNvPr id="6" name="Text 4"/>
-          <p:cNvSpPr/>
-          <p:nvPr/>
-        </p:nvSpPr>
-        <p:spPr>
-          <a:xfrm>
-            <a:off x="457200" y="1133856"/>
-            <a:ext cx="4023360" cy="347472"/>
-          </a:xfrm>
-          <a:prstGeom prst="rect">
-            <a:avLst/>
-          </a:prstGeom>
-          <a:noFill/>
-          <a:ln/>
-        </p:spPr>
-        <p:txBody>
-          <a:bodyPr wrap="square" lIns="0" tIns="0" rIns="0" bIns="0" rtlCol="0" anchor="ctr"/>
-          <a:lstStyle/>
-          <a:p>
-            <a:pPr algn="ctr" indent="0" marL="0">
-              <a:buNone/>
-            </a:pPr>
-            <a:r>
-              <a:rPr lang="en-US" sz="1300" b="1" dirty="0">
-                <a:solidFill>
-                  <a:srgbClr val="FFFFFF"/>
-                </a:solidFill>
-                <a:latin typeface="Calibri" pitchFamily="34" charset="0"/>
-                <a:ea typeface="Calibri" pitchFamily="34" charset="-122"/>
-                <a:cs typeface="Calibri" pitchFamily="34" charset="-120"/>
-              </a:rPr>
-              <a:t>Soft (/s/ or /j/)</a:t>
-            </a:r>
-            <a:endParaRPr lang="en-US" sz="1300" dirty="0"/>
-          </a:p>
-        </p:txBody>
-      </p:sp>
-      <p:sp>
-        <p:nvSpPr>
-          <p:cNvPr id="7" name="Shape 5"/>
-          <p:cNvSpPr/>
-          <p:nvPr/>
-        </p:nvSpPr>
-        <p:spPr>
-          <a:xfrm>
-            <a:off x="411480" y="1591056"/>
-            <a:ext cx="4114800" cy="2103120"/>
-          </a:xfrm>
-          <a:prstGeom prst="roundRect">
-            <a:avLst>
-              <a:gd name="adj" fmla="val 4348"/>
+              <a:gd name="adj" fmla="val 10000"/>
             </a:avLst>
           </a:prstGeom>
           <a:solidFill>
             <a:srgbClr val="FFFFFF"/>
           </a:solidFill>
-          <a:ln/>
+          <a:ln w="19050">
+            <a:solidFill>
+              <a:srgbClr val="C7922C"/>
+            </a:solidFill>
+            <a:prstDash val="solid"/>
+          </a:ln>
           <a:effectLst>
             <a:outerShdw sx="100000" sy="100000" kx="0" ky="0" algn="bl" rotWithShape="0" blurRad="101600" dist="38100" dir="2700000">
               <a:srgbClr val="000000">
@@ -4306,271 +5370,79 @@
       </p:sp>
       <p:sp>
         <p:nvSpPr>
-          <p:cNvPr id="8" name="Text 6"/>
-          <p:cNvSpPr/>
-          <p:nvPr/>
-        </p:nvSpPr>
-        <p:spPr>
-          <a:xfrm>
-            <a:off x="502920" y="1700784"/>
-            <a:ext cx="3931920" cy="1883664"/>
-          </a:xfrm>
-          <a:prstGeom prst="rect">
-            <a:avLst/>
-          </a:prstGeom>
-          <a:noFill/>
-          <a:ln/>
-        </p:spPr>
-        <p:txBody>
-          <a:bodyPr wrap="square" lIns="0" tIns="0" rIns="0" bIns="0" rtlCol="0" anchor="ctr"/>
-          <a:lstStyle/>
-          <a:p>
-            <a:pPr algn="ctr" indent="0" marL="0">
-              <a:buNone/>
-            </a:pPr>
-            <a:r>
-              <a:rPr lang="en-US" sz="1400" dirty="0">
-                <a:solidFill>
-                  <a:srgbClr val="1E293B"/>
-                </a:solidFill>
-                <a:latin typeface="Calibri" pitchFamily="34" charset="0"/>
-                <a:ea typeface="Calibri" pitchFamily="34" charset="-122"/>
-                <a:cs typeface="Calibri" pitchFamily="34" charset="-120"/>
-              </a:rPr>
-              <a:t>mice</a:t>
-            </a:r>
-            <a:endParaRPr lang="en-US" sz="1400" dirty="0"/>
-          </a:p>
-          <a:p>
-            <a:pPr algn="ctr" indent="0" marL="0">
-              <a:buNone/>
-            </a:pPr>
-            <a:r>
-              <a:rPr lang="en-US" sz="1400" dirty="0">
-                <a:solidFill>
-                  <a:srgbClr val="1E293B"/>
-                </a:solidFill>
-                <a:latin typeface="Calibri" pitchFamily="34" charset="0"/>
-                <a:ea typeface="Calibri" pitchFamily="34" charset="-122"/>
-                <a:cs typeface="Calibri" pitchFamily="34" charset="-120"/>
-              </a:rPr>
-              <a:t>prince</a:t>
-            </a:r>
-            <a:endParaRPr lang="en-US" sz="1400" dirty="0"/>
-          </a:p>
-          <a:p>
-            <a:pPr algn="ctr" indent="0" marL="0">
-              <a:buNone/>
-            </a:pPr>
-            <a:r>
-              <a:rPr lang="en-US" sz="1400" dirty="0">
-                <a:solidFill>
-                  <a:srgbClr val="1E293B"/>
-                </a:solidFill>
-                <a:latin typeface="Calibri" pitchFamily="34" charset="0"/>
-                <a:ea typeface="Calibri" pitchFamily="34" charset="-122"/>
-                <a:cs typeface="Calibri" pitchFamily="34" charset="-120"/>
-              </a:rPr>
-              <a:t>magic</a:t>
-            </a:r>
-            <a:endParaRPr lang="en-US" sz="1400" dirty="0"/>
-          </a:p>
-          <a:p>
-            <a:pPr algn="ctr" indent="0" marL="0">
-              <a:buNone/>
-            </a:pPr>
-            <a:r>
-              <a:rPr lang="en-US" sz="1400" dirty="0">
-                <a:solidFill>
-                  <a:srgbClr val="1E293B"/>
-                </a:solidFill>
-                <a:latin typeface="Calibri" pitchFamily="34" charset="0"/>
-                <a:ea typeface="Calibri" pitchFamily="34" charset="-122"/>
-                <a:cs typeface="Calibri" pitchFamily="34" charset="-120"/>
-              </a:rPr>
-              <a:t>gentle</a:t>
-            </a:r>
-            <a:endParaRPr lang="en-US" sz="1400" dirty="0"/>
-          </a:p>
-        </p:txBody>
-      </p:sp>
-      <p:sp>
-        <p:nvSpPr>
-          <p:cNvPr id="9" name="Shape 7"/>
-          <p:cNvSpPr/>
-          <p:nvPr/>
-        </p:nvSpPr>
-        <p:spPr>
-          <a:xfrm>
-            <a:off x="4617720" y="1078992"/>
-            <a:ext cx="4114800" cy="457200"/>
-          </a:xfrm>
-          <a:prstGeom prst="roundRect">
-            <a:avLst>
-              <a:gd name="adj" fmla="val 16000"/>
-            </a:avLst>
-          </a:prstGeom>
-          <a:solidFill>
-            <a:srgbClr val="0E1C42"/>
-          </a:solidFill>
-          <a:ln/>
-        </p:spPr>
-      </p:sp>
-      <p:sp>
-        <p:nvSpPr>
-          <p:cNvPr id="10" name="Text 8"/>
-          <p:cNvSpPr/>
-          <p:nvPr/>
-        </p:nvSpPr>
-        <p:spPr>
-          <a:xfrm>
-            <a:off x="4663440" y="1133856"/>
-            <a:ext cx="4023360" cy="347472"/>
-          </a:xfrm>
-          <a:prstGeom prst="rect">
-            <a:avLst/>
-          </a:prstGeom>
-          <a:noFill/>
-          <a:ln/>
-        </p:spPr>
-        <p:txBody>
-          <a:bodyPr wrap="square" lIns="0" tIns="0" rIns="0" bIns="0" rtlCol="0" anchor="ctr"/>
-          <a:lstStyle/>
-          <a:p>
-            <a:pPr algn="ctr" indent="0" marL="0">
-              <a:buNone/>
-            </a:pPr>
-            <a:r>
-              <a:rPr lang="en-US" sz="1300" b="1" dirty="0">
-                <a:solidFill>
-                  <a:srgbClr val="FFFFFF"/>
-                </a:solidFill>
-                <a:latin typeface="Calibri" pitchFamily="34" charset="0"/>
-                <a:ea typeface="Calibri" pitchFamily="34" charset="-122"/>
-                <a:cs typeface="Calibri" pitchFamily="34" charset="-120"/>
-              </a:rPr>
-              <a:t>Hard (/k/ or /g/)</a:t>
-            </a:r>
-            <a:endParaRPr lang="en-US" sz="1300" dirty="0"/>
-          </a:p>
-        </p:txBody>
-      </p:sp>
-      <p:sp>
-        <p:nvSpPr>
-          <p:cNvPr id="11" name="Shape 9"/>
-          <p:cNvSpPr/>
-          <p:nvPr/>
-        </p:nvSpPr>
-        <p:spPr>
-          <a:xfrm>
-            <a:off x="4617720" y="1591056"/>
-            <a:ext cx="4114800" cy="2103120"/>
-          </a:xfrm>
-          <a:prstGeom prst="roundRect">
-            <a:avLst>
-              <a:gd name="adj" fmla="val 4348"/>
-            </a:avLst>
-          </a:prstGeom>
-          <a:solidFill>
-            <a:srgbClr val="FFFFFF"/>
-          </a:solidFill>
-          <a:ln/>
-          <a:effectLst>
-            <a:outerShdw sx="100000" sy="100000" kx="0" ky="0" algn="bl" rotWithShape="0" blurRad="101600" dist="38100" dir="2700000">
-              <a:srgbClr val="000000">
-                <a:alpha val="12000"/>
-              </a:srgbClr>
-            </a:outerShdw>
-          </a:effectLst>
-        </p:spPr>
-      </p:sp>
-      <p:sp>
-        <p:nvSpPr>
-          <p:cNvPr id="12" name="Text 10"/>
-          <p:cNvSpPr/>
-          <p:nvPr/>
-        </p:nvSpPr>
-        <p:spPr>
-          <a:xfrm>
-            <a:off x="4709160" y="1700784"/>
-            <a:ext cx="3931920" cy="1883664"/>
-          </a:xfrm>
-          <a:prstGeom prst="rect">
-            <a:avLst/>
-          </a:prstGeom>
-          <a:noFill/>
-          <a:ln/>
-        </p:spPr>
-        <p:txBody>
-          <a:bodyPr wrap="square" lIns="0" tIns="0" rIns="0" bIns="0" rtlCol="0" anchor="ctr"/>
-          <a:lstStyle/>
-          <a:p>
-            <a:pPr algn="ctr" indent="0" marL="0">
-              <a:buNone/>
-            </a:pPr>
-            <a:r>
-              <a:rPr lang="en-US" sz="1400" dirty="0">
-                <a:solidFill>
-                  <a:srgbClr val="1E293B"/>
-                </a:solidFill>
-                <a:latin typeface="Calibri" pitchFamily="34" charset="0"/>
-                <a:ea typeface="Calibri" pitchFamily="34" charset="-122"/>
-                <a:cs typeface="Calibri" pitchFamily="34" charset="-120"/>
-              </a:rPr>
-              <a:t>Cook</a:t>
-            </a:r>
-            <a:endParaRPr lang="en-US" sz="1400" dirty="0"/>
-          </a:p>
-          <a:p>
-            <a:pPr algn="ctr" indent="0" marL="0">
-              <a:buNone/>
-            </a:pPr>
-            <a:r>
-              <a:rPr lang="en-US" sz="1400" dirty="0">
-                <a:solidFill>
-                  <a:srgbClr val="1E293B"/>
-                </a:solidFill>
-                <a:latin typeface="Calibri" pitchFamily="34" charset="0"/>
-                <a:ea typeface="Calibri" pitchFamily="34" charset="-122"/>
-                <a:cs typeface="Calibri" pitchFamily="34" charset="-120"/>
-              </a:rPr>
-              <a:t>candle</a:t>
-            </a:r>
-            <a:endParaRPr lang="en-US" sz="1400" dirty="0"/>
-          </a:p>
-          <a:p>
-            <a:pPr algn="ctr" indent="0" marL="0">
-              <a:buNone/>
-            </a:pPr>
-            <a:r>
-              <a:rPr lang="en-US" sz="1400" dirty="0">
-                <a:solidFill>
-                  <a:srgbClr val="1E293B"/>
-                </a:solidFill>
-                <a:latin typeface="Calibri" pitchFamily="34" charset="0"/>
-                <a:ea typeface="Calibri" pitchFamily="34" charset="-122"/>
-                <a:cs typeface="Calibri" pitchFamily="34" charset="-120"/>
-              </a:rPr>
-              <a:t>gold</a:t>
-            </a:r>
-            <a:endParaRPr lang="en-US" sz="1400" dirty="0"/>
-          </a:p>
-          <a:p>
-            <a:pPr algn="ctr" indent="0" marL="0">
-              <a:buNone/>
-            </a:pPr>
-            <a:r>
-              <a:rPr lang="en-US" sz="1400" dirty="0">
-                <a:solidFill>
-                  <a:srgbClr val="1E293B"/>
-                </a:solidFill>
-                <a:latin typeface="Calibri" pitchFamily="34" charset="0"/>
-                <a:ea typeface="Calibri" pitchFamily="34" charset="-122"/>
-                <a:cs typeface="Calibri" pitchFamily="34" charset="-120"/>
-              </a:rPr>
-              <a:t>garlic</a:t>
-            </a:r>
-            <a:endParaRPr lang="en-US" sz="1400" dirty="0"/>
+          <p:cNvPr id="6" name="Text 4"/>
+          <p:cNvSpPr/>
+          <p:nvPr/>
+        </p:nvSpPr>
+        <p:spPr>
+          <a:xfrm>
+            <a:off x="594360" y="1179576"/>
+            <a:ext cx="7955280" cy="658368"/>
+          </a:xfrm>
+          <a:prstGeom prst="rect">
+            <a:avLst/>
+          </a:prstGeom>
+          <a:noFill/>
+          <a:ln/>
+        </p:spPr>
+        <p:txBody>
+          <a:bodyPr wrap="square" lIns="0" tIns="0" rIns="0" bIns="0" rtlCol="0" anchor="ctr"/>
+          <a:lstStyle/>
+          <a:p>
+            <a:pPr indent="0" marL="0">
+              <a:buNone/>
+            </a:pPr>
+            <a:r>
+              <a:rPr lang="en-US" sz="1700" dirty="0">
+                <a:solidFill>
+                  <a:srgbClr val="0E1C42"/>
+                </a:solidFill>
+                <a:latin typeface="Calibri" pitchFamily="34" charset="0"/>
+                <a:ea typeface="Calibri" pitchFamily="34" charset="-122"/>
+                <a:cs typeface="Calibri" pitchFamily="34" charset="-120"/>
+              </a:rPr>
+              <a:t>mouse    ·    princess    ·    dark    ·    corridor    ·    small    ·    golden    ·    thread    ·    trembling</a:t>
+            </a:r>
+            <a:endParaRPr lang="en-US" sz="1700" dirty="0"/>
+          </a:p>
+        </p:txBody>
+      </p:sp>
+      <p:sp>
+        <p:nvSpPr>
+          <p:cNvPr id="7" name="Text 5"/>
+          <p:cNvSpPr/>
+          <p:nvPr/>
+        </p:nvSpPr>
+        <p:spPr>
+          <a:xfrm>
+            <a:off x="365760" y="2148840"/>
+            <a:ext cx="8412480" cy="731520"/>
+          </a:xfrm>
+          <a:prstGeom prst="rect">
+            <a:avLst/>
+          </a:prstGeom>
+          <a:noFill/>
+          <a:ln/>
+        </p:spPr>
+        <p:txBody>
+          <a:bodyPr wrap="square" lIns="0" tIns="0" rIns="0" bIns="0" rtlCol="0" anchor="ctr"/>
+          <a:lstStyle/>
+          <a:p>
+            <a:pPr indent="0" marL="0">
+              <a:buNone/>
+            </a:pPr>
+            <a:r>
+              <a:rPr lang="en-US" sz="1500" i="1" dirty="0">
+                <a:solidFill>
+                  <a:srgbClr val="64748B"/>
+                </a:solidFill>
+                <a:latin typeface="Calibri" pitchFamily="34" charset="0"/>
+                <a:ea typeface="Calibri" pitchFamily="34" charset="-122"/>
+                <a:cs typeface="Calibri" pitchFamily="34" charset="-120"/>
+              </a:rPr>
+              <a:t>Your turn. These eight words split into two groups. The columns are not labelled on purpose — sort them first, then decide what each group should be called.</a:t>
+            </a:r>
+            <a:endParaRPr lang="en-US" sz="1500" dirty="0"/>
           </a:p>
         </p:txBody>
       </p:sp>
@@ -4585,6 +5457,1272 @@
 <file path=ppt/slides/slide15.xml><?xml version="1.0" encoding="utf-8"?>
 <p:sld xmlns:a="http://schemas.openxmlformats.org/drawingml/2006/main" xmlns:r="http://schemas.openxmlformats.org/officeDocument/2006/relationships" xmlns:p="http://schemas.openxmlformats.org/presentationml/2006/main">
   <p:cSld name="Slide 15">
+    <p:bg>
+      <p:bgPr>
+        <a:solidFill>
+          <a:srgbClr val="F8FAFC"/>
+        </a:solidFill>
+      </p:bgPr>
+    </p:bg>
+    <p:spTree>
+      <p:nvGrpSpPr>
+        <p:cNvPr id="1" name=""/>
+        <p:cNvGrpSpPr/>
+        <p:nvPr/>
+      </p:nvGrpSpPr>
+      <p:grpSpPr>
+        <a:xfrm>
+          <a:off x="0" y="0"/>
+          <a:ext cx="0" cy="0"/>
+          <a:chOff x="0" y="0"/>
+          <a:chExt cx="0" cy="0"/>
+        </a:xfrm>
+      </p:grpSpPr>
+      <p:sp>
+        <p:nvSpPr>
+          <p:cNvPr id="2" name="Shape 0"/>
+          <p:cNvSpPr/>
+          <p:nvPr/>
+        </p:nvSpPr>
+        <p:spPr>
+          <a:xfrm>
+            <a:off x="0" y="0"/>
+            <a:ext cx="9144000" cy="566928"/>
+          </a:xfrm>
+          <a:prstGeom prst="rect">
+            <a:avLst/>
+          </a:prstGeom>
+          <a:solidFill>
+            <a:srgbClr val="C7922C"/>
+          </a:solidFill>
+          <a:ln/>
+        </p:spPr>
+      </p:sp>
+      <p:sp>
+        <p:nvSpPr>
+          <p:cNvPr id="3" name="Text 1"/>
+          <p:cNvSpPr/>
+          <p:nvPr/>
+        </p:nvSpPr>
+        <p:spPr>
+          <a:xfrm>
+            <a:off x="365760" y="54864"/>
+            <a:ext cx="8412480" cy="457200"/>
+          </a:xfrm>
+          <a:prstGeom prst="rect">
+            <a:avLst/>
+          </a:prstGeom>
+          <a:noFill/>
+          <a:ln/>
+        </p:spPr>
+        <p:txBody>
+          <a:bodyPr wrap="square" lIns="0" tIns="0" rIns="0" bIns="0" rtlCol="0" anchor="ctr"/>
+          <a:lstStyle/>
+          <a:p>
+            <a:pPr indent="0" marL="0">
+              <a:buNone/>
+            </a:pPr>
+            <a:r>
+              <a:rPr lang="en-US" sz="2200" b="1" dirty="0">
+                <a:solidFill>
+                  <a:srgbClr val="FFFFFF"/>
+                </a:solidFill>
+                <a:latin typeface="Calibri" pitchFamily="34" charset="0"/>
+                <a:ea typeface="Calibri" pitchFamily="34" charset="-122"/>
+                <a:cs typeface="Calibri" pitchFamily="34" charset="-120"/>
+              </a:rPr>
+              <a:t>✏️  Grammar — Your turn</a:t>
+            </a:r>
+            <a:endParaRPr lang="en-US" sz="2200" dirty="0"/>
+          </a:p>
+        </p:txBody>
+      </p:sp>
+      <p:sp>
+        <p:nvSpPr>
+          <p:cNvPr id="4" name="Text 2"/>
+          <p:cNvSpPr/>
+          <p:nvPr/>
+        </p:nvSpPr>
+        <p:spPr>
+          <a:xfrm>
+            <a:off x="365760" y="749808"/>
+            <a:ext cx="8229600" cy="237744"/>
+          </a:xfrm>
+          <a:prstGeom prst="rect">
+            <a:avLst/>
+          </a:prstGeom>
+          <a:noFill/>
+          <a:ln/>
+        </p:spPr>
+        <p:txBody>
+          <a:bodyPr wrap="square" lIns="0" tIns="0" rIns="0" bIns="0" rtlCol="0" anchor="ctr"/>
+          <a:lstStyle/>
+          <a:p>
+            <a:pPr indent="0" marL="0">
+              <a:buNone/>
+            </a:pPr>
+            <a:r>
+              <a:rPr lang="en-US" sz="1100" b="1" spc="100" kern="0" dirty="0">
+                <a:solidFill>
+                  <a:srgbClr val="C7922C"/>
+                </a:solidFill>
+                <a:latin typeface="Calibri" pitchFamily="34" charset="0"/>
+                <a:ea typeface="Calibri" pitchFamily="34" charset="-122"/>
+                <a:cs typeface="Calibri" pitchFamily="34" charset="-120"/>
+              </a:rPr>
+              <a:t>ADJECTIVES AND COMPARING</a:t>
+            </a:r>
+            <a:endParaRPr lang="en-US" sz="1100" dirty="0"/>
+          </a:p>
+        </p:txBody>
+      </p:sp>
+      <p:sp>
+        <p:nvSpPr>
+          <p:cNvPr id="5" name="Shape 3"/>
+          <p:cNvSpPr/>
+          <p:nvPr/>
+        </p:nvSpPr>
+        <p:spPr>
+          <a:xfrm>
+            <a:off x="411480" y="1051560"/>
+            <a:ext cx="4114800" cy="457200"/>
+          </a:xfrm>
+          <a:prstGeom prst="roundRect">
+            <a:avLst>
+              <a:gd name="adj" fmla="val 16000"/>
+            </a:avLst>
+          </a:prstGeom>
+          <a:solidFill>
+            <a:srgbClr val="C7922C"/>
+          </a:solidFill>
+          <a:ln/>
+        </p:spPr>
+      </p:sp>
+      <p:sp>
+        <p:nvSpPr>
+          <p:cNvPr id="6" name="Text 4"/>
+          <p:cNvSpPr/>
+          <p:nvPr/>
+        </p:nvSpPr>
+        <p:spPr>
+          <a:xfrm>
+            <a:off x="457200" y="1106424"/>
+            <a:ext cx="4023360" cy="347472"/>
+          </a:xfrm>
+          <a:prstGeom prst="rect">
+            <a:avLst/>
+          </a:prstGeom>
+          <a:noFill/>
+          <a:ln/>
+        </p:spPr>
+        <p:txBody>
+          <a:bodyPr wrap="square" lIns="0" tIns="0" rIns="0" bIns="0" rtlCol="0" anchor="ctr"/>
+          <a:lstStyle/>
+          <a:p>
+            <a:pPr algn="ctr" indent="0" marL="0">
+              <a:buNone/>
+            </a:pPr>
+            <a:r>
+              <a:rPr lang="en-US" sz="1400" b="1" dirty="0">
+                <a:solidFill>
+                  <a:srgbClr val="FFFFFF"/>
+                </a:solidFill>
+                <a:latin typeface="Calibri" pitchFamily="34" charset="0"/>
+                <a:ea typeface="Calibri" pitchFamily="34" charset="-122"/>
+                <a:cs typeface="Calibri" pitchFamily="34" charset="-120"/>
+              </a:rPr>
+              <a:t>Group 1</a:t>
+            </a:r>
+            <a:endParaRPr lang="en-US" sz="1400" dirty="0"/>
+          </a:p>
+        </p:txBody>
+      </p:sp>
+      <p:sp>
+        <p:nvSpPr>
+          <p:cNvPr id="7" name="Shape 5"/>
+          <p:cNvSpPr/>
+          <p:nvPr/>
+        </p:nvSpPr>
+        <p:spPr>
+          <a:xfrm>
+            <a:off x="411480" y="1572768"/>
+            <a:ext cx="4114800" cy="2011680"/>
+          </a:xfrm>
+          <a:prstGeom prst="roundRect">
+            <a:avLst>
+              <a:gd name="adj" fmla="val 4545"/>
+            </a:avLst>
+          </a:prstGeom>
+          <a:solidFill>
+            <a:srgbClr val="FFFFFF"/>
+          </a:solidFill>
+          <a:ln/>
+          <a:effectLst>
+            <a:outerShdw sx="100000" sy="100000" kx="0" ky="0" algn="bl" rotWithShape="0" blurRad="101600" dist="38100" dir="2700000">
+              <a:srgbClr val="000000">
+                <a:alpha val="12000"/>
+              </a:srgbClr>
+            </a:outerShdw>
+          </a:effectLst>
+        </p:spPr>
+      </p:sp>
+      <p:sp>
+        <p:nvSpPr>
+          <p:cNvPr id="8" name="Text 6"/>
+          <p:cNvSpPr/>
+          <p:nvPr/>
+        </p:nvSpPr>
+        <p:spPr>
+          <a:xfrm>
+            <a:off x="502920" y="1664208"/>
+            <a:ext cx="3931920" cy="1828800"/>
+          </a:xfrm>
+          <a:prstGeom prst="rect">
+            <a:avLst/>
+          </a:prstGeom>
+          <a:noFill/>
+          <a:ln/>
+        </p:spPr>
+        <p:txBody>
+          <a:bodyPr wrap="square" lIns="0" tIns="0" rIns="0" bIns="0" rtlCol="0" anchor="ctr"/>
+          <a:lstStyle/>
+          <a:p>
+            <a:pPr algn="ctr" indent="0" marL="0">
+              <a:buNone/>
+            </a:pPr>
+            <a:r>
+              <a:rPr lang="en-US" sz="1600" dirty="0">
+                <a:solidFill>
+                  <a:srgbClr val="1E293B"/>
+                </a:solidFill>
+                <a:latin typeface="Calibri" pitchFamily="34" charset="0"/>
+                <a:ea typeface="Calibri" pitchFamily="34" charset="-122"/>
+                <a:cs typeface="Calibri" pitchFamily="34" charset="-120"/>
+              </a:rPr>
+              <a:t>mouse</a:t>
+            </a:r>
+            <a:endParaRPr lang="en-US" sz="1600" dirty="0"/>
+          </a:p>
+          <a:p>
+            <a:pPr algn="ctr" indent="0" marL="0">
+              <a:buNone/>
+            </a:pPr>
+            <a:r>
+              <a:rPr lang="en-US" sz="1600" dirty="0">
+                <a:solidFill>
+                  <a:srgbClr val="1E293B"/>
+                </a:solidFill>
+                <a:latin typeface="Calibri" pitchFamily="34" charset="0"/>
+                <a:ea typeface="Calibri" pitchFamily="34" charset="-122"/>
+                <a:cs typeface="Calibri" pitchFamily="34" charset="-120"/>
+              </a:rPr>
+              <a:t>corridor</a:t>
+            </a:r>
+            <a:endParaRPr lang="en-US" sz="1600" dirty="0"/>
+          </a:p>
+          <a:p>
+            <a:pPr algn="ctr" indent="0" marL="0">
+              <a:buNone/>
+            </a:pPr>
+            <a:r>
+              <a:rPr lang="en-US" sz="1600" dirty="0">
+                <a:solidFill>
+                  <a:srgbClr val="1E293B"/>
+                </a:solidFill>
+                <a:latin typeface="Calibri" pitchFamily="34" charset="0"/>
+                <a:ea typeface="Calibri" pitchFamily="34" charset="-122"/>
+                <a:cs typeface="Calibri" pitchFamily="34" charset="-120"/>
+              </a:rPr>
+              <a:t>thread</a:t>
+            </a:r>
+            <a:endParaRPr lang="en-US" sz="1600" dirty="0"/>
+          </a:p>
+          <a:p>
+            <a:pPr algn="ctr" indent="0" marL="0">
+              <a:buNone/>
+            </a:pPr>
+            <a:r>
+              <a:rPr lang="en-US" sz="1600" dirty="0">
+                <a:solidFill>
+                  <a:srgbClr val="1E293B"/>
+                </a:solidFill>
+                <a:latin typeface="Calibri" pitchFamily="34" charset="0"/>
+                <a:ea typeface="Calibri" pitchFamily="34" charset="-122"/>
+                <a:cs typeface="Calibri" pitchFamily="34" charset="-120"/>
+              </a:rPr>
+              <a:t>princess</a:t>
+            </a:r>
+            <a:endParaRPr lang="en-US" sz="1600" dirty="0"/>
+          </a:p>
+        </p:txBody>
+      </p:sp>
+      <p:sp>
+        <p:nvSpPr>
+          <p:cNvPr id="9" name="Shape 7"/>
+          <p:cNvSpPr/>
+          <p:nvPr/>
+        </p:nvSpPr>
+        <p:spPr>
+          <a:xfrm>
+            <a:off x="4617720" y="1051560"/>
+            <a:ext cx="4114800" cy="457200"/>
+          </a:xfrm>
+          <a:prstGeom prst="roundRect">
+            <a:avLst>
+              <a:gd name="adj" fmla="val 16000"/>
+            </a:avLst>
+          </a:prstGeom>
+          <a:solidFill>
+            <a:srgbClr val="C7922C"/>
+          </a:solidFill>
+          <a:ln/>
+        </p:spPr>
+      </p:sp>
+      <p:sp>
+        <p:nvSpPr>
+          <p:cNvPr id="10" name="Text 8"/>
+          <p:cNvSpPr/>
+          <p:nvPr/>
+        </p:nvSpPr>
+        <p:spPr>
+          <a:xfrm>
+            <a:off x="4663440" y="1106424"/>
+            <a:ext cx="4023360" cy="347472"/>
+          </a:xfrm>
+          <a:prstGeom prst="rect">
+            <a:avLst/>
+          </a:prstGeom>
+          <a:noFill/>
+          <a:ln/>
+        </p:spPr>
+        <p:txBody>
+          <a:bodyPr wrap="square" lIns="0" tIns="0" rIns="0" bIns="0" rtlCol="0" anchor="ctr"/>
+          <a:lstStyle/>
+          <a:p>
+            <a:pPr algn="ctr" indent="0" marL="0">
+              <a:buNone/>
+            </a:pPr>
+            <a:r>
+              <a:rPr lang="en-US" sz="1400" b="1" dirty="0">
+                <a:solidFill>
+                  <a:srgbClr val="FFFFFF"/>
+                </a:solidFill>
+                <a:latin typeface="Calibri" pitchFamily="34" charset="0"/>
+                <a:ea typeface="Calibri" pitchFamily="34" charset="-122"/>
+                <a:cs typeface="Calibri" pitchFamily="34" charset="-120"/>
+              </a:rPr>
+              <a:t>Group 2</a:t>
+            </a:r>
+            <a:endParaRPr lang="en-US" sz="1400" dirty="0"/>
+          </a:p>
+        </p:txBody>
+      </p:sp>
+      <p:sp>
+        <p:nvSpPr>
+          <p:cNvPr id="11" name="Shape 9"/>
+          <p:cNvSpPr/>
+          <p:nvPr/>
+        </p:nvSpPr>
+        <p:spPr>
+          <a:xfrm>
+            <a:off x="4617720" y="1572768"/>
+            <a:ext cx="4114800" cy="2011680"/>
+          </a:xfrm>
+          <a:prstGeom prst="roundRect">
+            <a:avLst>
+              <a:gd name="adj" fmla="val 4545"/>
+            </a:avLst>
+          </a:prstGeom>
+          <a:solidFill>
+            <a:srgbClr val="FFFFFF"/>
+          </a:solidFill>
+          <a:ln/>
+          <a:effectLst>
+            <a:outerShdw sx="100000" sy="100000" kx="0" ky="0" algn="bl" rotWithShape="0" blurRad="101600" dist="38100" dir="2700000">
+              <a:srgbClr val="000000">
+                <a:alpha val="12000"/>
+              </a:srgbClr>
+            </a:outerShdw>
+          </a:effectLst>
+        </p:spPr>
+      </p:sp>
+      <p:sp>
+        <p:nvSpPr>
+          <p:cNvPr id="12" name="Text 10"/>
+          <p:cNvSpPr/>
+          <p:nvPr/>
+        </p:nvSpPr>
+        <p:spPr>
+          <a:xfrm>
+            <a:off x="4709160" y="1664208"/>
+            <a:ext cx="3931920" cy="1828800"/>
+          </a:xfrm>
+          <a:prstGeom prst="rect">
+            <a:avLst/>
+          </a:prstGeom>
+          <a:noFill/>
+          <a:ln/>
+        </p:spPr>
+        <p:txBody>
+          <a:bodyPr wrap="square" lIns="0" tIns="0" rIns="0" bIns="0" rtlCol="0" anchor="ctr"/>
+          <a:lstStyle/>
+          <a:p>
+            <a:pPr algn="ctr" indent="0" marL="0">
+              <a:buNone/>
+            </a:pPr>
+            <a:r>
+              <a:rPr lang="en-US" sz="1600" dirty="0">
+                <a:solidFill>
+                  <a:srgbClr val="1E293B"/>
+                </a:solidFill>
+                <a:latin typeface="Calibri" pitchFamily="34" charset="0"/>
+                <a:ea typeface="Calibri" pitchFamily="34" charset="-122"/>
+                <a:cs typeface="Calibri" pitchFamily="34" charset="-120"/>
+              </a:rPr>
+              <a:t>small</a:t>
+            </a:r>
+            <a:endParaRPr lang="en-US" sz="1600" dirty="0"/>
+          </a:p>
+          <a:p>
+            <a:pPr algn="ctr" indent="0" marL="0">
+              <a:buNone/>
+            </a:pPr>
+            <a:r>
+              <a:rPr lang="en-US" sz="1600" dirty="0">
+                <a:solidFill>
+                  <a:srgbClr val="1E293B"/>
+                </a:solidFill>
+                <a:latin typeface="Calibri" pitchFamily="34" charset="0"/>
+                <a:ea typeface="Calibri" pitchFamily="34" charset="-122"/>
+                <a:cs typeface="Calibri" pitchFamily="34" charset="-120"/>
+              </a:rPr>
+              <a:t>trembling</a:t>
+            </a:r>
+            <a:endParaRPr lang="en-US" sz="1600" dirty="0"/>
+          </a:p>
+          <a:p>
+            <a:pPr algn="ctr" indent="0" marL="0">
+              <a:buNone/>
+            </a:pPr>
+            <a:r>
+              <a:rPr lang="en-US" sz="1600" dirty="0">
+                <a:solidFill>
+                  <a:srgbClr val="1E293B"/>
+                </a:solidFill>
+                <a:latin typeface="Calibri" pitchFamily="34" charset="0"/>
+                <a:ea typeface="Calibri" pitchFamily="34" charset="-122"/>
+                <a:cs typeface="Calibri" pitchFamily="34" charset="-120"/>
+              </a:rPr>
+              <a:t>dark</a:t>
+            </a:r>
+            <a:endParaRPr lang="en-US" sz="1600" dirty="0"/>
+          </a:p>
+          <a:p>
+            <a:pPr algn="ctr" indent="0" marL="0">
+              <a:buNone/>
+            </a:pPr>
+            <a:r>
+              <a:rPr lang="en-US" sz="1600" dirty="0">
+                <a:solidFill>
+                  <a:srgbClr val="1E293B"/>
+                </a:solidFill>
+                <a:latin typeface="Calibri" pitchFamily="34" charset="0"/>
+                <a:ea typeface="Calibri" pitchFamily="34" charset="-122"/>
+                <a:cs typeface="Calibri" pitchFamily="34" charset="-120"/>
+              </a:rPr>
+              <a:t>golden</a:t>
+            </a:r>
+            <a:endParaRPr lang="en-US" sz="1600" dirty="0"/>
+          </a:p>
+        </p:txBody>
+      </p:sp>
+      <p:sp>
+        <p:nvSpPr>
+          <p:cNvPr id="13" name="Text 11"/>
+          <p:cNvSpPr/>
+          <p:nvPr/>
+        </p:nvSpPr>
+        <p:spPr>
+          <a:xfrm>
+            <a:off x="365760" y="3703320"/>
+            <a:ext cx="8412480" cy="411480"/>
+          </a:xfrm>
+          <a:prstGeom prst="rect">
+            <a:avLst/>
+          </a:prstGeom>
+          <a:noFill/>
+          <a:ln/>
+        </p:spPr>
+        <p:txBody>
+          <a:bodyPr wrap="square" lIns="0" tIns="0" rIns="0" bIns="0" rtlCol="0" anchor="ctr"/>
+          <a:lstStyle/>
+          <a:p>
+            <a:pPr indent="0" marL="0">
+              <a:buNone/>
+            </a:pPr>
+            <a:r>
+              <a:rPr lang="en-US" sz="1500" b="1" dirty="0">
+                <a:solidFill>
+                  <a:srgbClr val="34B76F"/>
+                </a:solidFill>
+                <a:latin typeface="Calibri" pitchFamily="34" charset="0"/>
+                <a:ea typeface="Calibri" pitchFamily="34" charset="-122"/>
+                <a:cs typeface="Calibri" pitchFamily="34" charset="-120"/>
+              </a:rPr>
+              <a:t>Now name the split: what does every word in each group have in common?</a:t>
+            </a:r>
+            <a:endParaRPr lang="en-US" sz="1500" dirty="0"/>
+          </a:p>
+        </p:txBody>
+      </p:sp>
+    </p:spTree>
+  </p:cSld>
+  <p:clrMapOvr>
+    <a:masterClrMapping/>
+  </p:clrMapOvr>
+</p:sld>
+</file>
+
+<file path=ppt/slides/slide16.xml><?xml version="1.0" encoding="utf-8"?>
+<p:sld xmlns:a="http://schemas.openxmlformats.org/drawingml/2006/main" xmlns:r="http://schemas.openxmlformats.org/officeDocument/2006/relationships" xmlns:p="http://schemas.openxmlformats.org/presentationml/2006/main">
+  <p:cSld name="Slide 16">
+    <p:bg>
+      <p:bgPr>
+        <a:solidFill>
+          <a:srgbClr val="F8FAFC"/>
+        </a:solidFill>
+      </p:bgPr>
+    </p:bg>
+    <p:spTree>
+      <p:nvGrpSpPr>
+        <p:cNvPr id="1" name=""/>
+        <p:cNvGrpSpPr/>
+        <p:nvPr/>
+      </p:nvGrpSpPr>
+      <p:grpSpPr>
+        <a:xfrm>
+          <a:off x="0" y="0"/>
+          <a:ext cx="0" cy="0"/>
+          <a:chOff x="0" y="0"/>
+          <a:chExt cx="0" cy="0"/>
+        </a:xfrm>
+      </p:grpSpPr>
+      <p:sp>
+        <p:nvSpPr>
+          <p:cNvPr id="2" name="Shape 0"/>
+          <p:cNvSpPr/>
+          <p:nvPr/>
+        </p:nvSpPr>
+        <p:spPr>
+          <a:xfrm>
+            <a:off x="0" y="0"/>
+            <a:ext cx="9144000" cy="566928"/>
+          </a:xfrm>
+          <a:prstGeom prst="rect">
+            <a:avLst/>
+          </a:prstGeom>
+          <a:solidFill>
+            <a:srgbClr val="0E1C42"/>
+          </a:solidFill>
+          <a:ln/>
+        </p:spPr>
+      </p:sp>
+      <p:sp>
+        <p:nvSpPr>
+          <p:cNvPr id="3" name="Text 1"/>
+          <p:cNvSpPr/>
+          <p:nvPr/>
+        </p:nvSpPr>
+        <p:spPr>
+          <a:xfrm>
+            <a:off x="365760" y="54864"/>
+            <a:ext cx="8412480" cy="457200"/>
+          </a:xfrm>
+          <a:prstGeom prst="rect">
+            <a:avLst/>
+          </a:prstGeom>
+          <a:noFill/>
+          <a:ln/>
+        </p:spPr>
+        <p:txBody>
+          <a:bodyPr wrap="square" lIns="0" tIns="0" rIns="0" bIns="0" rtlCol="0" anchor="ctr"/>
+          <a:lstStyle/>
+          <a:p>
+            <a:pPr indent="0" marL="0">
+              <a:buNone/>
+            </a:pPr>
+            <a:r>
+              <a:rPr lang="en-US" sz="2200" b="1" dirty="0">
+                <a:solidFill>
+                  <a:srgbClr val="FFFFFF"/>
+                </a:solidFill>
+                <a:latin typeface="Calibri" pitchFamily="34" charset="0"/>
+                <a:ea typeface="Calibri" pitchFamily="34" charset="-122"/>
+                <a:cs typeface="Calibri" pitchFamily="34" charset="-120"/>
+              </a:rPr>
+              <a:t>🔠  Spelling</a:t>
+            </a:r>
+            <a:endParaRPr lang="en-US" sz="2200" dirty="0"/>
+          </a:p>
+        </p:txBody>
+      </p:sp>
+      <p:sp>
+        <p:nvSpPr>
+          <p:cNvPr id="4" name="Text 2"/>
+          <p:cNvSpPr/>
+          <p:nvPr/>
+        </p:nvSpPr>
+        <p:spPr>
+          <a:xfrm>
+            <a:off x="365760" y="777240"/>
+            <a:ext cx="8229600" cy="237744"/>
+          </a:xfrm>
+          <a:prstGeom prst="rect">
+            <a:avLst/>
+          </a:prstGeom>
+          <a:noFill/>
+          <a:ln/>
+        </p:spPr>
+        <p:txBody>
+          <a:bodyPr wrap="square" lIns="0" tIns="0" rIns="0" bIns="0" rtlCol="0" anchor="ctr"/>
+          <a:lstStyle/>
+          <a:p>
+            <a:pPr indent="0" marL="0">
+              <a:buNone/>
+            </a:pPr>
+            <a:r>
+              <a:rPr lang="en-US" sz="1100" b="1" spc="100" kern="0" dirty="0">
+                <a:solidFill>
+                  <a:srgbClr val="0E1C42"/>
+                </a:solidFill>
+                <a:latin typeface="Calibri" pitchFamily="34" charset="0"/>
+                <a:ea typeface="Calibri" pitchFamily="34" charset="-122"/>
+                <a:cs typeface="Calibri" pitchFamily="34" charset="-120"/>
+              </a:rPr>
+              <a:t>CLOSED SYLLABLES IN LONGER WORDS</a:t>
+            </a:r>
+            <a:endParaRPr lang="en-US" sz="1100" dirty="0"/>
+          </a:p>
+        </p:txBody>
+      </p:sp>
+      <p:sp>
+        <p:nvSpPr>
+          <p:cNvPr id="5" name="Text 3"/>
+          <p:cNvSpPr/>
+          <p:nvPr/>
+        </p:nvSpPr>
+        <p:spPr>
+          <a:xfrm>
+            <a:off x="365760" y="1078992"/>
+            <a:ext cx="8229600" cy="237744"/>
+          </a:xfrm>
+          <a:prstGeom prst="rect">
+            <a:avLst/>
+          </a:prstGeom>
+          <a:noFill/>
+          <a:ln/>
+        </p:spPr>
+        <p:txBody>
+          <a:bodyPr wrap="square" lIns="0" tIns="0" rIns="0" bIns="0" rtlCol="0" anchor="ctr"/>
+          <a:lstStyle/>
+          <a:p>
+            <a:pPr indent="0" marL="0">
+              <a:buNone/>
+            </a:pPr>
+            <a:r>
+              <a:rPr lang="en-US" sz="1100" b="1" spc="100" kern="0" dirty="0">
+                <a:solidFill>
+                  <a:srgbClr val="64748B"/>
+                </a:solidFill>
+                <a:latin typeface="Calibri" pitchFamily="34" charset="0"/>
+                <a:ea typeface="Calibri" pitchFamily="34" charset="-122"/>
+                <a:cs typeface="Calibri" pitchFamily="34" charset="-120"/>
+              </a:rPr>
+              <a:t>WORD BANK</a:t>
+            </a:r>
+            <a:endParaRPr lang="en-US" sz="1100" dirty="0"/>
+          </a:p>
+        </p:txBody>
+      </p:sp>
+      <p:sp>
+        <p:nvSpPr>
+          <p:cNvPr id="6" name="Shape 4"/>
+          <p:cNvSpPr/>
+          <p:nvPr/>
+        </p:nvSpPr>
+        <p:spPr>
+          <a:xfrm>
+            <a:off x="365760" y="1353312"/>
+            <a:ext cx="8412480" cy="1005840"/>
+          </a:xfrm>
+          <a:prstGeom prst="roundRect">
+            <a:avLst>
+              <a:gd name="adj" fmla="val 9091"/>
+            </a:avLst>
+          </a:prstGeom>
+          <a:solidFill>
+            <a:srgbClr val="FFFFFF"/>
+          </a:solidFill>
+          <a:ln w="19050">
+            <a:solidFill>
+              <a:srgbClr val="0E1C42"/>
+            </a:solidFill>
+            <a:prstDash val="solid"/>
+          </a:ln>
+          <a:effectLst>
+            <a:outerShdw sx="100000" sy="100000" kx="0" ky="0" algn="bl" rotWithShape="0" blurRad="101600" dist="38100" dir="2700000">
+              <a:srgbClr val="000000">
+                <a:alpha val="12000"/>
+              </a:srgbClr>
+            </a:outerShdw>
+          </a:effectLst>
+        </p:spPr>
+      </p:sp>
+      <p:sp>
+        <p:nvSpPr>
+          <p:cNvPr id="7" name="Text 5"/>
+          <p:cNvSpPr/>
+          <p:nvPr/>
+        </p:nvSpPr>
+        <p:spPr>
+          <a:xfrm>
+            <a:off x="594360" y="1481328"/>
+            <a:ext cx="7955280" cy="749808"/>
+          </a:xfrm>
+          <a:prstGeom prst="rect">
+            <a:avLst/>
+          </a:prstGeom>
+          <a:noFill/>
+          <a:ln/>
+        </p:spPr>
+        <p:txBody>
+          <a:bodyPr wrap="square" lIns="0" tIns="0" rIns="0" bIns="0" rtlCol="0" anchor="ctr"/>
+          <a:lstStyle/>
+          <a:p>
+            <a:pPr indent="0" marL="0">
+              <a:buNone/>
+            </a:pPr>
+            <a:r>
+              <a:rPr lang="en-US" sz="1700" dirty="0">
+                <a:solidFill>
+                  <a:srgbClr val="0E1C42"/>
+                </a:solidFill>
+                <a:latin typeface="Calibri" pitchFamily="34" charset="0"/>
+                <a:ea typeface="Calibri" pitchFamily="34" charset="-122"/>
+                <a:cs typeface="Calibri" pitchFamily="34" charset="-120"/>
+              </a:rPr>
+              <a:t>rabbit   ·   basket   ·   kitten   ·   blanket   ·   castle   ·   garden</a:t>
+            </a:r>
+            <a:endParaRPr lang="en-US" sz="1700" dirty="0"/>
+          </a:p>
+        </p:txBody>
+      </p:sp>
+      <p:sp>
+        <p:nvSpPr>
+          <p:cNvPr id="8" name="Text 6"/>
+          <p:cNvSpPr/>
+          <p:nvPr/>
+        </p:nvSpPr>
+        <p:spPr>
+          <a:xfrm>
+            <a:off x="365760" y="2514600"/>
+            <a:ext cx="8412480" cy="457200"/>
+          </a:xfrm>
+          <a:prstGeom prst="rect">
+            <a:avLst/>
+          </a:prstGeom>
+          <a:noFill/>
+          <a:ln/>
+        </p:spPr>
+        <p:txBody>
+          <a:bodyPr wrap="square" lIns="0" tIns="0" rIns="0" bIns="0" rtlCol="0" anchor="ctr"/>
+          <a:lstStyle/>
+          <a:p>
+            <a:pPr indent="0" marL="0">
+              <a:buNone/>
+            </a:pPr>
+            <a:r>
+              <a:rPr lang="en-US" sz="1500" i="1" dirty="0">
+                <a:solidFill>
+                  <a:srgbClr val="64748B"/>
+                </a:solidFill>
+                <a:latin typeface="Calibri" pitchFamily="34" charset="0"/>
+                <a:ea typeface="Calibri" pitchFamily="34" charset="-122"/>
+                <a:cs typeface="Calibri" pitchFamily="34" charset="-120"/>
+              </a:rPr>
+              <a:t>Which column does each word belong in?  Columns: Closed 1st syllable  |  Other pattern</a:t>
+            </a:r>
+            <a:endParaRPr lang="en-US" sz="1500" dirty="0"/>
+          </a:p>
+        </p:txBody>
+      </p:sp>
+    </p:spTree>
+  </p:cSld>
+  <p:clrMapOvr>
+    <a:masterClrMapping/>
+  </p:clrMapOvr>
+</p:sld>
+</file>
+
+<file path=ppt/slides/slide17.xml><?xml version="1.0" encoding="utf-8"?>
+<p:sld xmlns:a="http://schemas.openxmlformats.org/drawingml/2006/main" xmlns:r="http://schemas.openxmlformats.org/officeDocument/2006/relationships" xmlns:p="http://schemas.openxmlformats.org/presentationml/2006/main">
+  <p:cSld name="Slide 17">
+    <p:bg>
+      <p:bgPr>
+        <a:solidFill>
+          <a:srgbClr val="F8FAFC"/>
+        </a:solidFill>
+      </p:bgPr>
+    </p:bg>
+    <p:spTree>
+      <p:nvGrpSpPr>
+        <p:cNvPr id="1" name=""/>
+        <p:cNvGrpSpPr/>
+        <p:nvPr/>
+      </p:nvGrpSpPr>
+      <p:grpSpPr>
+        <a:xfrm>
+          <a:off x="0" y="0"/>
+          <a:ext cx="0" cy="0"/>
+          <a:chOff x="0" y="0"/>
+          <a:chExt cx="0" cy="0"/>
+        </a:xfrm>
+      </p:grpSpPr>
+      <p:sp>
+        <p:nvSpPr>
+          <p:cNvPr id="2" name="Shape 0"/>
+          <p:cNvSpPr/>
+          <p:nvPr/>
+        </p:nvSpPr>
+        <p:spPr>
+          <a:xfrm>
+            <a:off x="0" y="0"/>
+            <a:ext cx="9144000" cy="566928"/>
+          </a:xfrm>
+          <a:prstGeom prst="rect">
+            <a:avLst/>
+          </a:prstGeom>
+          <a:solidFill>
+            <a:srgbClr val="0E1C42"/>
+          </a:solidFill>
+          <a:ln/>
+        </p:spPr>
+      </p:sp>
+      <p:sp>
+        <p:nvSpPr>
+          <p:cNvPr id="3" name="Text 1"/>
+          <p:cNvSpPr/>
+          <p:nvPr/>
+        </p:nvSpPr>
+        <p:spPr>
+          <a:xfrm>
+            <a:off x="365760" y="54864"/>
+            <a:ext cx="8412480" cy="457200"/>
+          </a:xfrm>
+          <a:prstGeom prst="rect">
+            <a:avLst/>
+          </a:prstGeom>
+          <a:noFill/>
+          <a:ln/>
+        </p:spPr>
+        <p:txBody>
+          <a:bodyPr wrap="square" lIns="0" tIns="0" rIns="0" bIns="0" rtlCol="0" anchor="ctr"/>
+          <a:lstStyle/>
+          <a:p>
+            <a:pPr indent="0" marL="0">
+              <a:buNone/>
+            </a:pPr>
+            <a:r>
+              <a:rPr lang="en-US" sz="2200" b="1" dirty="0">
+                <a:solidFill>
+                  <a:srgbClr val="FFFFFF"/>
+                </a:solidFill>
+                <a:latin typeface="Calibri" pitchFamily="34" charset="0"/>
+                <a:ea typeface="Calibri" pitchFamily="34" charset="-122"/>
+                <a:cs typeface="Calibri" pitchFamily="34" charset="-120"/>
+              </a:rPr>
+              <a:t>🔠  Spelling</a:t>
+            </a:r>
+            <a:endParaRPr lang="en-US" sz="2200" dirty="0"/>
+          </a:p>
+        </p:txBody>
+      </p:sp>
+      <p:sp>
+        <p:nvSpPr>
+          <p:cNvPr id="4" name="Text 2"/>
+          <p:cNvSpPr/>
+          <p:nvPr/>
+        </p:nvSpPr>
+        <p:spPr>
+          <a:xfrm>
+            <a:off x="365760" y="777240"/>
+            <a:ext cx="8229600" cy="237744"/>
+          </a:xfrm>
+          <a:prstGeom prst="rect">
+            <a:avLst/>
+          </a:prstGeom>
+          <a:noFill/>
+          <a:ln/>
+        </p:spPr>
+        <p:txBody>
+          <a:bodyPr wrap="square" lIns="0" tIns="0" rIns="0" bIns="0" rtlCol="0" anchor="ctr"/>
+          <a:lstStyle/>
+          <a:p>
+            <a:pPr indent="0" marL="0">
+              <a:buNone/>
+            </a:pPr>
+            <a:r>
+              <a:rPr lang="en-US" sz="1100" b="1" spc="100" kern="0" dirty="0">
+                <a:solidFill>
+                  <a:srgbClr val="0E1C42"/>
+                </a:solidFill>
+                <a:latin typeface="Calibri" pitchFamily="34" charset="0"/>
+                <a:ea typeface="Calibri" pitchFamily="34" charset="-122"/>
+                <a:cs typeface="Calibri" pitchFamily="34" charset="-120"/>
+              </a:rPr>
+              <a:t>CLOSED SYLLABLES IN LONGER WORDS</a:t>
+            </a:r>
+            <a:endParaRPr lang="en-US" sz="1100" dirty="0"/>
+          </a:p>
+        </p:txBody>
+      </p:sp>
+      <p:sp>
+        <p:nvSpPr>
+          <p:cNvPr id="5" name="Shape 3"/>
+          <p:cNvSpPr/>
+          <p:nvPr/>
+        </p:nvSpPr>
+        <p:spPr>
+          <a:xfrm>
+            <a:off x="411480" y="1078992"/>
+            <a:ext cx="4114800" cy="457200"/>
+          </a:xfrm>
+          <a:prstGeom prst="roundRect">
+            <a:avLst>
+              <a:gd name="adj" fmla="val 16000"/>
+            </a:avLst>
+          </a:prstGeom>
+          <a:solidFill>
+            <a:srgbClr val="0E1C42"/>
+          </a:solidFill>
+          <a:ln/>
+        </p:spPr>
+      </p:sp>
+      <p:sp>
+        <p:nvSpPr>
+          <p:cNvPr id="6" name="Text 4"/>
+          <p:cNvSpPr/>
+          <p:nvPr/>
+        </p:nvSpPr>
+        <p:spPr>
+          <a:xfrm>
+            <a:off x="457200" y="1133856"/>
+            <a:ext cx="4023360" cy="347472"/>
+          </a:xfrm>
+          <a:prstGeom prst="rect">
+            <a:avLst/>
+          </a:prstGeom>
+          <a:noFill/>
+          <a:ln/>
+        </p:spPr>
+        <p:txBody>
+          <a:bodyPr wrap="square" lIns="0" tIns="0" rIns="0" bIns="0" rtlCol="0" anchor="ctr"/>
+          <a:lstStyle/>
+          <a:p>
+            <a:pPr algn="ctr" indent="0" marL="0">
+              <a:buNone/>
+            </a:pPr>
+            <a:r>
+              <a:rPr lang="en-US" sz="1300" b="1" dirty="0">
+                <a:solidFill>
+                  <a:srgbClr val="FFFFFF"/>
+                </a:solidFill>
+                <a:latin typeface="Calibri" pitchFamily="34" charset="0"/>
+                <a:ea typeface="Calibri" pitchFamily="34" charset="-122"/>
+                <a:cs typeface="Calibri" pitchFamily="34" charset="-120"/>
+              </a:rPr>
+              <a:t>Closed 1st syllable</a:t>
+            </a:r>
+            <a:endParaRPr lang="en-US" sz="1300" dirty="0"/>
+          </a:p>
+        </p:txBody>
+      </p:sp>
+      <p:sp>
+        <p:nvSpPr>
+          <p:cNvPr id="7" name="Shape 5"/>
+          <p:cNvSpPr/>
+          <p:nvPr/>
+        </p:nvSpPr>
+        <p:spPr>
+          <a:xfrm>
+            <a:off x="411480" y="1591056"/>
+            <a:ext cx="4114800" cy="2103120"/>
+          </a:xfrm>
+          <a:prstGeom prst="roundRect">
+            <a:avLst>
+              <a:gd name="adj" fmla="val 4348"/>
+            </a:avLst>
+          </a:prstGeom>
+          <a:solidFill>
+            <a:srgbClr val="FFFFFF"/>
+          </a:solidFill>
+          <a:ln/>
+          <a:effectLst>
+            <a:outerShdw sx="100000" sy="100000" kx="0" ky="0" algn="bl" rotWithShape="0" blurRad="101600" dist="38100" dir="2700000">
+              <a:srgbClr val="000000">
+                <a:alpha val="12000"/>
+              </a:srgbClr>
+            </a:outerShdw>
+          </a:effectLst>
+        </p:spPr>
+      </p:sp>
+      <p:sp>
+        <p:nvSpPr>
+          <p:cNvPr id="8" name="Text 6"/>
+          <p:cNvSpPr/>
+          <p:nvPr/>
+        </p:nvSpPr>
+        <p:spPr>
+          <a:xfrm>
+            <a:off x="502920" y="1700784"/>
+            <a:ext cx="3931920" cy="1883664"/>
+          </a:xfrm>
+          <a:prstGeom prst="rect">
+            <a:avLst/>
+          </a:prstGeom>
+          <a:noFill/>
+          <a:ln/>
+        </p:spPr>
+        <p:txBody>
+          <a:bodyPr wrap="square" lIns="0" tIns="0" rIns="0" bIns="0" rtlCol="0" anchor="ctr"/>
+          <a:lstStyle/>
+          <a:p>
+            <a:pPr algn="ctr" indent="0" marL="0">
+              <a:buNone/>
+            </a:pPr>
+            <a:r>
+              <a:rPr lang="en-US" sz="1400" dirty="0">
+                <a:solidFill>
+                  <a:srgbClr val="1E293B"/>
+                </a:solidFill>
+                <a:latin typeface="Calibri" pitchFamily="34" charset="0"/>
+                <a:ea typeface="Calibri" pitchFamily="34" charset="-122"/>
+                <a:cs typeface="Calibri" pitchFamily="34" charset="-120"/>
+              </a:rPr>
+              <a:t>rabbit</a:t>
+            </a:r>
+            <a:endParaRPr lang="en-US" sz="1400" dirty="0"/>
+          </a:p>
+          <a:p>
+            <a:pPr algn="ctr" indent="0" marL="0">
+              <a:buNone/>
+            </a:pPr>
+            <a:r>
+              <a:rPr lang="en-US" sz="1400" dirty="0">
+                <a:solidFill>
+                  <a:srgbClr val="1E293B"/>
+                </a:solidFill>
+                <a:latin typeface="Calibri" pitchFamily="34" charset="0"/>
+                <a:ea typeface="Calibri" pitchFamily="34" charset="-122"/>
+                <a:cs typeface="Calibri" pitchFamily="34" charset="-120"/>
+              </a:rPr>
+              <a:t>basket</a:t>
+            </a:r>
+            <a:endParaRPr lang="en-US" sz="1400" dirty="0"/>
+          </a:p>
+          <a:p>
+            <a:pPr algn="ctr" indent="0" marL="0">
+              <a:buNone/>
+            </a:pPr>
+            <a:r>
+              <a:rPr lang="en-US" sz="1400" dirty="0">
+                <a:solidFill>
+                  <a:srgbClr val="1E293B"/>
+                </a:solidFill>
+                <a:latin typeface="Calibri" pitchFamily="34" charset="0"/>
+                <a:ea typeface="Calibri" pitchFamily="34" charset="-122"/>
+                <a:cs typeface="Calibri" pitchFamily="34" charset="-120"/>
+              </a:rPr>
+              <a:t>kitten</a:t>
+            </a:r>
+            <a:endParaRPr lang="en-US" sz="1400" dirty="0"/>
+          </a:p>
+          <a:p>
+            <a:pPr algn="ctr" indent="0" marL="0">
+              <a:buNone/>
+            </a:pPr>
+            <a:r>
+              <a:rPr lang="en-US" sz="1400" dirty="0">
+                <a:solidFill>
+                  <a:srgbClr val="1E293B"/>
+                </a:solidFill>
+                <a:latin typeface="Calibri" pitchFamily="34" charset="0"/>
+                <a:ea typeface="Calibri" pitchFamily="34" charset="-122"/>
+                <a:cs typeface="Calibri" pitchFamily="34" charset="-120"/>
+              </a:rPr>
+              <a:t>blanket</a:t>
+            </a:r>
+            <a:endParaRPr lang="en-US" sz="1400" dirty="0"/>
+          </a:p>
+        </p:txBody>
+      </p:sp>
+      <p:sp>
+        <p:nvSpPr>
+          <p:cNvPr id="9" name="Shape 7"/>
+          <p:cNvSpPr/>
+          <p:nvPr/>
+        </p:nvSpPr>
+        <p:spPr>
+          <a:xfrm>
+            <a:off x="4617720" y="1078992"/>
+            <a:ext cx="4114800" cy="457200"/>
+          </a:xfrm>
+          <a:prstGeom prst="roundRect">
+            <a:avLst>
+              <a:gd name="adj" fmla="val 16000"/>
+            </a:avLst>
+          </a:prstGeom>
+          <a:solidFill>
+            <a:srgbClr val="0E1C42"/>
+          </a:solidFill>
+          <a:ln/>
+        </p:spPr>
+      </p:sp>
+      <p:sp>
+        <p:nvSpPr>
+          <p:cNvPr id="10" name="Text 8"/>
+          <p:cNvSpPr/>
+          <p:nvPr/>
+        </p:nvSpPr>
+        <p:spPr>
+          <a:xfrm>
+            <a:off x="4663440" y="1133856"/>
+            <a:ext cx="4023360" cy="347472"/>
+          </a:xfrm>
+          <a:prstGeom prst="rect">
+            <a:avLst/>
+          </a:prstGeom>
+          <a:noFill/>
+          <a:ln/>
+        </p:spPr>
+        <p:txBody>
+          <a:bodyPr wrap="square" lIns="0" tIns="0" rIns="0" bIns="0" rtlCol="0" anchor="ctr"/>
+          <a:lstStyle/>
+          <a:p>
+            <a:pPr algn="ctr" indent="0" marL="0">
+              <a:buNone/>
+            </a:pPr>
+            <a:r>
+              <a:rPr lang="en-US" sz="1300" b="1" dirty="0">
+                <a:solidFill>
+                  <a:srgbClr val="FFFFFF"/>
+                </a:solidFill>
+                <a:latin typeface="Calibri" pitchFamily="34" charset="0"/>
+                <a:ea typeface="Calibri" pitchFamily="34" charset="-122"/>
+                <a:cs typeface="Calibri" pitchFamily="34" charset="-120"/>
+              </a:rPr>
+              <a:t>Other pattern</a:t>
+            </a:r>
+            <a:endParaRPr lang="en-US" sz="1300" dirty="0"/>
+          </a:p>
+        </p:txBody>
+      </p:sp>
+      <p:sp>
+        <p:nvSpPr>
+          <p:cNvPr id="11" name="Shape 9"/>
+          <p:cNvSpPr/>
+          <p:nvPr/>
+        </p:nvSpPr>
+        <p:spPr>
+          <a:xfrm>
+            <a:off x="4617720" y="1591056"/>
+            <a:ext cx="4114800" cy="2103120"/>
+          </a:xfrm>
+          <a:prstGeom prst="roundRect">
+            <a:avLst>
+              <a:gd name="adj" fmla="val 4348"/>
+            </a:avLst>
+          </a:prstGeom>
+          <a:solidFill>
+            <a:srgbClr val="FFFFFF"/>
+          </a:solidFill>
+          <a:ln/>
+          <a:effectLst>
+            <a:outerShdw sx="100000" sy="100000" kx="0" ky="0" algn="bl" rotWithShape="0" blurRad="101600" dist="38100" dir="2700000">
+              <a:srgbClr val="000000">
+                <a:alpha val="12000"/>
+              </a:srgbClr>
+            </a:outerShdw>
+          </a:effectLst>
+        </p:spPr>
+      </p:sp>
+      <p:sp>
+        <p:nvSpPr>
+          <p:cNvPr id="12" name="Text 10"/>
+          <p:cNvSpPr/>
+          <p:nvPr/>
+        </p:nvSpPr>
+        <p:spPr>
+          <a:xfrm>
+            <a:off x="4709160" y="1700784"/>
+            <a:ext cx="3931920" cy="1883664"/>
+          </a:xfrm>
+          <a:prstGeom prst="rect">
+            <a:avLst/>
+          </a:prstGeom>
+          <a:noFill/>
+          <a:ln/>
+        </p:spPr>
+        <p:txBody>
+          <a:bodyPr wrap="square" lIns="0" tIns="0" rIns="0" bIns="0" rtlCol="0" anchor="ctr"/>
+          <a:lstStyle/>
+          <a:p>
+            <a:pPr algn="ctr" indent="0" marL="0">
+              <a:buNone/>
+            </a:pPr>
+            <a:r>
+              <a:rPr lang="en-US" sz="1400" dirty="0">
+                <a:solidFill>
+                  <a:srgbClr val="1E293B"/>
+                </a:solidFill>
+                <a:latin typeface="Calibri" pitchFamily="34" charset="0"/>
+                <a:ea typeface="Calibri" pitchFamily="34" charset="-122"/>
+                <a:cs typeface="Calibri" pitchFamily="34" charset="-120"/>
+              </a:rPr>
+              <a:t>castle</a:t>
+            </a:r>
+            <a:endParaRPr lang="en-US" sz="1400" dirty="0"/>
+          </a:p>
+          <a:p>
+            <a:pPr algn="ctr" indent="0" marL="0">
+              <a:buNone/>
+            </a:pPr>
+            <a:r>
+              <a:rPr lang="en-US" sz="1400" dirty="0">
+                <a:solidFill>
+                  <a:srgbClr val="1E293B"/>
+                </a:solidFill>
+                <a:latin typeface="Calibri" pitchFamily="34" charset="0"/>
+                <a:ea typeface="Calibri" pitchFamily="34" charset="-122"/>
+                <a:cs typeface="Calibri" pitchFamily="34" charset="-120"/>
+              </a:rPr>
+              <a:t>garden</a:t>
+            </a:r>
+            <a:endParaRPr lang="en-US" sz="1400" dirty="0"/>
+          </a:p>
+        </p:txBody>
+      </p:sp>
+    </p:spTree>
+  </p:cSld>
+  <p:clrMapOvr>
+    <a:masterClrMapping/>
+  </p:clrMapOvr>
+</p:sld>
+</file>
+
+<file path=ppt/slides/slide18.xml><?xml version="1.0" encoding="utf-8"?>
+<p:sld xmlns:a="http://schemas.openxmlformats.org/drawingml/2006/main" xmlns:r="http://schemas.openxmlformats.org/officeDocument/2006/relationships" xmlns:p="http://schemas.openxmlformats.org/presentationml/2006/main">
+  <p:cSld name="Slide 18">
     <p:bg>
       <p:bgPr>
         <a:solidFill>
@@ -4919,9 +7057,9 @@
 </p:sld>
 </file>
 
-<file path=ppt/slides/slide16.xml><?xml version="1.0" encoding="utf-8"?>
+<file path=ppt/slides/slide19.xml><?xml version="1.0" encoding="utf-8"?>
 <p:sld xmlns:a="http://schemas.openxmlformats.org/drawingml/2006/main" xmlns:r="http://schemas.openxmlformats.org/officeDocument/2006/relationships" xmlns:p="http://schemas.openxmlformats.org/presentationml/2006/main">
-  <p:cSld name="Slide 16">
+  <p:cSld name="Slide 19">
     <p:bg>
       <p:bgPr>
         <a:solidFill>
@@ -6459,7 +8597,7 @@
                 <a:ea typeface="Calibri" pitchFamily="34" charset="-122"/>
                 <a:cs typeface="Calibri" pitchFamily="34" charset="-120"/>
               </a:rPr>
-              <a:t>Good readers look for theme clues . A theme is a lesson the whole story teaches.</a:t>
+              <a:t>Good readers look for theme clues. A theme is a lesson the whole story teaches.</a:t>
             </a:r>
             <a:endParaRPr lang="en-US" sz="1500" dirty="0"/>
           </a:p>
@@ -6479,7 +8617,7 @@
     <p:bg>
       <p:bgPr>
         <a:solidFill>
-          <a:srgbClr val="F8FAFC"/>
+          <a:srgbClr val="FFFFFF"/>
         </a:solidFill>
       </p:bgPr>
     </p:bg>
@@ -6564,7 +8702,7 @@
         </p:nvSpPr>
         <p:spPr>
           <a:xfrm>
-            <a:off x="365760" y="749808"/>
+            <a:off x="365760" y="804672"/>
             <a:ext cx="8229600" cy="237744"/>
           </a:xfrm>
           <a:prstGeom prst="rect">
@@ -6589,7 +8727,7 @@
                 <a:ea typeface="Calibri" pitchFamily="34" charset="-122"/>
                 <a:cs typeface="Calibri" pitchFamily="34" charset="-120"/>
               </a:rPr>
-              <a:t>FIX THESE SENTENCES</a:t>
+              <a:t>CORRECT MODEL — STUDY WHAT IS RIGHT</a:t>
             </a:r>
             <a:endParaRPr lang="en-US" sz="1100" dirty="0"/>
           </a:p>
@@ -6603,16 +8741,16 @@
         </p:nvSpPr>
         <p:spPr>
           <a:xfrm>
-            <a:off x="365760" y="1024128"/>
-            <a:ext cx="8412480" cy="777240"/>
+            <a:off x="365760" y="1078992"/>
+            <a:ext cx="8412480" cy="822960"/>
           </a:xfrm>
           <a:prstGeom prst="roundRect">
             <a:avLst>
-              <a:gd name="adj" fmla="val 11765"/>
+              <a:gd name="adj" fmla="val 11111"/>
             </a:avLst>
           </a:prstGeom>
           <a:solidFill>
-            <a:srgbClr val="FFFFFF"/>
+            <a:srgbClr val="E5F7FC"/>
           </a:solidFill>
           <a:ln w="19050">
             <a:solidFill>
@@ -6637,8 +8775,8 @@
         </p:nvSpPr>
         <p:spPr>
           <a:xfrm>
-            <a:off x="594360" y="1152144"/>
-            <a:ext cx="7955280" cy="521208"/>
+            <a:off x="594360" y="1207008"/>
+            <a:ext cx="7955280" cy="566928"/>
           </a:xfrm>
           <a:prstGeom prst="rect">
             <a:avLst/>
@@ -6662,7 +8800,7 @@
                 <a:ea typeface="Calibri" pitchFamily="34" charset="-122"/>
                 <a:cs typeface="Calibri" pitchFamily="34" charset="-120"/>
               </a:rPr>
-              <a:t>1. the princess pea walked out of the dungeon and into the light of the great hall at last</a:t>
+              <a:t>The Princess Pea climbed the stairs and stepped into the warm yellow light.</a:t>
             </a:r>
             <a:endParaRPr lang="en-US" sz="1700" dirty="0"/>
           </a:p>
@@ -6670,37 +8808,42 @@
       </p:sp>
       <p:sp>
         <p:nvSpPr>
-          <p:cNvPr id="7" name="Shape 5"/>
-          <p:cNvSpPr/>
-          <p:nvPr/>
-        </p:nvSpPr>
-        <p:spPr>
-          <a:xfrm>
-            <a:off x="365760" y="1874520"/>
-            <a:ext cx="8412480" cy="777240"/>
-          </a:xfrm>
-          <a:prstGeom prst="roundRect">
-            <a:avLst>
-              <a:gd name="adj" fmla="val 11765"/>
-            </a:avLst>
-          </a:prstGeom>
-          <a:solidFill>
-            <a:srgbClr val="FFFFFF"/>
-          </a:solidFill>
-          <a:ln w="19050">
-            <a:solidFill>
-              <a:srgbClr val="55C8E8"/>
-            </a:solidFill>
-            <a:prstDash val="solid"/>
-          </a:ln>
-          <a:effectLst>
-            <a:outerShdw sx="100000" sy="100000" kx="0" ky="0" algn="bl" rotWithShape="0" blurRad="101600" dist="38100" dir="2700000">
-              <a:srgbClr val="000000">
-                <a:alpha val="12000"/>
-              </a:srgbClr>
-            </a:outerShdw>
-          </a:effectLst>
-        </p:spPr>
+          <p:cNvPr id="7" name="Text 5"/>
+          <p:cNvSpPr/>
+          <p:nvPr/>
+        </p:nvSpPr>
+        <p:spPr>
+          <a:xfrm>
+            <a:off x="365760" y="2103120"/>
+            <a:ext cx="8229600" cy="237744"/>
+          </a:xfrm>
+          <a:prstGeom prst="rect">
+            <a:avLst/>
+          </a:prstGeom>
+          <a:noFill/>
+          <a:ln/>
+        </p:spPr>
+        <p:txBody>
+          <a:bodyPr wrap="square" lIns="0" tIns="0" rIns="0" bIns="0" rtlCol="0" anchor="ctr"/>
+          <a:lstStyle/>
+          <a:p>
+            <a:pPr indent="0" marL="0">
+              <a:buNone/>
+            </a:pPr>
+            <a:r>
+              <a:rPr lang="en-US" sz="1100" b="1" spc="100" kern="0" dirty="0">
+                <a:solidFill>
+                  <a:srgbClr val="55C8E8"/>
+                </a:solidFill>
+                <a:latin typeface="Calibri" pitchFamily="34" charset="0"/>
+                <a:ea typeface="Calibri" pitchFamily="34" charset="-122"/>
+                <a:cs typeface="Calibri" pitchFamily="34" charset="-120"/>
+              </a:rPr>
+              <a:t>NOTICE</a:t>
+            </a:r>
+            <a:endParaRPr lang="en-US" sz="1100" dirty="0"/>
+          </a:p>
+        </p:txBody>
       </p:sp>
       <p:sp>
         <p:nvSpPr>
@@ -6710,24 +8853,24 @@
         </p:nvSpPr>
         <p:spPr>
           <a:xfrm>
-            <a:off x="594360" y="2002536"/>
-            <a:ext cx="7955280" cy="521208"/>
-          </a:xfrm>
-          <a:prstGeom prst="rect">
-            <a:avLst/>
-          </a:prstGeom>
-          <a:noFill/>
-          <a:ln/>
-        </p:spPr>
-        <p:txBody>
-          <a:bodyPr wrap="square" lIns="0" tIns="0" rIns="0" bIns="0" rtlCol="0" anchor="ctr"/>
-          <a:lstStyle/>
-          <a:p>
-            <a:pPr indent="0" marL="0">
-              <a:buNone/>
-            </a:pPr>
-            <a:r>
-              <a:rPr lang="en-US" sz="1700" dirty="0">
+            <a:off x="365760" y="2359152"/>
+            <a:ext cx="8412480" cy="1097280"/>
+          </a:xfrm>
+          <a:prstGeom prst="rect">
+            <a:avLst/>
+          </a:prstGeom>
+          <a:noFill/>
+          <a:ln/>
+        </p:spPr>
+        <p:txBody>
+          <a:bodyPr wrap="square" lIns="0" tIns="0" rIns="0" bIns="0" rtlCol="0" anchor="t"/>
+          <a:lstStyle/>
+          <a:p>
+            <a:pPr indent="0" marL="0">
+              <a:buNone/>
+            </a:pPr>
+            <a:r>
+              <a:rPr lang="en-US" sz="1500" dirty="0">
                 <a:solidFill>
                   <a:srgbClr val="1E293B"/>
                 </a:solidFill>
@@ -6735,48 +8878,9 @@
                 <a:ea typeface="Calibri" pitchFamily="34" charset="-122"/>
                 <a:cs typeface="Calibri" pitchFamily="34" charset="-120"/>
               </a:rPr>
-              <a:t>2. despereaux followed her slowly and bravely and felt the warmth of the sun on his small face</a:t>
-            </a:r>
-            <a:endParaRPr lang="en-US" sz="1700" dirty="0"/>
-          </a:p>
-        </p:txBody>
-      </p:sp>
-      <p:sp>
-        <p:nvSpPr>
-          <p:cNvPr id="9" name="Text 7"/>
-          <p:cNvSpPr/>
-          <p:nvPr/>
-        </p:nvSpPr>
-        <p:spPr>
-          <a:xfrm>
-            <a:off x="365760" y="2788920"/>
-            <a:ext cx="8412480" cy="365760"/>
-          </a:xfrm>
-          <a:prstGeom prst="rect">
-            <a:avLst/>
-          </a:prstGeom>
-          <a:noFill/>
-          <a:ln/>
-        </p:spPr>
-        <p:txBody>
-          <a:bodyPr wrap="square" lIns="0" tIns="0" rIns="0" bIns="0" rtlCol="0" anchor="ctr"/>
-          <a:lstStyle/>
-          <a:p>
-            <a:pPr indent="0" marL="0">
-              <a:buNone/>
-            </a:pPr>
-            <a:r>
-              <a:rPr lang="en-US" sz="1600" b="1" dirty="0">
-                <a:solidFill>
-                  <a:srgbClr val="0E1C42"/>
-                </a:solidFill>
-                <a:latin typeface="Calibri" pitchFamily="34" charset="0"/>
-                <a:ea typeface="Calibri" pitchFamily="34" charset="-122"/>
-                <a:cs typeface="Calibri" pitchFamily="34" charset="-120"/>
-              </a:rPr>
-              <a:t>Rewrite both sentences correctly in your notebook.</a:t>
-            </a:r>
-            <a:endParaRPr lang="en-US" sz="1600" dirty="0"/>
+              <a:t>Princess Pea is a name, so both words are capitalized. The verbs climbed and stepped share one subject, so and joins them with no comma.</a:t>
+            </a:r>
+            <a:endParaRPr lang="en-US" sz="1500" dirty="0"/>
           </a:p>
         </p:txBody>
       </p:sp>
@@ -6904,7 +9008,7 @@
                 <a:ea typeface="Calibri" pitchFamily="34" charset="-122"/>
                 <a:cs typeface="Calibri" pitchFamily="34" charset="-120"/>
               </a:rPr>
-              <a:t>FIX THESE SENTENCES</a:t>
+              <a:t>NOW FIX THIS ONE</a:t>
             </a:r>
             <a:endParaRPr lang="en-US" sz="1100" dirty="0"/>
           </a:p>
@@ -6977,7 +9081,7 @@
                 <a:ea typeface="Calibri" pitchFamily="34" charset="-122"/>
                 <a:cs typeface="Calibri" pitchFamily="34" charset="-120"/>
               </a:rPr>
-              <a:t>1. the princess pea walked out of the dungeon and into the light of the great hall at last</a:t>
+              <a:t>the princess pea walked out of the dungeon and into the light of the great hall at last</a:t>
             </a:r>
             <a:endParaRPr lang="en-US" sz="1700" dirty="0"/>
           </a:p>
@@ -6985,226 +9089,40 @@
       </p:sp>
       <p:sp>
         <p:nvSpPr>
-          <p:cNvPr id="7" name="Shape 5"/>
-          <p:cNvSpPr/>
-          <p:nvPr/>
-        </p:nvSpPr>
-        <p:spPr>
-          <a:xfrm>
-            <a:off x="365760" y="1874520"/>
-            <a:ext cx="8412480" cy="777240"/>
-          </a:xfrm>
-          <a:prstGeom prst="roundRect">
-            <a:avLst>
-              <a:gd name="adj" fmla="val 11765"/>
-            </a:avLst>
-          </a:prstGeom>
-          <a:solidFill>
-            <a:srgbClr val="FFFFFF"/>
-          </a:solidFill>
-          <a:ln w="19050">
-            <a:solidFill>
-              <a:srgbClr val="55C8E8"/>
-            </a:solidFill>
-            <a:prstDash val="solid"/>
-          </a:ln>
-          <a:effectLst>
-            <a:outerShdw sx="100000" sy="100000" kx="0" ky="0" algn="bl" rotWithShape="0" blurRad="101600" dist="38100" dir="2700000">
-              <a:srgbClr val="000000">
-                <a:alpha val="12000"/>
-              </a:srgbClr>
-            </a:outerShdw>
-          </a:effectLst>
-        </p:spPr>
-      </p:sp>
-      <p:sp>
-        <p:nvSpPr>
-          <p:cNvPr id="8" name="Text 6"/>
-          <p:cNvSpPr/>
-          <p:nvPr/>
-        </p:nvSpPr>
-        <p:spPr>
-          <a:xfrm>
-            <a:off x="594360" y="2002536"/>
-            <a:ext cx="7955280" cy="521208"/>
-          </a:xfrm>
-          <a:prstGeom prst="rect">
-            <a:avLst/>
-          </a:prstGeom>
-          <a:noFill/>
-          <a:ln/>
-        </p:spPr>
-        <p:txBody>
-          <a:bodyPr wrap="square" lIns="0" tIns="0" rIns="0" bIns="0" rtlCol="0" anchor="ctr"/>
-          <a:lstStyle/>
-          <a:p>
-            <a:pPr indent="0" marL="0">
-              <a:buNone/>
-            </a:pPr>
-            <a:r>
-              <a:rPr lang="en-US" sz="1700" dirty="0">
-                <a:solidFill>
-                  <a:srgbClr val="1E293B"/>
-                </a:solidFill>
-                <a:latin typeface="Calibri" pitchFamily="34" charset="0"/>
-                <a:ea typeface="Calibri" pitchFamily="34" charset="-122"/>
-                <a:cs typeface="Calibri" pitchFamily="34" charset="-120"/>
-              </a:rPr>
-              <a:t>2. despereaux followed her slowly and bravely and felt the warmth of the sun on his small face</a:t>
-            </a:r>
-            <a:endParaRPr lang="en-US" sz="1700" dirty="0"/>
-          </a:p>
-        </p:txBody>
-      </p:sp>
-      <p:sp>
-        <p:nvSpPr>
-          <p:cNvPr id="9" name="Shape 7"/>
-          <p:cNvSpPr/>
-          <p:nvPr/>
-        </p:nvSpPr>
-        <p:spPr>
-          <a:xfrm>
-            <a:off x="365760" y="2743200"/>
-            <a:ext cx="8412480" cy="1417320"/>
-          </a:xfrm>
-          <a:prstGeom prst="roundRect">
-            <a:avLst>
-              <a:gd name="adj" fmla="val 6452"/>
-            </a:avLst>
-          </a:prstGeom>
-          <a:solidFill>
-            <a:srgbClr val="E8F8EF"/>
-          </a:solidFill>
-          <a:ln/>
-          <a:effectLst>
-            <a:outerShdw sx="100000" sy="100000" kx="0" ky="0" algn="bl" rotWithShape="0" blurRad="101600" dist="38100" dir="2700000">
-              <a:srgbClr val="000000">
-                <a:alpha val="12000"/>
-              </a:srgbClr>
-            </a:outerShdw>
-          </a:effectLst>
-        </p:spPr>
-      </p:sp>
-      <p:sp>
-        <p:nvSpPr>
-          <p:cNvPr id="10" name="Text 8"/>
-          <p:cNvSpPr/>
-          <p:nvPr/>
-        </p:nvSpPr>
-        <p:spPr>
-          <a:xfrm>
-            <a:off x="566928" y="2816352"/>
-            <a:ext cx="8229600" cy="237744"/>
-          </a:xfrm>
-          <a:prstGeom prst="rect">
-            <a:avLst/>
-          </a:prstGeom>
-          <a:noFill/>
-          <a:ln/>
-        </p:spPr>
-        <p:txBody>
-          <a:bodyPr wrap="square" lIns="0" tIns="0" rIns="0" bIns="0" rtlCol="0" anchor="ctr"/>
-          <a:lstStyle/>
-          <a:p>
-            <a:pPr indent="0" marL="0">
-              <a:buNone/>
-            </a:pPr>
-            <a:r>
-              <a:rPr lang="en-US" sz="1100" b="1" spc="100" kern="0" dirty="0">
-                <a:solidFill>
-                  <a:srgbClr val="34B76F"/>
-                </a:solidFill>
-                <a:latin typeface="Calibri" pitchFamily="34" charset="0"/>
-                <a:ea typeface="Calibri" pitchFamily="34" charset="-122"/>
-                <a:cs typeface="Calibri" pitchFamily="34" charset="-120"/>
-              </a:rPr>
-              <a:t>✅  CORRECTED</a:t>
-            </a:r>
-            <a:endParaRPr lang="en-US" sz="1100" dirty="0"/>
-          </a:p>
-        </p:txBody>
-      </p:sp>
-      <p:sp>
-        <p:nvSpPr>
-          <p:cNvPr id="11" name="Text 9"/>
-          <p:cNvSpPr/>
-          <p:nvPr/>
-        </p:nvSpPr>
-        <p:spPr>
-          <a:xfrm>
-            <a:off x="566928" y="3072384"/>
-            <a:ext cx="8010144" cy="685800"/>
-          </a:xfrm>
-          <a:prstGeom prst="rect">
-            <a:avLst/>
-          </a:prstGeom>
-          <a:noFill/>
-          <a:ln/>
-        </p:spPr>
-        <p:txBody>
-          <a:bodyPr wrap="square" lIns="0" tIns="0" rIns="0" bIns="0" rtlCol="0" anchor="ctr"/>
-          <a:lstStyle/>
-          <a:p>
-            <a:pPr indent="0" marL="0">
-              <a:buNone/>
-            </a:pPr>
-            <a:endParaRPr lang="en-US" sz="1400" dirty="0"/>
-          </a:p>
-          <a:p>
-            <a:pPr indent="0" marL="0">
-              <a:buNone/>
-            </a:pPr>
-            <a:r>
-              <a:rPr lang="en-US" sz="1400" i="1" dirty="0">
-                <a:solidFill>
-                  <a:srgbClr val="1E293B"/>
-                </a:solidFill>
-                <a:latin typeface="Calibri" pitchFamily="34" charset="0"/>
-                <a:ea typeface="Calibri" pitchFamily="34" charset="-122"/>
-                <a:cs typeface="Calibri" pitchFamily="34" charset="-120"/>
-              </a:rPr>
-              <a:t>1. The Princess Pea walked out of the dungeon and into the light of the great hall at last.</a:t>
-            </a:r>
-            <a:endParaRPr lang="en-US" sz="1400" dirty="0"/>
-          </a:p>
-        </p:txBody>
-      </p:sp>
-      <p:sp>
-        <p:nvSpPr>
-          <p:cNvPr id="12" name="Text 10"/>
-          <p:cNvSpPr/>
-          <p:nvPr/>
-        </p:nvSpPr>
-        <p:spPr>
-          <a:xfrm>
-            <a:off x="566928" y="3767328"/>
-            <a:ext cx="8010144" cy="320040"/>
-          </a:xfrm>
-          <a:prstGeom prst="rect">
-            <a:avLst/>
-          </a:prstGeom>
-          <a:noFill/>
-          <a:ln/>
-        </p:spPr>
-        <p:txBody>
-          <a:bodyPr wrap="square" lIns="0" tIns="0" rIns="0" bIns="0" rtlCol="0" anchor="ctr"/>
-          <a:lstStyle/>
-          <a:p>
-            <a:pPr indent="0" marL="0">
-              <a:buNone/>
-            </a:pPr>
-            <a:r>
-              <a:rPr lang="en-US" sz="1200" dirty="0">
-                <a:solidFill>
-                  <a:srgbClr val="64748B"/>
-                </a:solidFill>
-                <a:latin typeface="Calibri" pitchFamily="34" charset="0"/>
-                <a:ea typeface="Calibri" pitchFamily="34" charset="-122"/>
-                <a:cs typeface="Calibri" pitchFamily="34" charset="-120"/>
-              </a:rPr>
-              <a:t>Did you catch the proper nouns (Princess Pea, Despereaux), the -ly adverbs (slowly, bravely), and capital letters?</a:t>
-            </a:r>
-            <a:endParaRPr lang="en-US" sz="1200" dirty="0"/>
+          <p:cNvPr id="7" name="Text 5"/>
+          <p:cNvSpPr/>
+          <p:nvPr/>
+        </p:nvSpPr>
+        <p:spPr>
+          <a:xfrm>
+            <a:off x="365760" y="2788920"/>
+            <a:ext cx="8412480" cy="365760"/>
+          </a:xfrm>
+          <a:prstGeom prst="rect">
+            <a:avLst/>
+          </a:prstGeom>
+          <a:noFill/>
+          <a:ln/>
+        </p:spPr>
+        <p:txBody>
+          <a:bodyPr wrap="square" lIns="0" tIns="0" rIns="0" bIns="0" rtlCol="0" anchor="ctr"/>
+          <a:lstStyle/>
+          <a:p>
+            <a:pPr indent="0" marL="0">
+              <a:buNone/>
+            </a:pPr>
+            <a:r>
+              <a:rPr lang="en-US" sz="1600" b="1" dirty="0">
+                <a:solidFill>
+                  <a:srgbClr val="0E1C42"/>
+                </a:solidFill>
+                <a:latin typeface="Calibri" pitchFamily="34" charset="0"/>
+                <a:ea typeface="Calibri" pitchFamily="34" charset="-122"/>
+                <a:cs typeface="Calibri" pitchFamily="34" charset="-120"/>
+              </a:rPr>
+              <a:t>Rewrite the sentence correctly in your notebook.</a:t>
+            </a:r>
+            <a:endParaRPr lang="en-US" sz="1600" dirty="0"/>
           </a:p>
         </p:txBody>
       </p:sp>
@@ -7222,7 +9140,7 @@
     <p:bg>
       <p:bgPr>
         <a:solidFill>
-          <a:srgbClr val="FFFFFF"/>
+          <a:srgbClr val="F8FAFC"/>
         </a:solidFill>
       </p:bgPr>
     </p:bg>
@@ -7255,7 +9173,7 @@
             <a:avLst/>
           </a:prstGeom>
           <a:solidFill>
-            <a:srgbClr val="8B6FC0"/>
+            <a:srgbClr val="55C8E8"/>
           </a:solidFill>
           <a:ln/>
         </p:spPr>
@@ -7293,7 +9211,7 @@
                 <a:ea typeface="Calibri" pitchFamily="34" charset="-122"/>
                 <a:cs typeface="Calibri" pitchFamily="34" charset="-120"/>
               </a:rPr>
-              <a:t>🌱  Morphology</a:t>
+              <a:t>✏️  Daily Oral Language</a:t>
             </a:r>
             <a:endParaRPr lang="en-US" sz="2200" dirty="0"/>
           </a:p>
@@ -7307,7 +9225,7 @@
         </p:nvSpPr>
         <p:spPr>
           <a:xfrm>
-            <a:off x="365760" y="804672"/>
+            <a:off x="365760" y="749808"/>
             <a:ext cx="8229600" cy="237744"/>
           </a:xfrm>
           <a:prstGeom prst="rect">
@@ -7326,13 +9244,13 @@
             <a:r>
               <a:rPr lang="en-US" sz="1100" b="1" spc="100" kern="0" dirty="0">
                 <a:solidFill>
-                  <a:srgbClr val="8B6FC0"/>
-                </a:solidFill>
-                <a:latin typeface="Calibri" pitchFamily="34" charset="0"/>
-                <a:ea typeface="Calibri" pitchFamily="34" charset="-122"/>
-                <a:cs typeface="Calibri" pitchFamily="34" charset="-120"/>
-              </a:rPr>
-              <a:t>-TION</a:t>
+                  <a:srgbClr val="55C8E8"/>
+                </a:solidFill>
+                <a:latin typeface="Calibri" pitchFamily="34" charset="0"/>
+                <a:ea typeface="Calibri" pitchFamily="34" charset="-122"/>
+                <a:cs typeface="Calibri" pitchFamily="34" charset="-120"/>
+              </a:rPr>
+              <a:t>NOW FIX THIS ONE</a:t>
             </a:r>
             <a:endParaRPr lang="en-US" sz="1100" dirty="0"/>
           </a:p>
@@ -7346,18 +9264,23 @@
         </p:nvSpPr>
         <p:spPr>
           <a:xfrm>
-            <a:off x="365760" y="1097280"/>
-            <a:ext cx="8412480" cy="621792"/>
+            <a:off x="365760" y="1024128"/>
+            <a:ext cx="8412480" cy="777240"/>
           </a:xfrm>
           <a:prstGeom prst="roundRect">
             <a:avLst>
-              <a:gd name="adj" fmla="val 14706"/>
+              <a:gd name="adj" fmla="val 11765"/>
             </a:avLst>
           </a:prstGeom>
           <a:solidFill>
-            <a:srgbClr val="F0E8FF"/>
+            <a:srgbClr val="FFFFFF"/>
           </a:solidFill>
-          <a:ln/>
+          <a:ln w="19050">
+            <a:solidFill>
+              <a:srgbClr val="55C8E8"/>
+            </a:solidFill>
+            <a:prstDash val="solid"/>
+          </a:ln>
           <a:effectLst>
             <a:outerShdw sx="100000" sy="100000" kx="0" ky="0" algn="bl" rotWithShape="0" blurRad="101600" dist="38100" dir="2700000">
               <a:srgbClr val="000000">
@@ -7375,24 +9298,24 @@
         </p:nvSpPr>
         <p:spPr>
           <a:xfrm>
-            <a:off x="594360" y="1216152"/>
-            <a:ext cx="7863840" cy="384048"/>
-          </a:xfrm>
-          <a:prstGeom prst="rect">
-            <a:avLst/>
-          </a:prstGeom>
-          <a:noFill/>
-          <a:ln/>
-        </p:spPr>
-        <p:txBody>
-          <a:bodyPr wrap="square" lIns="0" tIns="0" rIns="0" bIns="0" rtlCol="0" anchor="ctr"/>
-          <a:lstStyle/>
-          <a:p>
-            <a:pPr indent="0" marL="0">
-              <a:buNone/>
-            </a:pPr>
-            <a:r>
-              <a:rPr lang="en-US" sz="1500" dirty="0">
+            <a:off x="594360" y="1152144"/>
+            <a:ext cx="7955280" cy="521208"/>
+          </a:xfrm>
+          <a:prstGeom prst="rect">
+            <a:avLst/>
+          </a:prstGeom>
+          <a:noFill/>
+          <a:ln/>
+        </p:spPr>
+        <p:txBody>
+          <a:bodyPr wrap="square" lIns="0" tIns="0" rIns="0" bIns="0" rtlCol="0" anchor="ctr"/>
+          <a:lstStyle/>
+          <a:p>
+            <a:pPr indent="0" marL="0">
+              <a:buNone/>
+            </a:pPr>
+            <a:r>
+              <a:rPr lang="en-US" sz="1700" dirty="0">
                 <a:solidFill>
                   <a:srgbClr val="1E293B"/>
                 </a:solidFill>
@@ -7400,9 +9323,9 @@
                 <a:ea typeface="Calibri" pitchFamily="34" charset="-122"/>
                 <a:cs typeface="Calibri" pitchFamily="34" charset="-120"/>
               </a:rPr>
-              <a:t>🌱  action — base word: act</a:t>
-            </a:r>
-            <a:endParaRPr lang="en-US" sz="1500" dirty="0"/>
+              <a:t>the princess pea walked out of the dungeon and into the light of the great hall at last</a:t>
+            </a:r>
+            <a:endParaRPr lang="en-US" sz="1700" dirty="0"/>
           </a:p>
         </p:txBody>
       </p:sp>
@@ -7414,16 +9337,16 @@
         </p:nvSpPr>
         <p:spPr>
           <a:xfrm>
-            <a:off x="365760" y="1792224"/>
-            <a:ext cx="8412480" cy="621792"/>
+            <a:off x="365760" y="2743200"/>
+            <a:ext cx="8412480" cy="1417320"/>
           </a:xfrm>
           <a:prstGeom prst="roundRect">
             <a:avLst>
-              <a:gd name="adj" fmla="val 14706"/>
+              <a:gd name="adj" fmla="val 6452"/>
             </a:avLst>
           </a:prstGeom>
           <a:solidFill>
-            <a:srgbClr val="F8F4FF"/>
+            <a:srgbClr val="E8F8EF"/>
           </a:solidFill>
           <a:ln/>
           <a:effectLst>
@@ -7443,24 +9366,63 @@
         </p:nvSpPr>
         <p:spPr>
           <a:xfrm>
-            <a:off x="594360" y="1911096"/>
-            <a:ext cx="7863840" cy="384048"/>
-          </a:xfrm>
-          <a:prstGeom prst="rect">
-            <a:avLst/>
-          </a:prstGeom>
-          <a:noFill/>
-          <a:ln/>
-        </p:spPr>
-        <p:txBody>
-          <a:bodyPr wrap="square" lIns="0" tIns="0" rIns="0" bIns="0" rtlCol="0" anchor="ctr"/>
-          <a:lstStyle/>
-          <a:p>
-            <a:pPr indent="0" marL="0">
-              <a:buNone/>
-            </a:pPr>
-            <a:r>
-              <a:rPr lang="en-US" sz="1500" dirty="0">
+            <a:off x="566928" y="2816352"/>
+            <a:ext cx="8229600" cy="237744"/>
+          </a:xfrm>
+          <a:prstGeom prst="rect">
+            <a:avLst/>
+          </a:prstGeom>
+          <a:noFill/>
+          <a:ln/>
+        </p:spPr>
+        <p:txBody>
+          <a:bodyPr wrap="square" lIns="0" tIns="0" rIns="0" bIns="0" rtlCol="0" anchor="ctr"/>
+          <a:lstStyle/>
+          <a:p>
+            <a:pPr indent="0" marL="0">
+              <a:buNone/>
+            </a:pPr>
+            <a:r>
+              <a:rPr lang="en-US" sz="1100" b="1" spc="100" kern="0" dirty="0">
+                <a:solidFill>
+                  <a:srgbClr val="34B76F"/>
+                </a:solidFill>
+                <a:latin typeface="Calibri" pitchFamily="34" charset="0"/>
+                <a:ea typeface="Calibri" pitchFamily="34" charset="-122"/>
+                <a:cs typeface="Calibri" pitchFamily="34" charset="-120"/>
+              </a:rPr>
+              <a:t>✅  CORRECTED</a:t>
+            </a:r>
+            <a:endParaRPr lang="en-US" sz="1100" dirty="0"/>
+          </a:p>
+        </p:txBody>
+      </p:sp>
+      <p:sp>
+        <p:nvSpPr>
+          <p:cNvPr id="9" name="Text 7"/>
+          <p:cNvSpPr/>
+          <p:nvPr/>
+        </p:nvSpPr>
+        <p:spPr>
+          <a:xfrm>
+            <a:off x="566928" y="3072384"/>
+            <a:ext cx="8010144" cy="685800"/>
+          </a:xfrm>
+          <a:prstGeom prst="rect">
+            <a:avLst/>
+          </a:prstGeom>
+          <a:noFill/>
+          <a:ln/>
+        </p:spPr>
+        <p:txBody>
+          <a:bodyPr wrap="square" lIns="0" tIns="0" rIns="0" bIns="0" rtlCol="0" anchor="ctr"/>
+          <a:lstStyle/>
+          <a:p>
+            <a:pPr indent="0" marL="0">
+              <a:buNone/>
+            </a:pPr>
+            <a:r>
+              <a:rPr lang="en-US" sz="1400" i="1" dirty="0">
                 <a:solidFill>
                   <a:srgbClr val="1E293B"/>
                 </a:solidFill>
@@ -7468,145 +9430,15 @@
                 <a:ea typeface="Calibri" pitchFamily="34" charset="-122"/>
                 <a:cs typeface="Calibri" pitchFamily="34" charset="-120"/>
               </a:rPr>
-              <a:t>🌱  direction — base word: direct</a:t>
-            </a:r>
-            <a:endParaRPr lang="en-US" sz="1500" dirty="0"/>
-          </a:p>
-        </p:txBody>
-      </p:sp>
-      <p:sp>
-        <p:nvSpPr>
-          <p:cNvPr id="9" name="Shape 7"/>
-          <p:cNvSpPr/>
-          <p:nvPr/>
-        </p:nvSpPr>
-        <p:spPr>
-          <a:xfrm>
-            <a:off x="365760" y="2487168"/>
-            <a:ext cx="8412480" cy="621792"/>
-          </a:xfrm>
-          <a:prstGeom prst="roundRect">
-            <a:avLst>
-              <a:gd name="adj" fmla="val 14706"/>
-            </a:avLst>
-          </a:prstGeom>
-          <a:solidFill>
-            <a:srgbClr val="F0E8FF"/>
-          </a:solidFill>
-          <a:ln/>
-          <a:effectLst>
-            <a:outerShdw sx="100000" sy="100000" kx="0" ky="0" algn="bl" rotWithShape="0" blurRad="101600" dist="38100" dir="2700000">
-              <a:srgbClr val="000000">
-                <a:alpha val="12000"/>
-              </a:srgbClr>
-            </a:outerShdw>
-          </a:effectLst>
-        </p:spPr>
-      </p:sp>
-      <p:sp>
-        <p:nvSpPr>
-          <p:cNvPr id="10" name="Text 8"/>
-          <p:cNvSpPr/>
-          <p:nvPr/>
-        </p:nvSpPr>
-        <p:spPr>
-          <a:xfrm>
-            <a:off x="594360" y="2606040"/>
-            <a:ext cx="7863840" cy="384048"/>
-          </a:xfrm>
-          <a:prstGeom prst="rect">
-            <a:avLst/>
-          </a:prstGeom>
-          <a:noFill/>
-          <a:ln/>
-        </p:spPr>
-        <p:txBody>
-          <a:bodyPr wrap="square" lIns="0" tIns="0" rIns="0" bIns="0" rtlCol="0" anchor="ctr"/>
-          <a:lstStyle/>
-          <a:p>
-            <a:pPr indent="0" marL="0">
-              <a:buNone/>
-            </a:pPr>
-            <a:r>
-              <a:rPr lang="en-US" sz="1500" dirty="0">
-                <a:solidFill>
-                  <a:srgbClr val="1E293B"/>
-                </a:solidFill>
-                <a:latin typeface="Calibri" pitchFamily="34" charset="0"/>
-                <a:ea typeface="Calibri" pitchFamily="34" charset="-122"/>
-                <a:cs typeface="Calibri" pitchFamily="34" charset="-120"/>
-              </a:rPr>
-              <a:t>🌱  celebration — base word: celebrate</a:t>
-            </a:r>
-            <a:endParaRPr lang="en-US" sz="1500" dirty="0"/>
-          </a:p>
-        </p:txBody>
-      </p:sp>
-      <p:sp>
-        <p:nvSpPr>
-          <p:cNvPr id="11" name="Shape 9"/>
-          <p:cNvSpPr/>
-          <p:nvPr/>
-        </p:nvSpPr>
-        <p:spPr>
-          <a:xfrm>
-            <a:off x="365760" y="3182112"/>
-            <a:ext cx="8412480" cy="621792"/>
-          </a:xfrm>
-          <a:prstGeom prst="roundRect">
-            <a:avLst>
-              <a:gd name="adj" fmla="val 14706"/>
-            </a:avLst>
-          </a:prstGeom>
-          <a:solidFill>
-            <a:srgbClr val="F8F4FF"/>
-          </a:solidFill>
-          <a:ln/>
-          <a:effectLst>
-            <a:outerShdw sx="100000" sy="100000" kx="0" ky="0" algn="bl" rotWithShape="0" blurRad="101600" dist="38100" dir="2700000">
-              <a:srgbClr val="000000">
-                <a:alpha val="12000"/>
-              </a:srgbClr>
-            </a:outerShdw>
-          </a:effectLst>
-        </p:spPr>
-      </p:sp>
-      <p:sp>
-        <p:nvSpPr>
-          <p:cNvPr id="12" name="Text 10"/>
-          <p:cNvSpPr/>
-          <p:nvPr/>
-        </p:nvSpPr>
-        <p:spPr>
-          <a:xfrm>
-            <a:off x="594360" y="3300984"/>
-            <a:ext cx="7863840" cy="384048"/>
-          </a:xfrm>
-          <a:prstGeom prst="rect">
-            <a:avLst/>
-          </a:prstGeom>
-          <a:noFill/>
-          <a:ln/>
-        </p:spPr>
-        <p:txBody>
-          <a:bodyPr wrap="square" lIns="0" tIns="0" rIns="0" bIns="0" rtlCol="0" anchor="ctr"/>
-          <a:lstStyle/>
-          <a:p>
-            <a:pPr indent="0" marL="0">
-              <a:buNone/>
-            </a:pPr>
-            <a:r>
-              <a:rPr lang="en-US" sz="1500" dirty="0">
-                <a:solidFill>
-                  <a:srgbClr val="1E293B"/>
-                </a:solidFill>
-                <a:latin typeface="Calibri" pitchFamily="34" charset="0"/>
-                <a:ea typeface="Calibri" pitchFamily="34" charset="-122"/>
-                <a:cs typeface="Calibri" pitchFamily="34" charset="-120"/>
-              </a:rPr>
-              <a:t>🌱  invention — base word: invent</a:t>
-            </a:r>
-            <a:endParaRPr lang="en-US" sz="1500" dirty="0"/>
+              <a:t>The Princess Pea walked out of the dungeon and into the light of the great hall at last.</a:t>
+            </a:r>
+            <a:endParaRPr lang="en-US" sz="1400" dirty="0"/>
+          </a:p>
+          <a:p>
+            <a:pPr indent="0" marL="0">
+              <a:buNone/>
+            </a:pPr>
+            <a:endParaRPr lang="en-US" sz="1400" dirty="0"/>
           </a:p>
         </p:txBody>
       </p:sp>
